--- a/lecons/F1/16_F1_M3_FS01_Atmospheric_Disturbances_in_Cameroon.pptx
+++ b/lecons/F1/16_F1_M3_FS01_Atmospheric_Disturbances_in_Cameroon.pptx
@@ -56,9 +56,14 @@
     <p:sldId id="304" r:id="rId50"/>
     <p:sldId id="305" r:id="rId51"/>
     <p:sldId id="306" r:id="rId52"/>
+    <p:sldId id="307" r:id="rId53"/>
+    <p:sldId id="308" r:id="rId54"/>
+    <p:sldId id="309" r:id="rId55"/>
+    <p:sldId id="310" r:id="rId56"/>
+    <p:sldId id="311" r:id="rId57"/>
   </p:sldIdLst>
   <p:notesMasterIdLst>
-    <p:notesMasterId r:id="rId53"/>
+    <p:notesMasterId r:id="rId58"/>
   </p:notesMasterIdLst>
   <p:sldSz cx="12192000" cy="6858000"/>
   <p:notesSz cx="6858000" cy="12192000"/>
@@ -640,7 +645,7 @@
           <a:p>
             <a:r>
               <a:rPr lang="en-US" dirty="0"/>
-              <a:t>Listen carefully to this situation from real life. In August, heavy rain floods several quarters of Garoua and Maroua. In March, a heat wave makes the nights very hot and many people fall sick. Think about it, because I am going to ask you some questions.</a:t>
+              <a:t>Listen carefully to this situation from real life. In August, heavy rain floods several quarters of Garoua and Maroua. In March, a heat wave makes the nights very hot, and many people fall sick. The mayor asks the population: "Which dangerous weather do we face, and how can we protect ourselves?" Think about it, because I am going to ask you some questions.</a:t>
             </a:r>
             <a:endParaRPr lang="en-US" dirty="0"/>
           </a:p>
@@ -816,7 +821,7 @@
           <a:p>
             <a:r>
               <a:rPr lang="en-US" dirty="0"/>
-              <a:t>Good. Floods and heat waves affect people in the north.</a:t>
+              <a:t>Good. The people do not know how to protect themselves from the dangerous weather of the north.</a:t>
             </a:r>
             <a:endParaRPr lang="en-US" dirty="0"/>
           </a:p>
@@ -1608,7 +1613,7 @@
           <a:p>
             <a:r>
               <a:rPr lang="en-US" dirty="0"/>
-              <a:t>Here is the question for Activity 1: Which disturbances are common in the north and which in the south of Cameroon? Take one minute to think and write your answer in your rough notebook.</a:t>
+              <a:t>Here is the question for Activity 1: Which dangerous weather is common in the north of Cameroon? Take one minute to think and write your answer in your rough notebook.</a:t>
             </a:r>
             <a:endParaRPr lang="en-US" dirty="0"/>
           </a:p>
@@ -1696,7 +1701,7 @@
           <a:p>
             <a:r>
               <a:rPr lang="en-US" dirty="0"/>
-              <a:t>Let us check the answer together. North: dust storms, heat waves and floods after heavy storms. South: torrential rain, thunderstorms and floods.</a:t>
+              <a:t>Let us check the answer together. Dust storms, heat waves and floods after heavy storms.</a:t>
             </a:r>
             <a:endParaRPr lang="en-US" dirty="0"/>
           </a:p>
@@ -1784,7 +1789,7 @@
           <a:p>
             <a:r>
               <a:rPr lang="en-US" dirty="0"/>
-              <a:t>Activity 2. Look carefully at this picture: torrential rain in a town. Observe every detail before I ask the question.</a:t>
+              <a:t>Activity 2. Look carefully at this picture: heavy rain in a town. Observe every detail before I ask the question.</a:t>
             </a:r>
             <a:endParaRPr lang="en-US" dirty="0"/>
           </a:p>
@@ -1960,7 +1965,7 @@
           <a:p>
             <a:r>
               <a:rPr lang="en-US" dirty="0"/>
-              <a:t>Let us check the answer together. Very heavy rain in a short time, with water running in the streets.</a:t>
+              <a:t>Let us check the answer together. Very heavy rain falls in a short time, and water runs in the streets.</a:t>
             </a:r>
             <a:endParaRPr lang="en-US" dirty="0"/>
           </a:p>
@@ -2136,7 +2141,7 @@
           <a:p>
             <a:r>
               <a:rPr lang="en-US" dirty="0"/>
-              <a:t>Here is the question for Activity 3: What are the signs of the Harmattan and dust storms? Take one minute to think and write your answer in your rough notebook.</a:t>
+              <a:t>Here is the question for Activity 3: What are the signs of the Harmattan? Take one minute to think and write your answer in your rough notebook.</a:t>
             </a:r>
             <a:endParaRPr lang="en-US" dirty="0"/>
           </a:p>
@@ -2400,7 +2405,7 @@
           <a:p>
             <a:r>
               <a:rPr lang="en-US" dirty="0"/>
-              <a:t>Here is the question for Activity 4: Give three consequences of floods in Cameroon. Take one minute to think and write your answer in your rough notebook.</a:t>
+              <a:t>Here is the question for Activity 4: What happens to houses and crops during a flood? Take one minute to think and write your answer in your rough notebook.</a:t>
             </a:r>
             <a:endParaRPr lang="en-US" dirty="0"/>
           </a:p>
@@ -2576,7 +2581,7 @@
           <a:p>
             <a:r>
               <a:rPr lang="en-US" dirty="0"/>
-              <a:t>Let us check the answer together. Houses and crops are destroyed, people die or lose their homes, and diseases like cholera spread.</a:t>
+              <a:t>Let us check the answer together. They are destroyed, and people lose their homes and food.</a:t>
             </a:r>
             <a:endParaRPr lang="en-US" dirty="0"/>
           </a:p>
@@ -2752,7 +2757,7 @@
           <a:p>
             <a:r>
               <a:rPr lang="en-US" dirty="0"/>
-              <a:t>Here is the question for Activity 5: Give three measures against these disturbances. Take one minute to think and write your answer in your rough notebook.</a:t>
+              <a:t>Here is the question for Activity 5: How can planting trees protect people from dust storms? Take one minute to think and write your answer in your rough notebook.</a:t>
             </a:r>
             <a:endParaRPr lang="en-US" dirty="0"/>
           </a:p>
@@ -2840,7 +2845,7 @@
           <a:p>
             <a:r>
               <a:rPr lang="en-US" dirty="0"/>
-              <a:t>Let us check the answer together. Clean gutters and build drains, plant trees and windbreaks, and build strong houses away from rivers.</a:t>
+              <a:t>Let us check the answer together. Trees slow down the wind and hold the soil, so there is less dust.</a:t>
             </a:r>
             <a:endParaRPr lang="en-US" dirty="0"/>
           </a:p>
@@ -3016,7 +3021,7 @@
           <a:p>
             <a:r>
               <a:rPr lang="en-US" dirty="0"/>
-              <a:t>Let us copy Identification and Manifestations. Cameroon faces the following atmospheric disturbances. On this slide we have Thunderstorms and torrential rain and Floods. Write each point on a new line, with the key term first, and explain it in your own words when we revise. When you finish, we go to the next slide.</a:t>
+              <a:t>Let us copy the definitions. The key terms of this lesson are defined as follows. On this slide we have Adaptation and Mitigation. Write each point on a new line, with the key term first, and explain it in your own words when we revise.</a:t>
             </a:r>
             <a:endParaRPr lang="en-US" dirty="0"/>
           </a:p>
@@ -3104,7 +3109,7 @@
           <a:p>
             <a:r>
               <a:rPr lang="en-US" dirty="0"/>
-              <a:t>We continue with Identification and Manifestations. On this slide we have Dust storms and the Harmattan and Heat waves. Write each point on a new line, with the key term first, and explain it in your own words when we revise.</a:t>
+              <a:t>Let us copy Identification and Manifestations. Cameroon faces the following atmospheric disturbances. Copy the point on Thunderstorms and torrential rain on the left, then draw the diagram on the right: torrential rain. Give it a title and label it clearly.</a:t>
             </a:r>
             <a:endParaRPr lang="en-US" dirty="0"/>
           </a:p>
@@ -3192,7 +3197,7 @@
           <a:p>
             <a:r>
               <a:rPr lang="en-US" dirty="0"/>
-              <a:t>Let us copy Consequences. These disturbances have the following consequences. On this slide we have Material damage and Human consequences. Write each point on a new line, with the key term first, and explain it in your own words when we revise.</a:t>
+              <a:t>Copy the point on Floods on the left, then draw the diagram on the right: a flooded village. Give it a title and label it clearly.</a:t>
             </a:r>
             <a:endParaRPr lang="en-US" dirty="0"/>
           </a:p>
@@ -3280,7 +3285,7 @@
           <a:p>
             <a:r>
               <a:rPr lang="en-US" dirty="0"/>
-              <a:t>Let us copy Adaptation and Mitigation. The following measures reduce the effects of disturbances. On this slide we have Building and Environment. Write each point on a new line, with the key term first, and explain it in your own words when we revise. When you finish, we go to the next slide.</a:t>
+              <a:t>Copy the point on Dust storms and the Harmattan on the left, then draw the diagram on the right: a dusty Harmattan sky. Give it a title and label it clearly.</a:t>
             </a:r>
             <a:endParaRPr lang="en-US" dirty="0"/>
           </a:p>
@@ -3368,7 +3373,7 @@
           <a:p>
             <a:r>
               <a:rPr lang="en-US" dirty="0"/>
-              <a:t>We continue with Adaptation and Mitigation. On this slide we have Warnings. Write each point on a new line, with the key term first, and explain it in your own words when we revise.</a:t>
+              <a:t>Copy the point on Heat waves on the left, then draw the diagram on the right: dry, hot land. Give it a title and label it clearly.</a:t>
             </a:r>
             <a:endParaRPr lang="en-US" dirty="0"/>
           </a:p>
@@ -3544,7 +3549,7 @@
           <a:p>
             <a:r>
               <a:rPr lang="en-US" dirty="0"/>
-              <a:t>Now let us check what you have understood. Question 1: Name three atmospheric disturbances of Cameroon. Answer in your exercise book.</a:t>
+              <a:t>Let us copy Consequences. These disturbances have the following consequences. On this slide we have Material damage and Loss of life. Write each point on a new line, with the key term first, and explain it in your own words when we revise. When you finish, we go to the next slide.</a:t>
             </a:r>
             <a:endParaRPr lang="en-US" dirty="0"/>
           </a:p>
@@ -3632,7 +3637,7 @@
           <a:p>
             <a:r>
               <a:rPr lang="en-US" dirty="0"/>
-              <a:t>The expected answer is: thunderstorms, floods and dust storms (also heat waves). If you got it right, well done.</a:t>
+              <a:t>We continue with Consequences. On this slide we have Diseases and Food shortage. Write each point on a new line, with the key term first, and explain it in your own words when we revise.</a:t>
             </a:r>
             <a:endParaRPr lang="en-US" dirty="0"/>
           </a:p>
@@ -3720,7 +3725,7 @@
           <a:p>
             <a:r>
               <a:rPr lang="en-US" dirty="0"/>
-              <a:t>Now let us check what you have understood. Question 2: Give two measures against floods. Answer in your exercise book.</a:t>
+              <a:t>Let us copy Adaptation and Mitigation Strategies. The following strategies reduce the effects of disturbances. On this slide we have Drainage and Safe building. Write each point on a new line, with the key term first, and explain it in your own words when we revise.</a:t>
             </a:r>
             <a:endParaRPr lang="en-US" dirty="0"/>
           </a:p>
@@ -3808,7 +3813,7 @@
           <a:p>
             <a:r>
               <a:rPr lang="en-US" dirty="0"/>
-              <a:t>The expected answer is: clean gutters and avoid building near rivers. If you got it right, well done.</a:t>
+              <a:t>Copy the point on Trees and windbreaks on the left, then draw the diagram on the right: planting trees. Give it a title and label it clearly.</a:t>
             </a:r>
             <a:endParaRPr lang="en-US" dirty="0"/>
           </a:p>
@@ -3896,7 +3901,7 @@
           <a:p>
             <a:r>
               <a:rPr lang="en-US" dirty="0"/>
-              <a:t>For those who need more practice, fill in the blanks in your exercise book. The answers are: number 1, torrential; number 2, dry; number 3, floods.</a:t>
+              <a:t>We continue with Adaptation and Mitigation Strategies. On this slide we have Warnings and health. Write each point on a new line, with the key term first, and explain it in your own words when we revise.</a:t>
             </a:r>
             <a:endParaRPr lang="en-US" dirty="0"/>
           </a:p>
@@ -3984,7 +3989,7 @@
           <a:p>
             <a:r>
               <a:rPr lang="en-US" dirty="0"/>
-              <a:t>For your homework: Ask an elder about a flood or a violent storm in your town and write what happened. We shall correct it at the beginning of our next lesson.</a:t>
+              <a:t>Now let us check what you have understood. Question 1: Name three atmospheric disturbances of Cameroon. Answer in your exercise book.</a:t>
             </a:r>
             <a:endParaRPr lang="en-US" dirty="0"/>
           </a:p>
@@ -4072,7 +4077,7 @@
           <a:p>
             <a:r>
               <a:rPr lang="en-US" dirty="0"/>
-              <a:t>Our next lesson will be on Practical Work 6: Mechanisms of Rain Formation. Thank you for your attention, and see you next time.</a:t>
+              <a:t>The expected answer is: thunderstorms, floods and dust storms (also heat waves). If you got it right, well done.</a:t>
             </a:r>
             <a:endParaRPr lang="en-US" dirty="0"/>
           </a:p>
@@ -4160,7 +4165,7 @@
           <a:p>
             <a:r>
               <a:rPr lang="en-US" dirty="0"/>
-              <a:t>Let us play the bilingual game. I say a word in English, and you give me the French word. Then we do the reverse.</a:t>
+              <a:t>Now let us check what you have understood. Question 2: Give two measures against floods. Answer in your exercise book.</a:t>
             </a:r>
             <a:endParaRPr lang="en-US" dirty="0"/>
           </a:p>
@@ -4248,7 +4253,7 @@
           <a:p>
             <a:r>
               <a:rPr lang="en-US" dirty="0"/>
-              <a:t>I record this information in the official logbook of the class after the lesson.</a:t>
+              <a:t>The expected answer is: clean gutters and avoid building near rivers. If you got it right, well done.</a:t>
             </a:r>
             <a:endParaRPr lang="en-US" dirty="0"/>
           </a:p>
@@ -4336,7 +4341,7 @@
           <a:p>
             <a:r>
               <a:rPr lang="en-US" dirty="0"/>
-              <a:t>I complete the second page of the logbook: the matter taught, the evaluation, the homework and the attendance.</a:t>
+              <a:t>For those who need more practice, fill in the blanks in your exercise book. The answers are: number 1, torrential; number 2, dry; number 3, floods.</a:t>
             </a:r>
             <a:endParaRPr lang="en-US" dirty="0"/>
           </a:p>
@@ -4512,7 +4517,7 @@
           <a:p>
             <a:r>
               <a:rPr lang="en-US" dirty="0"/>
-              <a:t>This slide is for me, the teacher: it gives the timing of the lesson and what to do if the projector is not available.</a:t>
+              <a:t>For your homework: Ask an elder about a flood or a violent storm in your town and write what happened. We shall correct it at the beginning of our next lesson.</a:t>
             </a:r>
             <a:endParaRPr lang="en-US" dirty="0"/>
           </a:p>
@@ -4600,7 +4605,7 @@
           <a:p>
             <a:r>
               <a:rPr lang="en-US" dirty="0"/>
-              <a:t>These are the references and picture credits used to prepare this lesson.</a:t>
+              <a:t>Our next lesson will be on Practical Work 6: Mechanisms of Rain Formation. Thank you for your attention, and see you next time.</a:t>
             </a:r>
             <a:endParaRPr lang="en-US" dirty="0"/>
           </a:p>
@@ -4624,6 +4629,446 @@
             <a:fld id="{F7021451-1387-4CA6-816F-3879F97B5CBC}" type="slidenum">
               <a:rPr lang="en-US"/>
               <a:t>51</a:t>
+            </a:fld>
+            <a:endParaRPr lang="en-US"/>
+          </a:p>
+        </p:txBody>
+      </p:sp>
+    </p:spTree>
+    <p:extLst>
+      <p:ext uri="{BB962C8B-B14F-4D97-AF65-F5344CB8AC3E}">
+        <p14:creationId xmlns:p14="http://schemas.microsoft.com/office/powerpoint/2010/main" val="1024086991"/>
+      </p:ext>
+    </p:extLst>
+  </p:cSld>
+  <p:clrMapOvr>
+    <a:masterClrMapping/>
+  </p:clrMapOvr>
+</p:notes>
+</file>
+
+<file path=ppt/notesSlides/notesSlide52.xml><?xml version="1.0" encoding="utf-8"?>
+<p:notes xmlns:a="http://schemas.openxmlformats.org/drawingml/2006/main" xmlns:r="http://schemas.openxmlformats.org/officeDocument/2006/relationships" xmlns:p="http://schemas.openxmlformats.org/presentationml/2006/main">
+  <p:cSld>
+    <p:spTree>
+      <p:nvGrpSpPr>
+        <p:cNvPr id="1" name=""/>
+        <p:cNvGrpSpPr/>
+        <p:nvPr/>
+      </p:nvGrpSpPr>
+      <p:grpSpPr>
+        <a:xfrm>
+          <a:off x="0" y="0"/>
+          <a:ext cx="0" cy="0"/>
+          <a:chOff x="0" y="0"/>
+          <a:chExt cx="0" cy="0"/>
+        </a:xfrm>
+      </p:grpSpPr>
+      <p:sp>
+        <p:nvSpPr>
+          <p:cNvPr id="2" name="Slide Image Placeholder 1"/>
+          <p:cNvSpPr>
+            <a:spLocks noGrp="1" noRot="1" noChangeAspect="1"/>
+          </p:cNvSpPr>
+          <p:nvPr>
+            <p:ph type="sldImg"/>
+          </p:nvPr>
+        </p:nvSpPr>
+        <p:spPr/>
+      </p:sp>
+      <p:sp>
+        <p:nvSpPr>
+          <p:cNvPr id="3" name="Notes Placeholder 2"/>
+          <p:cNvSpPr>
+            <a:spLocks noGrp="1"/>
+          </p:cNvSpPr>
+          <p:nvPr>
+            <p:ph type="body" idx="1"/>
+          </p:nvPr>
+        </p:nvSpPr>
+        <p:spPr/>
+        <p:txBody>
+          <a:bodyPr/>
+          <a:lstStyle/>
+          <a:p>
+            <a:r>
+              <a:rPr lang="en-US" dirty="0"/>
+              <a:t>Let us play the bilingual game. I say a word in English, and you give me the French word. Then we do the reverse.</a:t>
+            </a:r>
+            <a:endParaRPr lang="en-US" dirty="0"/>
+          </a:p>
+        </p:txBody>
+      </p:sp>
+      <p:sp>
+        <p:nvSpPr>
+          <p:cNvPr id="4" name="Slide Number Placeholder 3"/>
+          <p:cNvSpPr>
+            <a:spLocks noGrp="1"/>
+          </p:cNvSpPr>
+          <p:nvPr>
+            <p:ph type="sldNum" sz="quarter" idx="10"/>
+          </p:nvPr>
+        </p:nvSpPr>
+        <p:spPr/>
+        <p:txBody>
+          <a:bodyPr/>
+          <a:lstStyle/>
+          <a:p>
+            <a:fld id="{F7021451-1387-4CA6-816F-3879F97B5CBC}" type="slidenum">
+              <a:rPr lang="en-US"/>
+              <a:t>52</a:t>
+            </a:fld>
+            <a:endParaRPr lang="en-US"/>
+          </a:p>
+        </p:txBody>
+      </p:sp>
+    </p:spTree>
+    <p:extLst>
+      <p:ext uri="{BB962C8B-B14F-4D97-AF65-F5344CB8AC3E}">
+        <p14:creationId xmlns:p14="http://schemas.microsoft.com/office/powerpoint/2010/main" val="1024086991"/>
+      </p:ext>
+    </p:extLst>
+  </p:cSld>
+  <p:clrMapOvr>
+    <a:masterClrMapping/>
+  </p:clrMapOvr>
+</p:notes>
+</file>
+
+<file path=ppt/notesSlides/notesSlide53.xml><?xml version="1.0" encoding="utf-8"?>
+<p:notes xmlns:a="http://schemas.openxmlformats.org/drawingml/2006/main" xmlns:r="http://schemas.openxmlformats.org/officeDocument/2006/relationships" xmlns:p="http://schemas.openxmlformats.org/presentationml/2006/main">
+  <p:cSld>
+    <p:spTree>
+      <p:nvGrpSpPr>
+        <p:cNvPr id="1" name=""/>
+        <p:cNvGrpSpPr/>
+        <p:nvPr/>
+      </p:nvGrpSpPr>
+      <p:grpSpPr>
+        <a:xfrm>
+          <a:off x="0" y="0"/>
+          <a:ext cx="0" cy="0"/>
+          <a:chOff x="0" y="0"/>
+          <a:chExt cx="0" cy="0"/>
+        </a:xfrm>
+      </p:grpSpPr>
+      <p:sp>
+        <p:nvSpPr>
+          <p:cNvPr id="2" name="Slide Image Placeholder 1"/>
+          <p:cNvSpPr>
+            <a:spLocks noGrp="1" noRot="1" noChangeAspect="1"/>
+          </p:cNvSpPr>
+          <p:nvPr>
+            <p:ph type="sldImg"/>
+          </p:nvPr>
+        </p:nvSpPr>
+        <p:spPr/>
+      </p:sp>
+      <p:sp>
+        <p:nvSpPr>
+          <p:cNvPr id="3" name="Notes Placeholder 2"/>
+          <p:cNvSpPr>
+            <a:spLocks noGrp="1"/>
+          </p:cNvSpPr>
+          <p:nvPr>
+            <p:ph type="body" idx="1"/>
+          </p:nvPr>
+        </p:nvSpPr>
+        <p:spPr/>
+        <p:txBody>
+          <a:bodyPr/>
+          <a:lstStyle/>
+          <a:p>
+            <a:r>
+              <a:rPr lang="en-US" dirty="0"/>
+              <a:t>I record this information in the official logbook of the class after the lesson.</a:t>
+            </a:r>
+            <a:endParaRPr lang="en-US" dirty="0"/>
+          </a:p>
+        </p:txBody>
+      </p:sp>
+      <p:sp>
+        <p:nvSpPr>
+          <p:cNvPr id="4" name="Slide Number Placeholder 3"/>
+          <p:cNvSpPr>
+            <a:spLocks noGrp="1"/>
+          </p:cNvSpPr>
+          <p:nvPr>
+            <p:ph type="sldNum" sz="quarter" idx="10"/>
+          </p:nvPr>
+        </p:nvSpPr>
+        <p:spPr/>
+        <p:txBody>
+          <a:bodyPr/>
+          <a:lstStyle/>
+          <a:p>
+            <a:fld id="{F7021451-1387-4CA6-816F-3879F97B5CBC}" type="slidenum">
+              <a:rPr lang="en-US"/>
+              <a:t>53</a:t>
+            </a:fld>
+            <a:endParaRPr lang="en-US"/>
+          </a:p>
+        </p:txBody>
+      </p:sp>
+    </p:spTree>
+    <p:extLst>
+      <p:ext uri="{BB962C8B-B14F-4D97-AF65-F5344CB8AC3E}">
+        <p14:creationId xmlns:p14="http://schemas.microsoft.com/office/powerpoint/2010/main" val="1024086991"/>
+      </p:ext>
+    </p:extLst>
+  </p:cSld>
+  <p:clrMapOvr>
+    <a:masterClrMapping/>
+  </p:clrMapOvr>
+</p:notes>
+</file>
+
+<file path=ppt/notesSlides/notesSlide54.xml><?xml version="1.0" encoding="utf-8"?>
+<p:notes xmlns:a="http://schemas.openxmlformats.org/drawingml/2006/main" xmlns:r="http://schemas.openxmlformats.org/officeDocument/2006/relationships" xmlns:p="http://schemas.openxmlformats.org/presentationml/2006/main">
+  <p:cSld>
+    <p:spTree>
+      <p:nvGrpSpPr>
+        <p:cNvPr id="1" name=""/>
+        <p:cNvGrpSpPr/>
+        <p:nvPr/>
+      </p:nvGrpSpPr>
+      <p:grpSpPr>
+        <a:xfrm>
+          <a:off x="0" y="0"/>
+          <a:ext cx="0" cy="0"/>
+          <a:chOff x="0" y="0"/>
+          <a:chExt cx="0" cy="0"/>
+        </a:xfrm>
+      </p:grpSpPr>
+      <p:sp>
+        <p:nvSpPr>
+          <p:cNvPr id="2" name="Slide Image Placeholder 1"/>
+          <p:cNvSpPr>
+            <a:spLocks noGrp="1" noRot="1" noChangeAspect="1"/>
+          </p:cNvSpPr>
+          <p:nvPr>
+            <p:ph type="sldImg"/>
+          </p:nvPr>
+        </p:nvSpPr>
+        <p:spPr/>
+      </p:sp>
+      <p:sp>
+        <p:nvSpPr>
+          <p:cNvPr id="3" name="Notes Placeholder 2"/>
+          <p:cNvSpPr>
+            <a:spLocks noGrp="1"/>
+          </p:cNvSpPr>
+          <p:nvPr>
+            <p:ph type="body" idx="1"/>
+          </p:nvPr>
+        </p:nvSpPr>
+        <p:spPr/>
+        <p:txBody>
+          <a:bodyPr/>
+          <a:lstStyle/>
+          <a:p>
+            <a:r>
+              <a:rPr lang="en-US" dirty="0"/>
+              <a:t>I complete the second page of the logbook: the matter taught, the evaluation, the homework and the attendance.</a:t>
+            </a:r>
+            <a:endParaRPr lang="en-US" dirty="0"/>
+          </a:p>
+        </p:txBody>
+      </p:sp>
+      <p:sp>
+        <p:nvSpPr>
+          <p:cNvPr id="4" name="Slide Number Placeholder 3"/>
+          <p:cNvSpPr>
+            <a:spLocks noGrp="1"/>
+          </p:cNvSpPr>
+          <p:nvPr>
+            <p:ph type="sldNum" sz="quarter" idx="10"/>
+          </p:nvPr>
+        </p:nvSpPr>
+        <p:spPr/>
+        <p:txBody>
+          <a:bodyPr/>
+          <a:lstStyle/>
+          <a:p>
+            <a:fld id="{F7021451-1387-4CA6-816F-3879F97B5CBC}" type="slidenum">
+              <a:rPr lang="en-US"/>
+              <a:t>54</a:t>
+            </a:fld>
+            <a:endParaRPr lang="en-US"/>
+          </a:p>
+        </p:txBody>
+      </p:sp>
+    </p:spTree>
+    <p:extLst>
+      <p:ext uri="{BB962C8B-B14F-4D97-AF65-F5344CB8AC3E}">
+        <p14:creationId xmlns:p14="http://schemas.microsoft.com/office/powerpoint/2010/main" val="1024086991"/>
+      </p:ext>
+    </p:extLst>
+  </p:cSld>
+  <p:clrMapOvr>
+    <a:masterClrMapping/>
+  </p:clrMapOvr>
+</p:notes>
+</file>
+
+<file path=ppt/notesSlides/notesSlide55.xml><?xml version="1.0" encoding="utf-8"?>
+<p:notes xmlns:a="http://schemas.openxmlformats.org/drawingml/2006/main" xmlns:r="http://schemas.openxmlformats.org/officeDocument/2006/relationships" xmlns:p="http://schemas.openxmlformats.org/presentationml/2006/main">
+  <p:cSld>
+    <p:spTree>
+      <p:nvGrpSpPr>
+        <p:cNvPr id="1" name=""/>
+        <p:cNvGrpSpPr/>
+        <p:nvPr/>
+      </p:nvGrpSpPr>
+      <p:grpSpPr>
+        <a:xfrm>
+          <a:off x="0" y="0"/>
+          <a:ext cx="0" cy="0"/>
+          <a:chOff x="0" y="0"/>
+          <a:chExt cx="0" cy="0"/>
+        </a:xfrm>
+      </p:grpSpPr>
+      <p:sp>
+        <p:nvSpPr>
+          <p:cNvPr id="2" name="Slide Image Placeholder 1"/>
+          <p:cNvSpPr>
+            <a:spLocks noGrp="1" noRot="1" noChangeAspect="1"/>
+          </p:cNvSpPr>
+          <p:nvPr>
+            <p:ph type="sldImg"/>
+          </p:nvPr>
+        </p:nvSpPr>
+        <p:spPr/>
+      </p:sp>
+      <p:sp>
+        <p:nvSpPr>
+          <p:cNvPr id="3" name="Notes Placeholder 2"/>
+          <p:cNvSpPr>
+            <a:spLocks noGrp="1"/>
+          </p:cNvSpPr>
+          <p:nvPr>
+            <p:ph type="body" idx="1"/>
+          </p:nvPr>
+        </p:nvSpPr>
+        <p:spPr/>
+        <p:txBody>
+          <a:bodyPr/>
+          <a:lstStyle/>
+          <a:p>
+            <a:r>
+              <a:rPr lang="en-US" dirty="0"/>
+              <a:t>This slide is for me, the teacher: it gives the timing of the lesson and what to do if the projector is not available.</a:t>
+            </a:r>
+            <a:endParaRPr lang="en-US" dirty="0"/>
+          </a:p>
+        </p:txBody>
+      </p:sp>
+      <p:sp>
+        <p:nvSpPr>
+          <p:cNvPr id="4" name="Slide Number Placeholder 3"/>
+          <p:cNvSpPr>
+            <a:spLocks noGrp="1"/>
+          </p:cNvSpPr>
+          <p:nvPr>
+            <p:ph type="sldNum" sz="quarter" idx="10"/>
+          </p:nvPr>
+        </p:nvSpPr>
+        <p:spPr/>
+        <p:txBody>
+          <a:bodyPr/>
+          <a:lstStyle/>
+          <a:p>
+            <a:fld id="{F7021451-1387-4CA6-816F-3879F97B5CBC}" type="slidenum">
+              <a:rPr lang="en-US"/>
+              <a:t>55</a:t>
+            </a:fld>
+            <a:endParaRPr lang="en-US"/>
+          </a:p>
+        </p:txBody>
+      </p:sp>
+    </p:spTree>
+    <p:extLst>
+      <p:ext uri="{BB962C8B-B14F-4D97-AF65-F5344CB8AC3E}">
+        <p14:creationId xmlns:p14="http://schemas.microsoft.com/office/powerpoint/2010/main" val="1024086991"/>
+      </p:ext>
+    </p:extLst>
+  </p:cSld>
+  <p:clrMapOvr>
+    <a:masterClrMapping/>
+  </p:clrMapOvr>
+</p:notes>
+</file>
+
+<file path=ppt/notesSlides/notesSlide56.xml><?xml version="1.0" encoding="utf-8"?>
+<p:notes xmlns:a="http://schemas.openxmlformats.org/drawingml/2006/main" xmlns:r="http://schemas.openxmlformats.org/officeDocument/2006/relationships" xmlns:p="http://schemas.openxmlformats.org/presentationml/2006/main">
+  <p:cSld>
+    <p:spTree>
+      <p:nvGrpSpPr>
+        <p:cNvPr id="1" name=""/>
+        <p:cNvGrpSpPr/>
+        <p:nvPr/>
+      </p:nvGrpSpPr>
+      <p:grpSpPr>
+        <a:xfrm>
+          <a:off x="0" y="0"/>
+          <a:ext cx="0" cy="0"/>
+          <a:chOff x="0" y="0"/>
+          <a:chExt cx="0" cy="0"/>
+        </a:xfrm>
+      </p:grpSpPr>
+      <p:sp>
+        <p:nvSpPr>
+          <p:cNvPr id="2" name="Slide Image Placeholder 1"/>
+          <p:cNvSpPr>
+            <a:spLocks noGrp="1" noRot="1" noChangeAspect="1"/>
+          </p:cNvSpPr>
+          <p:nvPr>
+            <p:ph type="sldImg"/>
+          </p:nvPr>
+        </p:nvSpPr>
+        <p:spPr/>
+      </p:sp>
+      <p:sp>
+        <p:nvSpPr>
+          <p:cNvPr id="3" name="Notes Placeholder 2"/>
+          <p:cNvSpPr>
+            <a:spLocks noGrp="1"/>
+          </p:cNvSpPr>
+          <p:nvPr>
+            <p:ph type="body" idx="1"/>
+          </p:nvPr>
+        </p:nvSpPr>
+        <p:spPr/>
+        <p:txBody>
+          <a:bodyPr/>
+          <a:lstStyle/>
+          <a:p>
+            <a:r>
+              <a:rPr lang="en-US" dirty="0"/>
+              <a:t>These are the references and picture credits used to prepare this lesson.</a:t>
+            </a:r>
+            <a:endParaRPr lang="en-US" dirty="0"/>
+          </a:p>
+        </p:txBody>
+      </p:sp>
+      <p:sp>
+        <p:nvSpPr>
+          <p:cNvPr id="4" name="Slide Number Placeholder 3"/>
+          <p:cNvSpPr>
+            <a:spLocks noGrp="1"/>
+          </p:cNvSpPr>
+          <p:nvPr>
+            <p:ph type="sldNum" sz="quarter" idx="10"/>
+          </p:nvPr>
+        </p:nvSpPr>
+        <p:spPr/>
+        <p:txBody>
+          <a:bodyPr/>
+          <a:lstStyle/>
+          <a:p>
+            <a:fld id="{F7021451-1387-4CA6-816F-3879F97B5CBC}" type="slidenum">
+              <a:rPr lang="en-US"/>
+              <a:t>56</a:t>
             </a:fld>
             <a:endParaRPr lang="en-US"/>
           </a:p>
@@ -4864,7 +5309,7 @@
           <a:p>
             <a:r>
               <a:rPr lang="en-US" dirty="0"/>
-              <a:t>By the end of this lesson, you should be able to do three things. Number 1: identify the atmospheric disturbances of Cameroon. Number 2: describe their manifestations and consequences. Number 3: propose adaptation and mitigation strategies.</a:t>
+              <a:t>By the end of this lesson, you should be able to do three things. Number 1: identify the atmospheric disturbances of Cameroon and their manifestations. Number 2: give their consequences. Number 3: propose adaptation and mitigation strategies.</a:t>
             </a:r>
             <a:endParaRPr lang="en-US" dirty="0"/>
           </a:p>
@@ -6332,7 +6777,7 @@
         <p:spPr>
           <a:xfrm>
             <a:off x="0" y="658368"/>
-            <a:ext cx="5120640" cy="5833872"/>
+            <a:ext cx="2468880" cy="5833872"/>
           </a:xfrm>
           <a:prstGeom prst="rect">
             <a:avLst/>
@@ -6347,8 +6792,8 @@
         </p:nvSpPr>
         <p:spPr>
           <a:xfrm>
-            <a:off x="5349240" y="1005840"/>
-            <a:ext cx="6522415" cy="731520"/>
+            <a:off x="2697480" y="1005840"/>
+            <a:ext cx="9174175" cy="731520"/>
           </a:xfrm>
           <a:prstGeom prst="rect">
             <a:avLst/>
@@ -6388,8 +6833,8 @@
         </p:nvSpPr>
         <p:spPr>
           <a:xfrm>
-            <a:off x="5349240" y="1783080"/>
-            <a:ext cx="6522415" cy="4663440"/>
+            <a:off x="2697480" y="1783080"/>
+            <a:ext cx="9174175" cy="4663440"/>
           </a:xfrm>
           <a:prstGeom prst="rect">
             <a:avLst/>
@@ -6416,7 +6861,7 @@
                 <a:ea typeface="Times New Roman" pitchFamily="34" charset="-122"/>
                 <a:cs typeface="Times New Roman" pitchFamily="34" charset="-120"/>
               </a:rPr>
-              <a:t>In August, heavy rain floods several quarters of Garoua and Maroua. In March, a heat wave makes the nights very hot and many people fall sick.</a:t>
+              <a:t>In August, heavy rain floods several quarters of Garoua and Maroua. In March, a heat wave makes the nights very hot, and many people fall sick. The mayor asks the population: "Which dangerous weather do we face, and how can we protect ourselves?"</a:t>
             </a:r>
             <a:endParaRPr lang="en-US" sz="4000" dirty="0"/>
           </a:p>
@@ -6854,7 +7299,7 @@
                 <a:ea typeface="Times New Roman" pitchFamily="34" charset="-122"/>
                 <a:cs typeface="Times New Roman" pitchFamily="34" charset="-120"/>
               </a:rPr>
-              <a:t>Floods and heat waves affect people in the north.</a:t>
+              <a:t>The people do not know how to protect themselves from the dangerous weather of the north.</a:t>
             </a:r>
             <a:endParaRPr lang="en-US" sz="4000" dirty="0"/>
           </a:p>
@@ -9196,7 +9641,7 @@
                 <a:ea typeface="Times New Roman" pitchFamily="34" charset="-122"/>
                 <a:cs typeface="Times New Roman" pitchFamily="34" charset="-120"/>
               </a:rPr>
-              <a:t>Which disturbances are common in the north and which in the south of Cameroon?</a:t>
+              <a:t>Which dangerous weather is common in the north of Cameroon?</a:t>
             </a:r>
             <a:endParaRPr lang="en-US" sz="4000" dirty="0"/>
           </a:p>
@@ -9415,7 +9860,7 @@
                 <a:ea typeface="Times New Roman" pitchFamily="34" charset="-122"/>
                 <a:cs typeface="Times New Roman" pitchFamily="34" charset="-120"/>
               </a:rPr>
-              <a:t>North: dust storms, heat waves and floods after heavy storms. South: torrential rain, thunderstorms and floods.</a:t>
+              <a:t>Dust storms, heat waves and floods after heavy storms.</a:t>
             </a:r>
             <a:endParaRPr lang="en-US" sz="4000" dirty="0"/>
           </a:p>
@@ -9527,7 +9972,7 @@
                 <a:ea typeface="Calibri" pitchFamily="34" charset="-122"/>
                 <a:cs typeface="Calibri" pitchFamily="34" charset="-120"/>
               </a:rPr>
-              <a:t>2. MANIFESTATIONS</a:t>
+              <a:t>1. MANIFESTATIONS</a:t>
             </a:r>
             <a:endParaRPr lang="en-US" sz="1400" dirty="0"/>
           </a:p>
@@ -9629,7 +10074,7 @@
                 <a:ea typeface="Times New Roman" pitchFamily="34" charset="-122"/>
                 <a:cs typeface="Times New Roman" pitchFamily="34" charset="-120"/>
               </a:rPr>
-              <a:t>Torrential rain in a town.</a:t>
+              <a:t>Heavy rain in a town.</a:t>
             </a:r>
             <a:endParaRPr lang="en-US" sz="1800" dirty="0"/>
           </a:p>
@@ -9741,7 +10186,7 @@
                 <a:ea typeface="Calibri" pitchFamily="34" charset="-122"/>
                 <a:cs typeface="Calibri" pitchFamily="34" charset="-120"/>
               </a:rPr>
-              <a:t>2. MANIFESTATIONS</a:t>
+              <a:t>1. MANIFESTATIONS</a:t>
             </a:r>
             <a:endParaRPr lang="en-US" sz="1400" dirty="0"/>
           </a:p>
@@ -9960,7 +10405,7 @@
                 <a:ea typeface="Calibri" pitchFamily="34" charset="-122"/>
                 <a:cs typeface="Calibri" pitchFamily="34" charset="-120"/>
               </a:rPr>
-              <a:t>2. MANIFESTATIONS</a:t>
+              <a:t>1. MANIFESTATIONS</a:t>
             </a:r>
             <a:endParaRPr lang="en-US" sz="1400" dirty="0"/>
           </a:p>
@@ -10067,7 +10512,7 @@
                 <a:ea typeface="Times New Roman" pitchFamily="34" charset="-122"/>
                 <a:cs typeface="Times New Roman" pitchFamily="34" charset="-120"/>
               </a:rPr>
-              <a:t>Very heavy rain in a short time, with water running in the streets.</a:t>
+              <a:t>Very heavy rain falls in a short time, and water runs in the streets.</a:t>
             </a:r>
             <a:endParaRPr lang="en-US" sz="4000" dirty="0"/>
           </a:p>
@@ -10179,7 +10624,7 @@
                 <a:ea typeface="Calibri" pitchFamily="34" charset="-122"/>
                 <a:cs typeface="Calibri" pitchFamily="34" charset="-120"/>
               </a:rPr>
-              <a:t>2. MANIFESTATIONS</a:t>
+              <a:t>1. MANIFESTATIONS</a:t>
             </a:r>
             <a:endParaRPr lang="en-US" sz="1400" dirty="0"/>
           </a:p>
@@ -10393,7 +10838,7 @@
                 <a:ea typeface="Calibri" pitchFamily="34" charset="-122"/>
                 <a:cs typeface="Calibri" pitchFamily="34" charset="-120"/>
               </a:rPr>
-              <a:t>2. MANIFESTATIONS</a:t>
+              <a:t>1. MANIFESTATIONS</a:t>
             </a:r>
             <a:endParaRPr lang="en-US" sz="1400" dirty="0"/>
           </a:p>
@@ -10500,7 +10945,7 @@
                 <a:ea typeface="Times New Roman" pitchFamily="34" charset="-122"/>
                 <a:cs typeface="Times New Roman" pitchFamily="34" charset="-120"/>
               </a:rPr>
-              <a:t>What are the signs of the Harmattan and dust storms?</a:t>
+              <a:t>What are the signs of the Harmattan?</a:t>
             </a:r>
             <a:endParaRPr lang="en-US" sz="4000" dirty="0"/>
           </a:p>
@@ -10612,7 +11057,7 @@
                 <a:ea typeface="Calibri" pitchFamily="34" charset="-122"/>
                 <a:cs typeface="Calibri" pitchFamily="34" charset="-120"/>
               </a:rPr>
-              <a:t>2. MANIFESTATIONS</a:t>
+              <a:t>1. MANIFESTATIONS</a:t>
             </a:r>
             <a:endParaRPr lang="en-US" sz="1400" dirty="0"/>
           </a:p>
@@ -10831,7 +11276,7 @@
                 <a:ea typeface="Calibri" pitchFamily="34" charset="-122"/>
                 <a:cs typeface="Calibri" pitchFamily="34" charset="-120"/>
               </a:rPr>
-              <a:t>3. CONSEQUENCES</a:t>
+              <a:t>2. CONSEQUENCES</a:t>
             </a:r>
             <a:endParaRPr lang="en-US" sz="1400" dirty="0"/>
           </a:p>
@@ -11045,7 +11490,7 @@
                 <a:ea typeface="Calibri" pitchFamily="34" charset="-122"/>
                 <a:cs typeface="Calibri" pitchFamily="34" charset="-120"/>
               </a:rPr>
-              <a:t>3. CONSEQUENCES</a:t>
+              <a:t>2. CONSEQUENCES</a:t>
             </a:r>
             <a:endParaRPr lang="en-US" sz="1400" dirty="0"/>
           </a:p>
@@ -11152,7 +11597,7 @@
                 <a:ea typeface="Times New Roman" pitchFamily="34" charset="-122"/>
                 <a:cs typeface="Times New Roman" pitchFamily="34" charset="-120"/>
               </a:rPr>
-              <a:t>Give three consequences of floods in Cameroon.</a:t>
+              <a:t>What happens to houses and crops during a flood?</a:t>
             </a:r>
             <a:endParaRPr lang="en-US" sz="4000" dirty="0"/>
           </a:p>
@@ -11973,7 +12418,7 @@
                           <a:ea typeface="Calibri" pitchFamily="34" charset="-122"/>
                           <a:cs typeface="Calibri" pitchFamily="34" charset="-120"/>
                         </a:rPr>
-                        <a:t>Identification, manifestations, consequences, adaptation and mitigation strategies of atmospheric disturbances in Cameroon.</a:t>
+                        <a:t>Identification; manifestations; consequences; adaptation and mitigation strategies.</a:t>
                       </a:r>
                       <a:endParaRPr lang="en-US" sz="1700" dirty="0">
                         <a:latin typeface="Calibri" charset="0"/>
@@ -12273,7 +12718,7 @@
                 <a:ea typeface="Calibri" pitchFamily="34" charset="-122"/>
                 <a:cs typeface="Calibri" pitchFamily="34" charset="-120"/>
               </a:rPr>
-              <a:t>3. CONSEQUENCES</a:t>
+              <a:t>2. CONSEQUENCES</a:t>
             </a:r>
             <a:endParaRPr lang="en-US" sz="1400" dirty="0"/>
           </a:p>
@@ -12380,7 +12825,7 @@
                 <a:ea typeface="Times New Roman" pitchFamily="34" charset="-122"/>
                 <a:cs typeface="Times New Roman" pitchFamily="34" charset="-120"/>
               </a:rPr>
-              <a:t>Houses and crops are destroyed, people die or lose their homes, and diseases like cholera spread.</a:t>
+              <a:t>They are destroyed, and people lose their homes and food.</a:t>
             </a:r>
             <a:endParaRPr lang="en-US" sz="4000" dirty="0"/>
           </a:p>
@@ -12492,7 +12937,7 @@
                 <a:ea typeface="Calibri" pitchFamily="34" charset="-122"/>
                 <a:cs typeface="Calibri" pitchFamily="34" charset="-120"/>
               </a:rPr>
-              <a:t>4. ADAPTATION AND MITIGATION</a:t>
+              <a:t>3. ADAPTATION AND MITIGATION</a:t>
             </a:r>
             <a:endParaRPr lang="en-US" sz="1400" dirty="0"/>
           </a:p>
@@ -12706,7 +13151,7 @@
                 <a:ea typeface="Calibri" pitchFamily="34" charset="-122"/>
                 <a:cs typeface="Calibri" pitchFamily="34" charset="-120"/>
               </a:rPr>
-              <a:t>4. ADAPTATION AND MITIGATION</a:t>
+              <a:t>3. ADAPTATION AND MITIGATION</a:t>
             </a:r>
             <a:endParaRPr lang="en-US" sz="1400" dirty="0"/>
           </a:p>
@@ -12813,7 +13258,7 @@
                 <a:ea typeface="Times New Roman" pitchFamily="34" charset="-122"/>
                 <a:cs typeface="Times New Roman" pitchFamily="34" charset="-120"/>
               </a:rPr>
-              <a:t>Give three measures against these disturbances.</a:t>
+              <a:t>How can planting trees protect people from dust storms?</a:t>
             </a:r>
             <a:endParaRPr lang="en-US" sz="4000" dirty="0"/>
           </a:p>
@@ -12925,7 +13370,7 @@
                 <a:ea typeface="Calibri" pitchFamily="34" charset="-122"/>
                 <a:cs typeface="Calibri" pitchFamily="34" charset="-120"/>
               </a:rPr>
-              <a:t>4. ADAPTATION AND MITIGATION</a:t>
+              <a:t>3. ADAPTATION AND MITIGATION</a:t>
             </a:r>
             <a:endParaRPr lang="en-US" sz="1400" dirty="0"/>
           </a:p>
@@ -13032,7 +13477,7 @@
                 <a:ea typeface="Times New Roman" pitchFamily="34" charset="-122"/>
                 <a:cs typeface="Times New Roman" pitchFamily="34" charset="-120"/>
               </a:rPr>
-              <a:t>Clean gutters and build drains, plant trees and windbreaks, and build strong houses away from rivers.</a:t>
+              <a:t>Trees slow down the wind and hold the soil, so there is less dust.</a:t>
             </a:r>
             <a:endParaRPr lang="en-US" sz="4000" dirty="0"/>
           </a:p>
@@ -13426,7 +13871,7 @@
         <p:spPr>
           <a:xfrm>
             <a:off x="0" y="658368"/>
-            <a:ext cx="1463040" cy="5833872"/>
+            <a:ext cx="2468880" cy="5833872"/>
           </a:xfrm>
           <a:prstGeom prst="rect">
             <a:avLst/>
@@ -13441,8 +13886,8 @@
         </p:nvSpPr>
         <p:spPr>
           <a:xfrm>
-            <a:off x="1691640" y="1005840"/>
-            <a:ext cx="10180015" cy="731520"/>
+            <a:off x="2697480" y="1005840"/>
+            <a:ext cx="9174175" cy="731520"/>
           </a:xfrm>
           <a:prstGeom prst="rect">
             <a:avLst/>
@@ -13468,7 +13913,7 @@
                 <a:ea typeface="Times New Roman" pitchFamily="34" charset="-122"/>
                 <a:cs typeface="Times New Roman" pitchFamily="34" charset="-120"/>
               </a:rPr>
-              <a:t>1. Identification and Manifestations</a:t>
+              <a:t>DEFINITIONS</a:t>
             </a:r>
             <a:endParaRPr lang="en-US" sz="3600" dirty="0"/>
           </a:p>
@@ -13482,8 +13927,8 @@
         </p:nvSpPr>
         <p:spPr>
           <a:xfrm>
-            <a:off x="1691640" y="1783080"/>
-            <a:ext cx="10180015" cy="4663440"/>
+            <a:off x="2697480" y="1783080"/>
+            <a:ext cx="9174175" cy="4663440"/>
           </a:xfrm>
           <a:prstGeom prst="rect">
             <a:avLst/>
@@ -13510,7 +13955,7 @@
                 <a:ea typeface="Times New Roman" pitchFamily="34" charset="-122"/>
                 <a:cs typeface="Times New Roman" pitchFamily="34" charset="-120"/>
               </a:rPr>
-              <a:t>Cameroon faces the following atmospheric disturbances:</a:t>
+              <a:t>The key terms of this lesson are defined as follows:</a:t>
             </a:r>
             <a:endParaRPr lang="en-US" sz="4000" dirty="0"/>
           </a:p>
@@ -13530,7 +13975,7 @@
                 <a:ea typeface="Times New Roman" pitchFamily="34" charset="-122"/>
                 <a:cs typeface="Times New Roman" pitchFamily="34" charset="-120"/>
               </a:rPr>
-              <a:t>Thunderstorms and torrential rain: </a:t>
+              <a:t>Adaptation: </a:t>
             </a:r>
             <a:pPr algn="l" indent="0" marL="0">
               <a:spcAft>
@@ -13547,7 +13992,7 @@
                 <a:ea typeface="Times New Roman" pitchFamily="34" charset="-122"/>
                 <a:cs typeface="Times New Roman" pitchFamily="34" charset="-120"/>
               </a:rPr>
-              <a:t>They bring lightning, strong winds and heavy rain in the rainy season.</a:t>
+              <a:t>It is adjusting our way of life to live with dangerous weather.</a:t>
             </a:r>
             <a:endParaRPr lang="en-US" sz="4000" dirty="0"/>
           </a:p>
@@ -13567,7 +14012,7 @@
                 <a:ea typeface="Times New Roman" pitchFamily="34" charset="-122"/>
                 <a:cs typeface="Times New Roman" pitchFamily="34" charset="-120"/>
               </a:rPr>
-              <a:t>Floods: </a:t>
+              <a:t>Mitigation: </a:t>
             </a:r>
             <a:pPr algn="l" indent="0" marL="0">
               <a:spcAft>
@@ -13584,7 +14029,7 @@
                 <a:ea typeface="Times New Roman" pitchFamily="34" charset="-122"/>
                 <a:cs typeface="Times New Roman" pitchFamily="34" charset="-120"/>
               </a:rPr>
-              <a:t>They follow heavy rain in towns and valleys, as in Garoua, Maroua and Douala.</a:t>
+              <a:t>It is reducing the damage caused by dangerous weather.</a:t>
             </a:r>
             <a:endParaRPr lang="en-US" sz="4000" dirty="0"/>
           </a:p>
@@ -13702,9 +14147,129 @@
           </a:p>
         </p:txBody>
       </p:sp>
+      <p:sp>
+        <p:nvSpPr>
+          <p:cNvPr id="3" name="Text 1"/>
+          <p:cNvSpPr/>
+          <p:nvPr/>
+        </p:nvSpPr>
+        <p:spPr>
+          <a:xfrm>
+            <a:off x="365760" y="1005840"/>
+            <a:ext cx="11460175" cy="731520"/>
+          </a:xfrm>
+          <a:prstGeom prst="rect">
+            <a:avLst/>
+          </a:prstGeom>
+          <a:noFill/>
+          <a:ln/>
+        </p:spPr>
+        <p:txBody>
+          <a:bodyPr wrap="square" lIns="0" tIns="0" rIns="0" bIns="0" rtlCol="0" anchor="ctr">
+            <a:normAutofit/>
+          </a:bodyPr>
+          <a:lstStyle/>
+          <a:p>
+            <a:pPr algn="ctr" indent="0" marL="0">
+              <a:buNone/>
+            </a:pPr>
+            <a:r>
+              <a:rPr lang="en-US" sz="3600" b="1" dirty="0">
+                <a:solidFill>
+                  <a:srgbClr val="990011"/>
+                </a:solidFill>
+                <a:latin typeface="Times New Roman" pitchFamily="34" charset="0"/>
+                <a:ea typeface="Times New Roman" pitchFamily="34" charset="-122"/>
+                <a:cs typeface="Times New Roman" pitchFamily="34" charset="-120"/>
+              </a:rPr>
+              <a:t>1. Identification and Manifestations</a:t>
+            </a:r>
+            <a:endParaRPr lang="en-US" sz="3600" dirty="0"/>
+          </a:p>
+        </p:txBody>
+      </p:sp>
+      <p:sp>
+        <p:nvSpPr>
+          <p:cNvPr id="4" name="Text 2"/>
+          <p:cNvSpPr/>
+          <p:nvPr/>
+        </p:nvSpPr>
+        <p:spPr>
+          <a:xfrm>
+            <a:off x="365760" y="1783080"/>
+            <a:ext cx="4846320" cy="4617720"/>
+          </a:xfrm>
+          <a:prstGeom prst="rect">
+            <a:avLst/>
+          </a:prstGeom>
+          <a:noFill/>
+          <a:ln/>
+        </p:spPr>
+        <p:txBody>
+          <a:bodyPr wrap="square" lIns="0" tIns="0" rIns="0" bIns="0" rtlCol="0" anchor="t"/>
+          <a:lstStyle/>
+          <a:p>
+            <a:pPr algn="l" indent="0" marL="0">
+              <a:spcAft>
+                <a:spcPts val="800"/>
+              </a:spcAft>
+              <a:buNone/>
+            </a:pPr>
+            <a:r>
+              <a:rPr lang="en-US" sz="3600" i="1" dirty="0">
+                <a:solidFill>
+                  <a:srgbClr val="111111"/>
+                </a:solidFill>
+                <a:latin typeface="Times New Roman" pitchFamily="34" charset="0"/>
+                <a:ea typeface="Times New Roman" pitchFamily="34" charset="-122"/>
+                <a:cs typeface="Times New Roman" pitchFamily="34" charset="-120"/>
+              </a:rPr>
+              <a:t>Cameroon faces the following atmospheric disturbances:</a:t>
+            </a:r>
+            <a:endParaRPr lang="en-US" sz="3600" dirty="0"/>
+          </a:p>
+          <a:p>
+            <a:pPr algn="l" indent="0" marL="0">
+              <a:spcAft>
+                <a:spcPts val="800"/>
+              </a:spcAft>
+              <a:buNone/>
+            </a:pPr>
+            <a:r>
+              <a:rPr lang="en-US" sz="3600" b="1" dirty="0">
+                <a:solidFill>
+                  <a:srgbClr val="111111"/>
+                </a:solidFill>
+                <a:latin typeface="Times New Roman" pitchFamily="34" charset="0"/>
+                <a:ea typeface="Times New Roman" pitchFamily="34" charset="-122"/>
+                <a:cs typeface="Times New Roman" pitchFamily="34" charset="-120"/>
+              </a:rPr>
+              <a:t>Thunderstorms and torrential rain: </a:t>
+            </a:r>
+            <a:pPr algn="l" indent="0" marL="0">
+              <a:spcAft>
+                <a:spcPts val="800"/>
+              </a:spcAft>
+              <a:buNone/>
+            </a:pPr>
+            <a:r>
+              <a:rPr lang="en-US" sz="3600" dirty="0">
+                <a:solidFill>
+                  <a:srgbClr val="111111"/>
+                </a:solidFill>
+                <a:latin typeface="Times New Roman" pitchFamily="34" charset="0"/>
+                <a:ea typeface="Times New Roman" pitchFamily="34" charset="-122"/>
+                <a:cs typeface="Times New Roman" pitchFamily="34" charset="-120"/>
+              </a:rPr>
+              <a:t>They bring lightning, strong winds and heavy rain in the rainy season.</a:t>
+            </a:r>
+            <a:endParaRPr lang="en-US" sz="3600" dirty="0"/>
+          </a:p>
+        </p:txBody>
+      </p:sp>
       <p:pic>
         <p:nvPicPr>
-          <p:cNvPr id="3" name="Image 0" descr="/home/claude/f4/img/minesec_sheet.png">    </p:cNvPr>
+          <p:cNvPr id="5" name="Image 0" descr="/home/claude/f4/img/v2/f4_heavyrain.jpg">    </p:cNvPr>
           <p:cNvPicPr>
             <a:picLocks noChangeAspect="1"/>
           </p:cNvPicPr>
@@ -13718,8 +14283,8 @@
         </p:blipFill>
         <p:spPr>
           <a:xfrm>
-            <a:off x="0" y="658368"/>
-            <a:ext cx="3840480" cy="5833872"/>
+            <a:off x="5349240" y="2071212"/>
+            <a:ext cx="6659575" cy="3693983"/>
           </a:xfrm>
           <a:prstGeom prst="rect">
             <a:avLst/>
@@ -13728,14 +14293,14 @@
       </p:pic>
       <p:sp>
         <p:nvSpPr>
-          <p:cNvPr id="4" name="Text 1"/>
+          <p:cNvPr id="6" name="Text 3"/>
           <p:cNvSpPr/>
           <p:nvPr/>
         </p:nvSpPr>
         <p:spPr>
           <a:xfrm>
-            <a:off x="4069080" y="1005840"/>
-            <a:ext cx="7802575" cy="731520"/>
+            <a:off x="5349240" y="6089904"/>
+            <a:ext cx="6659575" cy="347472"/>
           </a:xfrm>
           <a:prstGeom prst="rect">
             <a:avLst/>
@@ -13744,122 +14309,24 @@
           <a:ln/>
         </p:spPr>
         <p:txBody>
-          <a:bodyPr wrap="square" lIns="0" tIns="0" rIns="0" bIns="0" rtlCol="0" anchor="ctr">
-            <a:normAutofit/>
-          </a:bodyPr>
+          <a:bodyPr wrap="square" lIns="0" tIns="0" rIns="0" bIns="0" rtlCol="0" anchor="ctr"/>
           <a:lstStyle/>
           <a:p>
             <a:pPr algn="ctr" indent="0" marL="0">
               <a:buNone/>
             </a:pPr>
             <a:r>
-              <a:rPr lang="en-US" sz="3600" b="1" dirty="0">
-                <a:solidFill>
-                  <a:srgbClr val="990011"/>
+              <a:rPr lang="en-US" sz="1600" i="1" dirty="0">
+                <a:solidFill>
+                  <a:srgbClr val="555555"/>
                 </a:solidFill>
                 <a:latin typeface="Times New Roman" pitchFamily="34" charset="0"/>
                 <a:ea typeface="Times New Roman" pitchFamily="34" charset="-122"/>
                 <a:cs typeface="Times New Roman" pitchFamily="34" charset="-120"/>
               </a:rPr>
-              <a:t>1. Identification and Manifestations (continued)</a:t>
-            </a:r>
-            <a:endParaRPr lang="en-US" sz="3600" dirty="0"/>
-          </a:p>
-        </p:txBody>
-      </p:sp>
-      <p:sp>
-        <p:nvSpPr>
-          <p:cNvPr id="5" name="Text 2"/>
-          <p:cNvSpPr/>
-          <p:nvPr/>
-        </p:nvSpPr>
-        <p:spPr>
-          <a:xfrm>
-            <a:off x="4069080" y="1783080"/>
-            <a:ext cx="7802575" cy="4663440"/>
-          </a:xfrm>
-          <a:prstGeom prst="rect">
-            <a:avLst/>
-          </a:prstGeom>
-          <a:noFill/>
-          <a:ln/>
-        </p:spPr>
-        <p:txBody>
-          <a:bodyPr wrap="square" lIns="0" tIns="0" rIns="0" bIns="0" rtlCol="0" anchor="t"/>
-          <a:lstStyle/>
-          <a:p>
-            <a:pPr algn="l" indent="0" marL="0">
-              <a:spcAft>
-                <a:spcPts val="800"/>
-              </a:spcAft>
-              <a:buNone/>
-            </a:pPr>
-            <a:r>
-              <a:rPr lang="en-US" sz="4000" b="1" dirty="0">
-                <a:solidFill>
-                  <a:srgbClr val="111111"/>
-                </a:solidFill>
-                <a:latin typeface="Times New Roman" pitchFamily="34" charset="0"/>
-                <a:ea typeface="Times New Roman" pitchFamily="34" charset="-122"/>
-                <a:cs typeface="Times New Roman" pitchFamily="34" charset="-120"/>
-              </a:rPr>
-              <a:t>Dust storms and the Harmattan: </a:t>
-            </a:r>
-            <a:pPr algn="l" indent="0" marL="0">
-              <a:spcAft>
-                <a:spcPts val="800"/>
-              </a:spcAft>
-              <a:buNone/>
-            </a:pPr>
-            <a:r>
-              <a:rPr lang="en-US" sz="4000" dirty="0">
-                <a:solidFill>
-                  <a:srgbClr val="111111"/>
-                </a:solidFill>
-                <a:latin typeface="Times New Roman" pitchFamily="34" charset="0"/>
-                <a:ea typeface="Times New Roman" pitchFamily="34" charset="-122"/>
-                <a:cs typeface="Times New Roman" pitchFamily="34" charset="-120"/>
-              </a:rPr>
-              <a:t>They bring dust and dry air to the north in the dry season.</a:t>
-            </a:r>
-            <a:endParaRPr lang="en-US" sz="4000" dirty="0"/>
-          </a:p>
-          <a:p>
-            <a:pPr algn="l" indent="0" marL="0">
-              <a:spcAft>
-                <a:spcPts val="800"/>
-              </a:spcAft>
-              <a:buNone/>
-            </a:pPr>
-            <a:r>
-              <a:rPr lang="en-US" sz="4000" b="1" dirty="0">
-                <a:solidFill>
-                  <a:srgbClr val="111111"/>
-                </a:solidFill>
-                <a:latin typeface="Times New Roman" pitchFamily="34" charset="0"/>
-                <a:ea typeface="Times New Roman" pitchFamily="34" charset="-122"/>
-                <a:cs typeface="Times New Roman" pitchFamily="34" charset="-120"/>
-              </a:rPr>
-              <a:t>Heat waves: </a:t>
-            </a:r>
-            <a:pPr algn="l" indent="0" marL="0">
-              <a:spcAft>
-                <a:spcPts val="800"/>
-              </a:spcAft>
-              <a:buNone/>
-            </a:pPr>
-            <a:r>
-              <a:rPr lang="en-US" sz="4000" dirty="0">
-                <a:solidFill>
-                  <a:srgbClr val="111111"/>
-                </a:solidFill>
-                <a:latin typeface="Times New Roman" pitchFamily="34" charset="0"/>
-                <a:ea typeface="Times New Roman" pitchFamily="34" charset="-122"/>
-                <a:cs typeface="Times New Roman" pitchFamily="34" charset="-120"/>
-              </a:rPr>
-              <a:t>Very hot days and nights occur in the north around March and April.</a:t>
-            </a:r>
-            <a:endParaRPr lang="en-US" sz="4000" dirty="0"/>
+              <a:t>Illustration: torrential rain</a:t>
+            </a:r>
+            <a:endParaRPr lang="en-US" sz="1600" dirty="0"/>
           </a:p>
         </p:txBody>
       </p:sp>
@@ -13975,9 +14442,109 @@
           </a:p>
         </p:txBody>
       </p:sp>
+      <p:sp>
+        <p:nvSpPr>
+          <p:cNvPr id="3" name="Text 1"/>
+          <p:cNvSpPr/>
+          <p:nvPr/>
+        </p:nvSpPr>
+        <p:spPr>
+          <a:xfrm>
+            <a:off x="365760" y="1005840"/>
+            <a:ext cx="11460175" cy="731520"/>
+          </a:xfrm>
+          <a:prstGeom prst="rect">
+            <a:avLst/>
+          </a:prstGeom>
+          <a:noFill/>
+          <a:ln/>
+        </p:spPr>
+        <p:txBody>
+          <a:bodyPr wrap="square" lIns="0" tIns="0" rIns="0" bIns="0" rtlCol="0" anchor="ctr">
+            <a:normAutofit/>
+          </a:bodyPr>
+          <a:lstStyle/>
+          <a:p>
+            <a:pPr algn="ctr" indent="0" marL="0">
+              <a:buNone/>
+            </a:pPr>
+            <a:r>
+              <a:rPr lang="en-US" sz="3600" b="1" dirty="0">
+                <a:solidFill>
+                  <a:srgbClr val="990011"/>
+                </a:solidFill>
+                <a:latin typeface="Times New Roman" pitchFamily="34" charset="0"/>
+                <a:ea typeface="Times New Roman" pitchFamily="34" charset="-122"/>
+                <a:cs typeface="Times New Roman" pitchFamily="34" charset="-120"/>
+              </a:rPr>
+              <a:t>1. Identification and Manifestations</a:t>
+            </a:r>
+            <a:endParaRPr lang="en-US" sz="3600" dirty="0"/>
+          </a:p>
+        </p:txBody>
+      </p:sp>
+      <p:sp>
+        <p:nvSpPr>
+          <p:cNvPr id="4" name="Text 2"/>
+          <p:cNvSpPr/>
+          <p:nvPr/>
+        </p:nvSpPr>
+        <p:spPr>
+          <a:xfrm>
+            <a:off x="365760" y="1783080"/>
+            <a:ext cx="4846320" cy="4617720"/>
+          </a:xfrm>
+          <a:prstGeom prst="rect">
+            <a:avLst/>
+          </a:prstGeom>
+          <a:noFill/>
+          <a:ln/>
+        </p:spPr>
+        <p:txBody>
+          <a:bodyPr wrap="square" lIns="0" tIns="0" rIns="0" bIns="0" rtlCol="0" anchor="t"/>
+          <a:lstStyle/>
+          <a:p>
+            <a:pPr algn="l" indent="0" marL="0">
+              <a:spcAft>
+                <a:spcPts val="800"/>
+              </a:spcAft>
+              <a:buNone/>
+            </a:pPr>
+            <a:r>
+              <a:rPr lang="en-US" sz="3600" b="1" dirty="0">
+                <a:solidFill>
+                  <a:srgbClr val="111111"/>
+                </a:solidFill>
+                <a:latin typeface="Times New Roman" pitchFamily="34" charset="0"/>
+                <a:ea typeface="Times New Roman" pitchFamily="34" charset="-122"/>
+                <a:cs typeface="Times New Roman" pitchFamily="34" charset="-120"/>
+              </a:rPr>
+              <a:t>Floods: </a:t>
+            </a:r>
+            <a:pPr algn="l" indent="0" marL="0">
+              <a:spcAft>
+                <a:spcPts val="800"/>
+              </a:spcAft>
+              <a:buNone/>
+            </a:pPr>
+            <a:r>
+              <a:rPr lang="en-US" sz="3600" dirty="0">
+                <a:solidFill>
+                  <a:srgbClr val="111111"/>
+                </a:solidFill>
+                <a:latin typeface="Times New Roman" pitchFamily="34" charset="0"/>
+                <a:ea typeface="Times New Roman" pitchFamily="34" charset="-122"/>
+                <a:cs typeface="Times New Roman" pitchFamily="34" charset="-120"/>
+              </a:rPr>
+              <a:t>They follow heavy rain in towns and valleys, as in Garoua, Maroua and Douala.</a:t>
+            </a:r>
+            <a:endParaRPr lang="en-US" sz="3600" dirty="0"/>
+          </a:p>
+        </p:txBody>
+      </p:sp>
       <p:pic>
         <p:nvPicPr>
-          <p:cNvPr id="3" name="Image 0" descr="/home/claude/f4/img/minesec_sheet.png">    </p:cNvPr>
+          <p:cNvPr id="5" name="Image 0" descr="/home/claude/f4/img/v2/f4_floodvillage.jpg">    </p:cNvPr>
           <p:cNvPicPr>
             <a:picLocks noChangeAspect="1"/>
           </p:cNvPicPr>
@@ -13991,8 +14558,8 @@
         </p:blipFill>
         <p:spPr>
           <a:xfrm>
-            <a:off x="0" y="658368"/>
-            <a:ext cx="3840480" cy="5833872"/>
+            <a:off x="5349240" y="2071212"/>
+            <a:ext cx="6659575" cy="3693983"/>
           </a:xfrm>
           <a:prstGeom prst="rect">
             <a:avLst/>
@@ -14001,14 +14568,14 @@
       </p:pic>
       <p:sp>
         <p:nvSpPr>
-          <p:cNvPr id="4" name="Text 1"/>
+          <p:cNvPr id="6" name="Text 3"/>
           <p:cNvSpPr/>
           <p:nvPr/>
         </p:nvSpPr>
         <p:spPr>
           <a:xfrm>
-            <a:off x="4069080" y="1005840"/>
-            <a:ext cx="7802575" cy="731520"/>
+            <a:off x="5349240" y="6089904"/>
+            <a:ext cx="6659575" cy="347472"/>
           </a:xfrm>
           <a:prstGeom prst="rect">
             <a:avLst/>
@@ -14017,142 +14584,24 @@
           <a:ln/>
         </p:spPr>
         <p:txBody>
-          <a:bodyPr wrap="square" lIns="0" tIns="0" rIns="0" bIns="0" rtlCol="0" anchor="ctr">
-            <a:normAutofit/>
-          </a:bodyPr>
+          <a:bodyPr wrap="square" lIns="0" tIns="0" rIns="0" bIns="0" rtlCol="0" anchor="ctr"/>
           <a:lstStyle/>
           <a:p>
             <a:pPr algn="ctr" indent="0" marL="0">
               <a:buNone/>
             </a:pPr>
             <a:r>
-              <a:rPr lang="en-US" sz="3600" b="1" dirty="0">
-                <a:solidFill>
-                  <a:srgbClr val="990011"/>
+              <a:rPr lang="en-US" sz="1600" i="1" dirty="0">
+                <a:solidFill>
+                  <a:srgbClr val="555555"/>
                 </a:solidFill>
                 <a:latin typeface="Times New Roman" pitchFamily="34" charset="0"/>
                 <a:ea typeface="Times New Roman" pitchFamily="34" charset="-122"/>
                 <a:cs typeface="Times New Roman" pitchFamily="34" charset="-120"/>
               </a:rPr>
-              <a:t>2. Consequences</a:t>
-            </a:r>
-            <a:endParaRPr lang="en-US" sz="3600" dirty="0"/>
-          </a:p>
-        </p:txBody>
-      </p:sp>
-      <p:sp>
-        <p:nvSpPr>
-          <p:cNvPr id="5" name="Text 2"/>
-          <p:cNvSpPr/>
-          <p:nvPr/>
-        </p:nvSpPr>
-        <p:spPr>
-          <a:xfrm>
-            <a:off x="4069080" y="1783080"/>
-            <a:ext cx="7802575" cy="4663440"/>
-          </a:xfrm>
-          <a:prstGeom prst="rect">
-            <a:avLst/>
-          </a:prstGeom>
-          <a:noFill/>
-          <a:ln/>
-        </p:spPr>
-        <p:txBody>
-          <a:bodyPr wrap="square" lIns="0" tIns="0" rIns="0" bIns="0" rtlCol="0" anchor="t"/>
-          <a:lstStyle/>
-          <a:p>
-            <a:pPr algn="l" indent="0" marL="0">
-              <a:spcAft>
-                <a:spcPts val="800"/>
-              </a:spcAft>
-              <a:buNone/>
-            </a:pPr>
-            <a:r>
-              <a:rPr lang="en-US" sz="4000" i="1" dirty="0">
-                <a:solidFill>
-                  <a:srgbClr val="111111"/>
-                </a:solidFill>
-                <a:latin typeface="Times New Roman" pitchFamily="34" charset="0"/>
-                <a:ea typeface="Times New Roman" pitchFamily="34" charset="-122"/>
-                <a:cs typeface="Times New Roman" pitchFamily="34" charset="-120"/>
-              </a:rPr>
-              <a:t>These disturbances have the following consequences:</a:t>
-            </a:r>
-            <a:endParaRPr lang="en-US" sz="4000" dirty="0"/>
-          </a:p>
-          <a:p>
-            <a:pPr algn="l" indent="0" marL="0">
-              <a:spcAft>
-                <a:spcPts val="800"/>
-              </a:spcAft>
-              <a:buNone/>
-            </a:pPr>
-            <a:r>
-              <a:rPr lang="en-US" sz="4000" b="1" dirty="0">
-                <a:solidFill>
-                  <a:srgbClr val="111111"/>
-                </a:solidFill>
-                <a:latin typeface="Times New Roman" pitchFamily="34" charset="0"/>
-                <a:ea typeface="Times New Roman" pitchFamily="34" charset="-122"/>
-                <a:cs typeface="Times New Roman" pitchFamily="34" charset="-120"/>
-              </a:rPr>
-              <a:t>Material damage: </a:t>
-            </a:r>
-            <a:pPr algn="l" indent="0" marL="0">
-              <a:spcAft>
-                <a:spcPts val="800"/>
-              </a:spcAft>
-              <a:buNone/>
-            </a:pPr>
-            <a:r>
-              <a:rPr lang="en-US" sz="4000" dirty="0">
-                <a:solidFill>
-                  <a:srgbClr val="111111"/>
-                </a:solidFill>
-                <a:latin typeface="Times New Roman" pitchFamily="34" charset="0"/>
-                <a:ea typeface="Times New Roman" pitchFamily="34" charset="-122"/>
-                <a:cs typeface="Times New Roman" pitchFamily="34" charset="-120"/>
-              </a:rPr>
-              <a:t>Houses, roads, bridges and crops are destroyed.</a:t>
-            </a:r>
-            <a:endParaRPr lang="en-US" sz="4000" dirty="0"/>
-          </a:p>
-          <a:p>
-            <a:pPr algn="l" indent="0" marL="0">
-              <a:spcAft>
-                <a:spcPts val="800"/>
-              </a:spcAft>
-              <a:buNone/>
-            </a:pPr>
-            <a:r>
-              <a:rPr lang="en-US" sz="4000" b="1" dirty="0">
-                <a:solidFill>
-                  <a:srgbClr val="111111"/>
-                </a:solidFill>
-                <a:latin typeface="Times New Roman" pitchFamily="34" charset="0"/>
-                <a:ea typeface="Times New Roman" pitchFamily="34" charset="-122"/>
-                <a:cs typeface="Times New Roman" pitchFamily="34" charset="-120"/>
-              </a:rPr>
-              <a:t>Human consequences: </a:t>
-            </a:r>
-            <a:pPr algn="l" indent="0" marL="0">
-              <a:spcAft>
-                <a:spcPts val="800"/>
-              </a:spcAft>
-              <a:buNone/>
-            </a:pPr>
-            <a:r>
-              <a:rPr lang="en-US" sz="4000" dirty="0">
-                <a:solidFill>
-                  <a:srgbClr val="111111"/>
-                </a:solidFill>
-                <a:latin typeface="Times New Roman" pitchFamily="34" charset="0"/>
-                <a:ea typeface="Times New Roman" pitchFamily="34" charset="-122"/>
-                <a:cs typeface="Times New Roman" pitchFamily="34" charset="-120"/>
-              </a:rPr>
-              <a:t>People die or fall sick with cholera, meningitis or respiratory diseases.</a:t>
-            </a:r>
-            <a:endParaRPr lang="en-US" sz="4000" dirty="0"/>
+              <a:t>Illustration: a flooded village</a:t>
+            </a:r>
+            <a:endParaRPr lang="en-US" sz="1600" dirty="0"/>
           </a:p>
         </p:txBody>
       </p:sp>
@@ -14268,9 +14717,109 @@
           </a:p>
         </p:txBody>
       </p:sp>
+      <p:sp>
+        <p:nvSpPr>
+          <p:cNvPr id="3" name="Text 1"/>
+          <p:cNvSpPr/>
+          <p:nvPr/>
+        </p:nvSpPr>
+        <p:spPr>
+          <a:xfrm>
+            <a:off x="365760" y="1005840"/>
+            <a:ext cx="11460175" cy="731520"/>
+          </a:xfrm>
+          <a:prstGeom prst="rect">
+            <a:avLst/>
+          </a:prstGeom>
+          <a:noFill/>
+          <a:ln/>
+        </p:spPr>
+        <p:txBody>
+          <a:bodyPr wrap="square" lIns="0" tIns="0" rIns="0" bIns="0" rtlCol="0" anchor="ctr">
+            <a:normAutofit/>
+          </a:bodyPr>
+          <a:lstStyle/>
+          <a:p>
+            <a:pPr algn="ctr" indent="0" marL="0">
+              <a:buNone/>
+            </a:pPr>
+            <a:r>
+              <a:rPr lang="en-US" sz="3600" b="1" dirty="0">
+                <a:solidFill>
+                  <a:srgbClr val="990011"/>
+                </a:solidFill>
+                <a:latin typeface="Times New Roman" pitchFamily="34" charset="0"/>
+                <a:ea typeface="Times New Roman" pitchFamily="34" charset="-122"/>
+                <a:cs typeface="Times New Roman" pitchFamily="34" charset="-120"/>
+              </a:rPr>
+              <a:t>1. Identification and Manifestations</a:t>
+            </a:r>
+            <a:endParaRPr lang="en-US" sz="3600" dirty="0"/>
+          </a:p>
+        </p:txBody>
+      </p:sp>
+      <p:sp>
+        <p:nvSpPr>
+          <p:cNvPr id="4" name="Text 2"/>
+          <p:cNvSpPr/>
+          <p:nvPr/>
+        </p:nvSpPr>
+        <p:spPr>
+          <a:xfrm>
+            <a:off x="365760" y="1783080"/>
+            <a:ext cx="4846320" cy="4617720"/>
+          </a:xfrm>
+          <a:prstGeom prst="rect">
+            <a:avLst/>
+          </a:prstGeom>
+          <a:noFill/>
+          <a:ln/>
+        </p:spPr>
+        <p:txBody>
+          <a:bodyPr wrap="square" lIns="0" tIns="0" rIns="0" bIns="0" rtlCol="0" anchor="t"/>
+          <a:lstStyle/>
+          <a:p>
+            <a:pPr algn="l" indent="0" marL="0">
+              <a:spcAft>
+                <a:spcPts val="800"/>
+              </a:spcAft>
+              <a:buNone/>
+            </a:pPr>
+            <a:r>
+              <a:rPr lang="en-US" sz="3600" b="1" dirty="0">
+                <a:solidFill>
+                  <a:srgbClr val="111111"/>
+                </a:solidFill>
+                <a:latin typeface="Times New Roman" pitchFamily="34" charset="0"/>
+                <a:ea typeface="Times New Roman" pitchFamily="34" charset="-122"/>
+                <a:cs typeface="Times New Roman" pitchFamily="34" charset="-120"/>
+              </a:rPr>
+              <a:t>Dust storms and the Harmattan: </a:t>
+            </a:r>
+            <a:pPr algn="l" indent="0" marL="0">
+              <a:spcAft>
+                <a:spcPts val="800"/>
+              </a:spcAft>
+              <a:buNone/>
+            </a:pPr>
+            <a:r>
+              <a:rPr lang="en-US" sz="3600" dirty="0">
+                <a:solidFill>
+                  <a:srgbClr val="111111"/>
+                </a:solidFill>
+                <a:latin typeface="Times New Roman" pitchFamily="34" charset="0"/>
+                <a:ea typeface="Times New Roman" pitchFamily="34" charset="-122"/>
+                <a:cs typeface="Times New Roman" pitchFamily="34" charset="-120"/>
+              </a:rPr>
+              <a:t>They bring dust and dry air to the north in the dry season.</a:t>
+            </a:r>
+            <a:endParaRPr lang="en-US" sz="3600" dirty="0"/>
+          </a:p>
+        </p:txBody>
+      </p:sp>
       <p:pic>
         <p:nvPicPr>
-          <p:cNvPr id="3" name="Image 0" descr="/home/claude/f4/img/minesec_sheet.png">    </p:cNvPr>
+          <p:cNvPr id="5" name="Image 0" descr="/home/claude/f4/img/v2/f2t_harmattan.jpg">    </p:cNvPr>
           <p:cNvPicPr>
             <a:picLocks noChangeAspect="1"/>
           </p:cNvPicPr>
@@ -14284,8 +14833,8 @@
         </p:blipFill>
         <p:spPr>
           <a:xfrm>
-            <a:off x="0" y="658368"/>
-            <a:ext cx="2468880" cy="5833872"/>
+            <a:off x="5349240" y="2071212"/>
+            <a:ext cx="6659575" cy="3693983"/>
           </a:xfrm>
           <a:prstGeom prst="rect">
             <a:avLst/>
@@ -14294,14 +14843,14 @@
       </p:pic>
       <p:sp>
         <p:nvSpPr>
-          <p:cNvPr id="4" name="Text 1"/>
+          <p:cNvPr id="6" name="Text 3"/>
           <p:cNvSpPr/>
           <p:nvPr/>
         </p:nvSpPr>
         <p:spPr>
           <a:xfrm>
-            <a:off x="2697480" y="1005840"/>
-            <a:ext cx="9174175" cy="731520"/>
+            <a:off x="5349240" y="6089904"/>
+            <a:ext cx="6659575" cy="347472"/>
           </a:xfrm>
           <a:prstGeom prst="rect">
             <a:avLst/>
@@ -14310,142 +14859,24 @@
           <a:ln/>
         </p:spPr>
         <p:txBody>
-          <a:bodyPr wrap="square" lIns="0" tIns="0" rIns="0" bIns="0" rtlCol="0" anchor="ctr">
-            <a:normAutofit/>
-          </a:bodyPr>
+          <a:bodyPr wrap="square" lIns="0" tIns="0" rIns="0" bIns="0" rtlCol="0" anchor="ctr"/>
           <a:lstStyle/>
           <a:p>
             <a:pPr algn="ctr" indent="0" marL="0">
               <a:buNone/>
             </a:pPr>
             <a:r>
-              <a:rPr lang="en-US" sz="3600" b="1" dirty="0">
-                <a:solidFill>
-                  <a:srgbClr val="990011"/>
+              <a:rPr lang="en-US" sz="1600" i="1" dirty="0">
+                <a:solidFill>
+                  <a:srgbClr val="555555"/>
                 </a:solidFill>
                 <a:latin typeface="Times New Roman" pitchFamily="34" charset="0"/>
                 <a:ea typeface="Times New Roman" pitchFamily="34" charset="-122"/>
                 <a:cs typeface="Times New Roman" pitchFamily="34" charset="-120"/>
               </a:rPr>
-              <a:t>3. Adaptation and Mitigation</a:t>
-            </a:r>
-            <a:endParaRPr lang="en-US" sz="3600" dirty="0"/>
-          </a:p>
-        </p:txBody>
-      </p:sp>
-      <p:sp>
-        <p:nvSpPr>
-          <p:cNvPr id="5" name="Text 2"/>
-          <p:cNvSpPr/>
-          <p:nvPr/>
-        </p:nvSpPr>
-        <p:spPr>
-          <a:xfrm>
-            <a:off x="2697480" y="1783080"/>
-            <a:ext cx="9174175" cy="4663440"/>
-          </a:xfrm>
-          <a:prstGeom prst="rect">
-            <a:avLst/>
-          </a:prstGeom>
-          <a:noFill/>
-          <a:ln/>
-        </p:spPr>
-        <p:txBody>
-          <a:bodyPr wrap="square" lIns="0" tIns="0" rIns="0" bIns="0" rtlCol="0" anchor="t"/>
-          <a:lstStyle/>
-          <a:p>
-            <a:pPr algn="l" indent="0" marL="0">
-              <a:spcAft>
-                <a:spcPts val="800"/>
-              </a:spcAft>
-              <a:buNone/>
-            </a:pPr>
-            <a:r>
-              <a:rPr lang="en-US" sz="4000" i="1" dirty="0">
-                <a:solidFill>
-                  <a:srgbClr val="111111"/>
-                </a:solidFill>
-                <a:latin typeface="Times New Roman" pitchFamily="34" charset="0"/>
-                <a:ea typeface="Times New Roman" pitchFamily="34" charset="-122"/>
-                <a:cs typeface="Times New Roman" pitchFamily="34" charset="-120"/>
-              </a:rPr>
-              <a:t>The following measures reduce the effects of disturbances:</a:t>
-            </a:r>
-            <a:endParaRPr lang="en-US" sz="4000" dirty="0"/>
-          </a:p>
-          <a:p>
-            <a:pPr algn="l" indent="0" marL="0">
-              <a:spcAft>
-                <a:spcPts val="800"/>
-              </a:spcAft>
-              <a:buNone/>
-            </a:pPr>
-            <a:r>
-              <a:rPr lang="en-US" sz="4000" b="1" dirty="0">
-                <a:solidFill>
-                  <a:srgbClr val="111111"/>
-                </a:solidFill>
-                <a:latin typeface="Times New Roman" pitchFamily="34" charset="0"/>
-                <a:ea typeface="Times New Roman" pitchFamily="34" charset="-122"/>
-                <a:cs typeface="Times New Roman" pitchFamily="34" charset="-120"/>
-              </a:rPr>
-              <a:t>Building: </a:t>
-            </a:r>
-            <a:pPr algn="l" indent="0" marL="0">
-              <a:spcAft>
-                <a:spcPts val="800"/>
-              </a:spcAft>
-              <a:buNone/>
-            </a:pPr>
-            <a:r>
-              <a:rPr lang="en-US" sz="4000" dirty="0">
-                <a:solidFill>
-                  <a:srgbClr val="111111"/>
-                </a:solidFill>
-                <a:latin typeface="Times New Roman" pitchFamily="34" charset="0"/>
-                <a:ea typeface="Times New Roman" pitchFamily="34" charset="-122"/>
-                <a:cs typeface="Times New Roman" pitchFamily="34" charset="-120"/>
-              </a:rPr>
-              <a:t>People build strong houses away from rivers and clean the gutters.</a:t>
-            </a:r>
-            <a:endParaRPr lang="en-US" sz="4000" dirty="0"/>
-          </a:p>
-          <a:p>
-            <a:pPr algn="l" indent="0" marL="0">
-              <a:spcAft>
-                <a:spcPts val="800"/>
-              </a:spcAft>
-              <a:buNone/>
-            </a:pPr>
-            <a:r>
-              <a:rPr lang="en-US" sz="4000" b="1" dirty="0">
-                <a:solidFill>
-                  <a:srgbClr val="111111"/>
-                </a:solidFill>
-                <a:latin typeface="Times New Roman" pitchFamily="34" charset="0"/>
-                <a:ea typeface="Times New Roman" pitchFamily="34" charset="-122"/>
-                <a:cs typeface="Times New Roman" pitchFamily="34" charset="-120"/>
-              </a:rPr>
-              <a:t>Environment: </a:t>
-            </a:r>
-            <a:pPr algn="l" indent="0" marL="0">
-              <a:spcAft>
-                <a:spcPts val="800"/>
-              </a:spcAft>
-              <a:buNone/>
-            </a:pPr>
-            <a:r>
-              <a:rPr lang="en-US" sz="4000" dirty="0">
-                <a:solidFill>
-                  <a:srgbClr val="111111"/>
-                </a:solidFill>
-                <a:latin typeface="Times New Roman" pitchFamily="34" charset="0"/>
-                <a:ea typeface="Times New Roman" pitchFamily="34" charset="-122"/>
-                <a:cs typeface="Times New Roman" pitchFamily="34" charset="-120"/>
-              </a:rPr>
-              <a:t>People plant trees and windbreaks to reduce wind and dust.</a:t>
-            </a:r>
-            <a:endParaRPr lang="en-US" sz="4000" dirty="0"/>
+              <a:t>Illustration: a dusty Harmattan sky</a:t>
+            </a:r>
+            <a:endParaRPr lang="en-US" sz="1600" dirty="0"/>
           </a:p>
         </p:txBody>
       </p:sp>
@@ -14561,9 +14992,109 @@
           </a:p>
         </p:txBody>
       </p:sp>
+      <p:sp>
+        <p:nvSpPr>
+          <p:cNvPr id="3" name="Text 1"/>
+          <p:cNvSpPr/>
+          <p:nvPr/>
+        </p:nvSpPr>
+        <p:spPr>
+          <a:xfrm>
+            <a:off x="365760" y="1005840"/>
+            <a:ext cx="11460175" cy="731520"/>
+          </a:xfrm>
+          <a:prstGeom prst="rect">
+            <a:avLst/>
+          </a:prstGeom>
+          <a:noFill/>
+          <a:ln/>
+        </p:spPr>
+        <p:txBody>
+          <a:bodyPr wrap="square" lIns="0" tIns="0" rIns="0" bIns="0" rtlCol="0" anchor="ctr">
+            <a:normAutofit/>
+          </a:bodyPr>
+          <a:lstStyle/>
+          <a:p>
+            <a:pPr algn="ctr" indent="0" marL="0">
+              <a:buNone/>
+            </a:pPr>
+            <a:r>
+              <a:rPr lang="en-US" sz="3600" b="1" dirty="0">
+                <a:solidFill>
+                  <a:srgbClr val="990011"/>
+                </a:solidFill>
+                <a:latin typeface="Times New Roman" pitchFamily="34" charset="0"/>
+                <a:ea typeface="Times New Roman" pitchFamily="34" charset="-122"/>
+                <a:cs typeface="Times New Roman" pitchFamily="34" charset="-120"/>
+              </a:rPr>
+              <a:t>1. Identification and Manifestations</a:t>
+            </a:r>
+            <a:endParaRPr lang="en-US" sz="3600" dirty="0"/>
+          </a:p>
+        </p:txBody>
+      </p:sp>
+      <p:sp>
+        <p:nvSpPr>
+          <p:cNvPr id="4" name="Text 2"/>
+          <p:cNvSpPr/>
+          <p:nvPr/>
+        </p:nvSpPr>
+        <p:spPr>
+          <a:xfrm>
+            <a:off x="365760" y="1783080"/>
+            <a:ext cx="4846320" cy="4617720"/>
+          </a:xfrm>
+          <a:prstGeom prst="rect">
+            <a:avLst/>
+          </a:prstGeom>
+          <a:noFill/>
+          <a:ln/>
+        </p:spPr>
+        <p:txBody>
+          <a:bodyPr wrap="square" lIns="0" tIns="0" rIns="0" bIns="0" rtlCol="0" anchor="t"/>
+          <a:lstStyle/>
+          <a:p>
+            <a:pPr algn="l" indent="0" marL="0">
+              <a:spcAft>
+                <a:spcPts val="800"/>
+              </a:spcAft>
+              <a:buNone/>
+            </a:pPr>
+            <a:r>
+              <a:rPr lang="en-US" sz="3600" b="1" dirty="0">
+                <a:solidFill>
+                  <a:srgbClr val="111111"/>
+                </a:solidFill>
+                <a:latin typeface="Times New Roman" pitchFamily="34" charset="0"/>
+                <a:ea typeface="Times New Roman" pitchFamily="34" charset="-122"/>
+                <a:cs typeface="Times New Roman" pitchFamily="34" charset="-120"/>
+              </a:rPr>
+              <a:t>Heat waves: </a:t>
+            </a:r>
+            <a:pPr algn="l" indent="0" marL="0">
+              <a:spcAft>
+                <a:spcPts val="800"/>
+              </a:spcAft>
+              <a:buNone/>
+            </a:pPr>
+            <a:r>
+              <a:rPr lang="en-US" sz="3600" dirty="0">
+                <a:solidFill>
+                  <a:srgbClr val="111111"/>
+                </a:solidFill>
+                <a:latin typeface="Times New Roman" pitchFamily="34" charset="0"/>
+                <a:ea typeface="Times New Roman" pitchFamily="34" charset="-122"/>
+                <a:cs typeface="Times New Roman" pitchFamily="34" charset="-120"/>
+              </a:rPr>
+              <a:t>Very hot days and nights occur in the north around March and April.</a:t>
+            </a:r>
+            <a:endParaRPr lang="en-US" sz="3600" dirty="0"/>
+          </a:p>
+        </p:txBody>
+      </p:sp>
       <p:pic>
         <p:nvPicPr>
-          <p:cNvPr id="3" name="Image 0" descr="/home/claude/f4/img/minesec_sheet.png">    </p:cNvPr>
+          <p:cNvPr id="5" name="Image 0" descr="/home/claude/f4/img/v2/f2t_drought.jpg">    </p:cNvPr>
           <p:cNvPicPr>
             <a:picLocks noChangeAspect="1"/>
           </p:cNvPicPr>
@@ -14577,8 +15108,8 @@
         </p:blipFill>
         <p:spPr>
           <a:xfrm>
-            <a:off x="0" y="658368"/>
-            <a:ext cx="5120640" cy="5833872"/>
+            <a:off x="5349240" y="2071212"/>
+            <a:ext cx="6659575" cy="3693983"/>
           </a:xfrm>
           <a:prstGeom prst="rect">
             <a:avLst/>
@@ -14587,14 +15118,14 @@
       </p:pic>
       <p:sp>
         <p:nvSpPr>
-          <p:cNvPr id="4" name="Text 1"/>
+          <p:cNvPr id="6" name="Text 3"/>
           <p:cNvSpPr/>
           <p:nvPr/>
         </p:nvSpPr>
         <p:spPr>
           <a:xfrm>
-            <a:off x="5349240" y="1005840"/>
-            <a:ext cx="6522415" cy="731520"/>
+            <a:off x="5349240" y="6089904"/>
+            <a:ext cx="6659575" cy="347472"/>
           </a:xfrm>
           <a:prstGeom prst="rect">
             <a:avLst/>
@@ -14603,85 +15134,24 @@
           <a:ln/>
         </p:spPr>
         <p:txBody>
-          <a:bodyPr wrap="square" lIns="0" tIns="0" rIns="0" bIns="0" rtlCol="0" anchor="ctr">
-            <a:normAutofit/>
-          </a:bodyPr>
+          <a:bodyPr wrap="square" lIns="0" tIns="0" rIns="0" bIns="0" rtlCol="0" anchor="ctr"/>
           <a:lstStyle/>
           <a:p>
             <a:pPr algn="ctr" indent="0" marL="0">
               <a:buNone/>
             </a:pPr>
             <a:r>
-              <a:rPr lang="en-US" sz="3600" b="1" dirty="0">
-                <a:solidFill>
-                  <a:srgbClr val="990011"/>
+              <a:rPr lang="en-US" sz="1600" i="1" dirty="0">
+                <a:solidFill>
+                  <a:srgbClr val="555555"/>
                 </a:solidFill>
                 <a:latin typeface="Times New Roman" pitchFamily="34" charset="0"/>
                 <a:ea typeface="Times New Roman" pitchFamily="34" charset="-122"/>
                 <a:cs typeface="Times New Roman" pitchFamily="34" charset="-120"/>
               </a:rPr>
-              <a:t>3. Adaptation and Mitigation (continued)</a:t>
-            </a:r>
-            <a:endParaRPr lang="en-US" sz="3600" dirty="0"/>
-          </a:p>
-        </p:txBody>
-      </p:sp>
-      <p:sp>
-        <p:nvSpPr>
-          <p:cNvPr id="5" name="Text 2"/>
-          <p:cNvSpPr/>
-          <p:nvPr/>
-        </p:nvSpPr>
-        <p:spPr>
-          <a:xfrm>
-            <a:off x="5349240" y="1783080"/>
-            <a:ext cx="6522415" cy="4663440"/>
-          </a:xfrm>
-          <a:prstGeom prst="rect">
-            <a:avLst/>
-          </a:prstGeom>
-          <a:noFill/>
-          <a:ln/>
-        </p:spPr>
-        <p:txBody>
-          <a:bodyPr wrap="square" lIns="0" tIns="0" rIns="0" bIns="0" rtlCol="0" anchor="t"/>
-          <a:lstStyle/>
-          <a:p>
-            <a:pPr algn="l" indent="0" marL="0">
-              <a:spcAft>
-                <a:spcPts val="800"/>
-              </a:spcAft>
-              <a:buNone/>
-            </a:pPr>
-            <a:r>
-              <a:rPr lang="en-US" sz="4000" b="1" dirty="0">
-                <a:solidFill>
-                  <a:srgbClr val="111111"/>
-                </a:solidFill>
-                <a:latin typeface="Times New Roman" pitchFamily="34" charset="0"/>
-                <a:ea typeface="Times New Roman" pitchFamily="34" charset="-122"/>
-                <a:cs typeface="Times New Roman" pitchFamily="34" charset="-120"/>
-              </a:rPr>
-              <a:t>Warnings: </a:t>
-            </a:r>
-            <a:pPr algn="l" indent="0" marL="0">
-              <a:spcAft>
-                <a:spcPts val="800"/>
-              </a:spcAft>
-              <a:buNone/>
-            </a:pPr>
-            <a:r>
-              <a:rPr lang="en-US" sz="4000" dirty="0">
-                <a:solidFill>
-                  <a:srgbClr val="111111"/>
-                </a:solidFill>
-                <a:latin typeface="Times New Roman" pitchFamily="34" charset="0"/>
-                <a:ea typeface="Times New Roman" pitchFamily="34" charset="-122"/>
-                <a:cs typeface="Times New Roman" pitchFamily="34" charset="-120"/>
-              </a:rPr>
-              <a:t>The weather service warns people before dangerous weather.</a:t>
-            </a:r>
-            <a:endParaRPr lang="en-US" sz="4000" dirty="0"/>
+              <a:t>Illustration: dry, hot land</a:t>
+            </a:r>
+            <a:endParaRPr lang="en-US" sz="1600" dirty="0"/>
           </a:p>
         </p:txBody>
       </p:sp>
@@ -15030,7 +15500,7 @@
                 <a:ea typeface="Calibri" pitchFamily="34" charset="-122"/>
                 <a:cs typeface="Calibri" pitchFamily="34" charset="-120"/>
               </a:rPr>
-              <a:t>FORMATIVE EVALUATION</a:t>
+              <a:t>BOARD SUMMARY</a:t>
             </a:r>
             <a:endParaRPr lang="en-US" sz="1400" dirty="0"/>
           </a:p>
@@ -15053,7 +15523,7 @@
         <p:spPr>
           <a:xfrm>
             <a:off x="0" y="658368"/>
-            <a:ext cx="5120640" cy="5833872"/>
+            <a:ext cx="3840480" cy="5833872"/>
           </a:xfrm>
           <a:prstGeom prst="rect">
             <a:avLst/>
@@ -15068,8 +15538,8 @@
         </p:nvSpPr>
         <p:spPr>
           <a:xfrm>
-            <a:off x="5349240" y="1005840"/>
-            <a:ext cx="6522415" cy="731520"/>
+            <a:off x="4069080" y="1005840"/>
+            <a:ext cx="7802575" cy="731520"/>
           </a:xfrm>
           <a:prstGeom prst="rect">
             <a:avLst/>
@@ -15095,7 +15565,7 @@
                 <a:ea typeface="Times New Roman" pitchFamily="34" charset="-122"/>
                 <a:cs typeface="Times New Roman" pitchFamily="34" charset="-120"/>
               </a:rPr>
-              <a:t>Evaluation 1</a:t>
+              <a:t>2. Consequences</a:t>
             </a:r>
             <a:endParaRPr lang="en-US" sz="3600" dirty="0"/>
           </a:p>
@@ -15109,8 +15579,8 @@
         </p:nvSpPr>
         <p:spPr>
           <a:xfrm>
-            <a:off x="5349240" y="1783080"/>
-            <a:ext cx="6522415" cy="4663440"/>
+            <a:off x="4069080" y="1783080"/>
+            <a:ext cx="7802575" cy="4663440"/>
           </a:xfrm>
           <a:prstGeom prst="rect">
             <a:avLst/>
@@ -15129,7 +15599,7 @@
               <a:buNone/>
             </a:pPr>
             <a:r>
-              <a:rPr lang="en-US" sz="4000" dirty="0">
+              <a:rPr lang="en-US" sz="4000" i="1" dirty="0">
                 <a:solidFill>
                   <a:srgbClr val="111111"/>
                 </a:solidFill>
@@ -15137,7 +15607,81 @@
                 <a:ea typeface="Times New Roman" pitchFamily="34" charset="-122"/>
                 <a:cs typeface="Times New Roman" pitchFamily="34" charset="-120"/>
               </a:rPr>
-              <a:t>Name three atmospheric disturbances of Cameroon.</a:t>
+              <a:t>These disturbances have the following consequences:</a:t>
+            </a:r>
+            <a:endParaRPr lang="en-US" sz="4000" dirty="0"/>
+          </a:p>
+          <a:p>
+            <a:pPr algn="l" indent="0" marL="0">
+              <a:spcAft>
+                <a:spcPts val="800"/>
+              </a:spcAft>
+              <a:buNone/>
+            </a:pPr>
+            <a:r>
+              <a:rPr lang="en-US" sz="4000" b="1" dirty="0">
+                <a:solidFill>
+                  <a:srgbClr val="111111"/>
+                </a:solidFill>
+                <a:latin typeface="Times New Roman" pitchFamily="34" charset="0"/>
+                <a:ea typeface="Times New Roman" pitchFamily="34" charset="-122"/>
+                <a:cs typeface="Times New Roman" pitchFamily="34" charset="-120"/>
+              </a:rPr>
+              <a:t>Material damage: </a:t>
+            </a:r>
+            <a:pPr algn="l" indent="0" marL="0">
+              <a:spcAft>
+                <a:spcPts val="800"/>
+              </a:spcAft>
+              <a:buNone/>
+            </a:pPr>
+            <a:r>
+              <a:rPr lang="en-US" sz="4000" dirty="0">
+                <a:solidFill>
+                  <a:srgbClr val="111111"/>
+                </a:solidFill>
+                <a:latin typeface="Times New Roman" pitchFamily="34" charset="0"/>
+                <a:ea typeface="Times New Roman" pitchFamily="34" charset="-122"/>
+                <a:cs typeface="Times New Roman" pitchFamily="34" charset="-120"/>
+              </a:rPr>
+              <a:t>Houses, roads, bridges and crops are destroyed.</a:t>
+            </a:r>
+            <a:endParaRPr lang="en-US" sz="4000" dirty="0"/>
+          </a:p>
+          <a:p>
+            <a:pPr algn="l" indent="0" marL="0">
+              <a:spcAft>
+                <a:spcPts val="800"/>
+              </a:spcAft>
+              <a:buNone/>
+            </a:pPr>
+            <a:r>
+              <a:rPr lang="en-US" sz="4000" b="1" dirty="0">
+                <a:solidFill>
+                  <a:srgbClr val="111111"/>
+                </a:solidFill>
+                <a:latin typeface="Times New Roman" pitchFamily="34" charset="0"/>
+                <a:ea typeface="Times New Roman" pitchFamily="34" charset="-122"/>
+                <a:cs typeface="Times New Roman" pitchFamily="34" charset="-120"/>
+              </a:rPr>
+              <a:t>Loss of life: </a:t>
+            </a:r>
+            <a:pPr algn="l" indent="0" marL="0">
+              <a:spcAft>
+                <a:spcPts val="800"/>
+              </a:spcAft>
+              <a:buNone/>
+            </a:pPr>
+            <a:r>
+              <a:rPr lang="en-US" sz="4000" dirty="0">
+                <a:solidFill>
+                  <a:srgbClr val="111111"/>
+                </a:solidFill>
+                <a:latin typeface="Times New Roman" pitchFamily="34" charset="0"/>
+                <a:ea typeface="Times New Roman" pitchFamily="34" charset="-122"/>
+                <a:cs typeface="Times New Roman" pitchFamily="34" charset="-120"/>
+              </a:rPr>
+              <a:t>People and animals die in floods and storms.</a:t>
             </a:r>
             <a:endParaRPr lang="en-US" sz="4000" dirty="0"/>
           </a:p>
@@ -15249,7 +15793,7 @@
                 <a:ea typeface="Calibri" pitchFamily="34" charset="-122"/>
                 <a:cs typeface="Calibri" pitchFamily="34" charset="-120"/>
               </a:rPr>
-              <a:t>FORMATIVE EVALUATION</a:t>
+              <a:t>BOARD SUMMARY</a:t>
             </a:r>
             <a:endParaRPr lang="en-US" sz="1400" dirty="0"/>
           </a:p>
@@ -15314,7 +15858,7 @@
                 <a:ea typeface="Times New Roman" pitchFamily="34" charset="-122"/>
                 <a:cs typeface="Times New Roman" pitchFamily="34" charset="-120"/>
               </a:rPr>
-              <a:t>Expected Answer</a:t>
+              <a:t>2. Consequences (continued)</a:t>
             </a:r>
             <a:endParaRPr lang="en-US" sz="3600" dirty="0"/>
           </a:p>
@@ -15348,7 +15892,7 @@
               <a:buNone/>
             </a:pPr>
             <a:r>
-              <a:rPr lang="en-US" sz="4000" dirty="0">
+              <a:rPr lang="en-US" sz="4000" b="1" dirty="0">
                 <a:solidFill>
                   <a:srgbClr val="111111"/>
                 </a:solidFill>
@@ -15356,7 +15900,61 @@
                 <a:ea typeface="Times New Roman" pitchFamily="34" charset="-122"/>
                 <a:cs typeface="Times New Roman" pitchFamily="34" charset="-120"/>
               </a:rPr>
-              <a:t>Thunderstorms, floods and dust storms (also heat waves).</a:t>
+              <a:t>Diseases: </a:t>
+            </a:r>
+            <a:pPr algn="l" indent="0" marL="0">
+              <a:spcAft>
+                <a:spcPts val="800"/>
+              </a:spcAft>
+              <a:buNone/>
+            </a:pPr>
+            <a:r>
+              <a:rPr lang="en-US" sz="4000" dirty="0">
+                <a:solidFill>
+                  <a:srgbClr val="111111"/>
+                </a:solidFill>
+                <a:latin typeface="Times New Roman" pitchFamily="34" charset="0"/>
+                <a:ea typeface="Times New Roman" pitchFamily="34" charset="-122"/>
+                <a:cs typeface="Times New Roman" pitchFamily="34" charset="-120"/>
+              </a:rPr>
+              <a:t>Floods spread cholera, and dust and heat cause meningitis and breathing diseases.</a:t>
+            </a:r>
+            <a:endParaRPr lang="en-US" sz="4000" dirty="0"/>
+          </a:p>
+          <a:p>
+            <a:pPr algn="l" indent="0" marL="0">
+              <a:spcAft>
+                <a:spcPts val="800"/>
+              </a:spcAft>
+              <a:buNone/>
+            </a:pPr>
+            <a:r>
+              <a:rPr lang="en-US" sz="4000" b="1" dirty="0">
+                <a:solidFill>
+                  <a:srgbClr val="111111"/>
+                </a:solidFill>
+                <a:latin typeface="Times New Roman" pitchFamily="34" charset="0"/>
+                <a:ea typeface="Times New Roman" pitchFamily="34" charset="-122"/>
+                <a:cs typeface="Times New Roman" pitchFamily="34" charset="-120"/>
+              </a:rPr>
+              <a:t>Food shortage: </a:t>
+            </a:r>
+            <a:pPr algn="l" indent="0" marL="0">
+              <a:spcAft>
+                <a:spcPts val="800"/>
+              </a:spcAft>
+              <a:buNone/>
+            </a:pPr>
+            <a:r>
+              <a:rPr lang="en-US" sz="4000" dirty="0">
+                <a:solidFill>
+                  <a:srgbClr val="111111"/>
+                </a:solidFill>
+                <a:latin typeface="Times New Roman" pitchFamily="34" charset="0"/>
+                <a:ea typeface="Times New Roman" pitchFamily="34" charset="-122"/>
+                <a:cs typeface="Times New Roman" pitchFamily="34" charset="-120"/>
+              </a:rPr>
+              <a:t>Destroyed crops lead to hunger.</a:t>
             </a:r>
             <a:endParaRPr lang="en-US" sz="4000" dirty="0"/>
           </a:p>
@@ -15468,7 +16066,7 @@
                 <a:ea typeface="Calibri" pitchFamily="34" charset="-122"/>
                 <a:cs typeface="Calibri" pitchFamily="34" charset="-120"/>
               </a:rPr>
-              <a:t>FORMATIVE EVALUATION</a:t>
+              <a:t>BOARD SUMMARY</a:t>
             </a:r>
             <a:endParaRPr lang="en-US" sz="1400" dirty="0"/>
           </a:p>
@@ -15491,7 +16089,7 @@
         <p:spPr>
           <a:xfrm>
             <a:off x="0" y="658368"/>
-            <a:ext cx="5120640" cy="5833872"/>
+            <a:ext cx="3840480" cy="5833872"/>
           </a:xfrm>
           <a:prstGeom prst="rect">
             <a:avLst/>
@@ -15506,8 +16104,8 @@
         </p:nvSpPr>
         <p:spPr>
           <a:xfrm>
-            <a:off x="5349240" y="1005840"/>
-            <a:ext cx="6522415" cy="731520"/>
+            <a:off x="4069080" y="1005840"/>
+            <a:ext cx="7802575" cy="731520"/>
           </a:xfrm>
           <a:prstGeom prst="rect">
             <a:avLst/>
@@ -15533,7 +16131,7 @@
                 <a:ea typeface="Times New Roman" pitchFamily="34" charset="-122"/>
                 <a:cs typeface="Times New Roman" pitchFamily="34" charset="-120"/>
               </a:rPr>
-              <a:t>Evaluation 2</a:t>
+              <a:t>3. Adaptation and Mitigation Strategies</a:t>
             </a:r>
             <a:endParaRPr lang="en-US" sz="3600" dirty="0"/>
           </a:p>
@@ -15547,8 +16145,8 @@
         </p:nvSpPr>
         <p:spPr>
           <a:xfrm>
-            <a:off x="5349240" y="1783080"/>
-            <a:ext cx="6522415" cy="4663440"/>
+            <a:off x="4069080" y="1783080"/>
+            <a:ext cx="7802575" cy="4663440"/>
           </a:xfrm>
           <a:prstGeom prst="rect">
             <a:avLst/>
@@ -15567,7 +16165,7 @@
               <a:buNone/>
             </a:pPr>
             <a:r>
-              <a:rPr lang="en-US" sz="4000" dirty="0">
+              <a:rPr lang="en-US" sz="4000" i="1" dirty="0">
                 <a:solidFill>
                   <a:srgbClr val="111111"/>
                 </a:solidFill>
@@ -15575,7 +16173,81 @@
                 <a:ea typeface="Times New Roman" pitchFamily="34" charset="-122"/>
                 <a:cs typeface="Times New Roman" pitchFamily="34" charset="-120"/>
               </a:rPr>
-              <a:t>Give two measures against floods.</a:t>
+              <a:t>The following strategies reduce the effects of disturbances:</a:t>
+            </a:r>
+            <a:endParaRPr lang="en-US" sz="4000" dirty="0"/>
+          </a:p>
+          <a:p>
+            <a:pPr algn="l" indent="0" marL="0">
+              <a:spcAft>
+                <a:spcPts val="800"/>
+              </a:spcAft>
+              <a:buNone/>
+            </a:pPr>
+            <a:r>
+              <a:rPr lang="en-US" sz="4000" b="1" dirty="0">
+                <a:solidFill>
+                  <a:srgbClr val="111111"/>
+                </a:solidFill>
+                <a:latin typeface="Times New Roman" pitchFamily="34" charset="0"/>
+                <a:ea typeface="Times New Roman" pitchFamily="34" charset="-122"/>
+                <a:cs typeface="Times New Roman" pitchFamily="34" charset="-120"/>
+              </a:rPr>
+              <a:t>Drainage: </a:t>
+            </a:r>
+            <a:pPr algn="l" indent="0" marL="0">
+              <a:spcAft>
+                <a:spcPts val="800"/>
+              </a:spcAft>
+              <a:buNone/>
+            </a:pPr>
+            <a:r>
+              <a:rPr lang="en-US" sz="4000" dirty="0">
+                <a:solidFill>
+                  <a:srgbClr val="111111"/>
+                </a:solidFill>
+                <a:latin typeface="Times New Roman" pitchFamily="34" charset="0"/>
+                <a:ea typeface="Times New Roman" pitchFamily="34" charset="-122"/>
+                <a:cs typeface="Times New Roman" pitchFamily="34" charset="-120"/>
+              </a:rPr>
+              <a:t>People clean the gutters and councils build drains.</a:t>
+            </a:r>
+            <a:endParaRPr lang="en-US" sz="4000" dirty="0"/>
+          </a:p>
+          <a:p>
+            <a:pPr algn="l" indent="0" marL="0">
+              <a:spcAft>
+                <a:spcPts val="800"/>
+              </a:spcAft>
+              <a:buNone/>
+            </a:pPr>
+            <a:r>
+              <a:rPr lang="en-US" sz="4000" b="1" dirty="0">
+                <a:solidFill>
+                  <a:srgbClr val="111111"/>
+                </a:solidFill>
+                <a:latin typeface="Times New Roman" pitchFamily="34" charset="0"/>
+                <a:ea typeface="Times New Roman" pitchFamily="34" charset="-122"/>
+                <a:cs typeface="Times New Roman" pitchFamily="34" charset="-120"/>
+              </a:rPr>
+              <a:t>Safe building: </a:t>
+            </a:r>
+            <a:pPr algn="l" indent="0" marL="0">
+              <a:spcAft>
+                <a:spcPts val="800"/>
+              </a:spcAft>
+              <a:buNone/>
+            </a:pPr>
+            <a:r>
+              <a:rPr lang="en-US" sz="4000" dirty="0">
+                <a:solidFill>
+                  <a:srgbClr val="111111"/>
+                </a:solidFill>
+                <a:latin typeface="Times New Roman" pitchFamily="34" charset="0"/>
+                <a:ea typeface="Times New Roman" pitchFamily="34" charset="-122"/>
+                <a:cs typeface="Times New Roman" pitchFamily="34" charset="-120"/>
+              </a:rPr>
+              <a:t>People build strong houses away from rivers and valleys.</a:t>
             </a:r>
             <a:endParaRPr lang="en-US" sz="4000" dirty="0"/>
           </a:p>
@@ -15687,15 +16359,115 @@
                 <a:ea typeface="Calibri" pitchFamily="34" charset="-122"/>
                 <a:cs typeface="Calibri" pitchFamily="34" charset="-120"/>
               </a:rPr>
-              <a:t>FORMATIVE EVALUATION</a:t>
+              <a:t>BOARD SUMMARY</a:t>
             </a:r>
             <a:endParaRPr lang="en-US" sz="1400" dirty="0"/>
+          </a:p>
+        </p:txBody>
+      </p:sp>
+      <p:sp>
+        <p:nvSpPr>
+          <p:cNvPr id="3" name="Text 1"/>
+          <p:cNvSpPr/>
+          <p:nvPr/>
+        </p:nvSpPr>
+        <p:spPr>
+          <a:xfrm>
+            <a:off x="365760" y="1005840"/>
+            <a:ext cx="11460175" cy="731520"/>
+          </a:xfrm>
+          <a:prstGeom prst="rect">
+            <a:avLst/>
+          </a:prstGeom>
+          <a:noFill/>
+          <a:ln/>
+        </p:spPr>
+        <p:txBody>
+          <a:bodyPr wrap="square" lIns="0" tIns="0" rIns="0" bIns="0" rtlCol="0" anchor="ctr">
+            <a:normAutofit/>
+          </a:bodyPr>
+          <a:lstStyle/>
+          <a:p>
+            <a:pPr algn="ctr" indent="0" marL="0">
+              <a:buNone/>
+            </a:pPr>
+            <a:r>
+              <a:rPr lang="en-US" sz="3600" b="1" dirty="0">
+                <a:solidFill>
+                  <a:srgbClr val="990011"/>
+                </a:solidFill>
+                <a:latin typeface="Times New Roman" pitchFamily="34" charset="0"/>
+                <a:ea typeface="Times New Roman" pitchFamily="34" charset="-122"/>
+                <a:cs typeface="Times New Roman" pitchFamily="34" charset="-120"/>
+              </a:rPr>
+              <a:t>3. Adaptation and Mitigation Strategies</a:t>
+            </a:r>
+            <a:endParaRPr lang="en-US" sz="3600" dirty="0"/>
+          </a:p>
+        </p:txBody>
+      </p:sp>
+      <p:sp>
+        <p:nvSpPr>
+          <p:cNvPr id="4" name="Text 2"/>
+          <p:cNvSpPr/>
+          <p:nvPr/>
+        </p:nvSpPr>
+        <p:spPr>
+          <a:xfrm>
+            <a:off x="365760" y="1783080"/>
+            <a:ext cx="4846320" cy="4617720"/>
+          </a:xfrm>
+          <a:prstGeom prst="rect">
+            <a:avLst/>
+          </a:prstGeom>
+          <a:noFill/>
+          <a:ln/>
+        </p:spPr>
+        <p:txBody>
+          <a:bodyPr wrap="square" lIns="0" tIns="0" rIns="0" bIns="0" rtlCol="0" anchor="t"/>
+          <a:lstStyle/>
+          <a:p>
+            <a:pPr algn="l" indent="0" marL="0">
+              <a:spcAft>
+                <a:spcPts val="800"/>
+              </a:spcAft>
+              <a:buNone/>
+            </a:pPr>
+            <a:r>
+              <a:rPr lang="en-US" sz="3600" b="1" dirty="0">
+                <a:solidFill>
+                  <a:srgbClr val="111111"/>
+                </a:solidFill>
+                <a:latin typeface="Times New Roman" pitchFamily="34" charset="0"/>
+                <a:ea typeface="Times New Roman" pitchFamily="34" charset="-122"/>
+                <a:cs typeface="Times New Roman" pitchFamily="34" charset="-120"/>
+              </a:rPr>
+              <a:t>Trees and windbreaks: </a:t>
+            </a:r>
+            <a:pPr algn="l" indent="0" marL="0">
+              <a:spcAft>
+                <a:spcPts val="800"/>
+              </a:spcAft>
+              <a:buNone/>
+            </a:pPr>
+            <a:r>
+              <a:rPr lang="en-US" sz="3600" dirty="0">
+                <a:solidFill>
+                  <a:srgbClr val="111111"/>
+                </a:solidFill>
+                <a:latin typeface="Times New Roman" pitchFamily="34" charset="0"/>
+                <a:ea typeface="Times New Roman" pitchFamily="34" charset="-122"/>
+                <a:cs typeface="Times New Roman" pitchFamily="34" charset="-120"/>
+              </a:rPr>
+              <a:t>People plant trees to reduce wind and dust.</a:t>
+            </a:r>
+            <a:endParaRPr lang="en-US" sz="3600" dirty="0"/>
           </a:p>
         </p:txBody>
       </p:sp>
       <p:pic>
         <p:nvPicPr>
-          <p:cNvPr id="3" name="Image 0" descr="/home/claude/f4/img/minesec_sheet.png">    </p:cNvPr>
+          <p:cNvPr id="5" name="Image 0" descr="/home/claude/f4/img/v2/f2t_tree_planting_sahel.jpg">    </p:cNvPr>
           <p:cNvPicPr>
             <a:picLocks noChangeAspect="1"/>
           </p:cNvPicPr>
@@ -15709,8 +16481,8 @@
         </p:blipFill>
         <p:spPr>
           <a:xfrm>
-            <a:off x="0" y="658368"/>
-            <a:ext cx="5120640" cy="5833872"/>
+            <a:off x="5349240" y="2071212"/>
+            <a:ext cx="6659575" cy="3693983"/>
           </a:xfrm>
           <a:prstGeom prst="rect">
             <a:avLst/>
@@ -15719,14 +16491,14 @@
       </p:pic>
       <p:sp>
         <p:nvSpPr>
-          <p:cNvPr id="4" name="Text 1"/>
+          <p:cNvPr id="6" name="Text 3"/>
           <p:cNvSpPr/>
           <p:nvPr/>
         </p:nvSpPr>
         <p:spPr>
           <a:xfrm>
-            <a:off x="5349240" y="1005840"/>
-            <a:ext cx="6522415" cy="731520"/>
+            <a:off x="5349240" y="6089904"/>
+            <a:ext cx="6659575" cy="347472"/>
           </a:xfrm>
           <a:prstGeom prst="rect">
             <a:avLst/>
@@ -15735,68 +16507,24 @@
           <a:ln/>
         </p:spPr>
         <p:txBody>
-          <a:bodyPr wrap="square" lIns="0" tIns="0" rIns="0" bIns="0" rtlCol="0" anchor="ctr">
-            <a:normAutofit/>
-          </a:bodyPr>
+          <a:bodyPr wrap="square" lIns="0" tIns="0" rIns="0" bIns="0" rtlCol="0" anchor="ctr"/>
           <a:lstStyle/>
           <a:p>
             <a:pPr algn="ctr" indent="0" marL="0">
               <a:buNone/>
             </a:pPr>
             <a:r>
-              <a:rPr lang="en-US" sz="3600" b="1" dirty="0">
-                <a:solidFill>
-                  <a:srgbClr val="990011"/>
+              <a:rPr lang="en-US" sz="1600" i="1" dirty="0">
+                <a:solidFill>
+                  <a:srgbClr val="555555"/>
                 </a:solidFill>
                 <a:latin typeface="Times New Roman" pitchFamily="34" charset="0"/>
                 <a:ea typeface="Times New Roman" pitchFamily="34" charset="-122"/>
                 <a:cs typeface="Times New Roman" pitchFamily="34" charset="-120"/>
               </a:rPr>
-              <a:t>Expected Answer</a:t>
-            </a:r>
-            <a:endParaRPr lang="en-US" sz="3600" dirty="0"/>
-          </a:p>
-        </p:txBody>
-      </p:sp>
-      <p:sp>
-        <p:nvSpPr>
-          <p:cNvPr id="5" name="Text 2"/>
-          <p:cNvSpPr/>
-          <p:nvPr/>
-        </p:nvSpPr>
-        <p:spPr>
-          <a:xfrm>
-            <a:off x="5349240" y="1783080"/>
-            <a:ext cx="6522415" cy="4663440"/>
-          </a:xfrm>
-          <a:prstGeom prst="rect">
-            <a:avLst/>
-          </a:prstGeom>
-          <a:noFill/>
-          <a:ln/>
-        </p:spPr>
-        <p:txBody>
-          <a:bodyPr wrap="square" lIns="0" tIns="0" rIns="0" bIns="0" rtlCol="0" anchor="t"/>
-          <a:lstStyle/>
-          <a:p>
-            <a:pPr algn="l" indent="0" marL="0">
-              <a:spcAft>
-                <a:spcPts val="800"/>
-              </a:spcAft>
-              <a:buNone/>
-            </a:pPr>
-            <a:r>
-              <a:rPr lang="en-US" sz="4000" dirty="0">
-                <a:solidFill>
-                  <a:srgbClr val="111111"/>
-                </a:solidFill>
-                <a:latin typeface="Times New Roman" pitchFamily="34" charset="0"/>
-                <a:ea typeface="Times New Roman" pitchFamily="34" charset="-122"/>
-                <a:cs typeface="Times New Roman" pitchFamily="34" charset="-120"/>
-              </a:rPr>
-              <a:t>Clean gutters and avoid building near rivers.</a:t>
-            </a:r>
-            <a:endParaRPr lang="en-US" sz="4000" dirty="0"/>
+              <a:t>Illustration: planting trees</a:t>
+            </a:r>
+            <a:endParaRPr lang="en-US" sz="1600" dirty="0"/>
           </a:p>
         </p:txBody>
       </p:sp>
@@ -15906,7 +16634,7 @@
                 <a:ea typeface="Calibri" pitchFamily="34" charset="-122"/>
                 <a:cs typeface="Calibri" pitchFamily="34" charset="-120"/>
               </a:rPr>
-              <a:t>REMEDIATION</a:t>
+              <a:t>BOARD SUMMARY</a:t>
             </a:r>
             <a:endParaRPr lang="en-US" sz="1400" dirty="0"/>
           </a:p>
@@ -15929,7 +16657,7 @@
         <p:spPr>
           <a:xfrm>
             <a:off x="0" y="658368"/>
-            <a:ext cx="3840480" cy="5833872"/>
+            <a:ext cx="5120640" cy="5833872"/>
           </a:xfrm>
           <a:prstGeom prst="rect">
             <a:avLst/>
@@ -15944,8 +16672,8 @@
         </p:nvSpPr>
         <p:spPr>
           <a:xfrm>
-            <a:off x="4069080" y="1005840"/>
-            <a:ext cx="7802575" cy="731520"/>
+            <a:off x="5349240" y="1005840"/>
+            <a:ext cx="6522415" cy="731520"/>
           </a:xfrm>
           <a:prstGeom prst="rect">
             <a:avLst/>
@@ -15971,7 +16699,7 @@
                 <a:ea typeface="Times New Roman" pitchFamily="34" charset="-122"/>
                 <a:cs typeface="Times New Roman" pitchFamily="34" charset="-120"/>
               </a:rPr>
-              <a:t>Remediation</a:t>
+              <a:t>3. Adaptation and Mitigation Strategies</a:t>
             </a:r>
             <a:endParaRPr lang="en-US" sz="3600" dirty="0"/>
           </a:p>
@@ -15985,8 +16713,8 @@
         </p:nvSpPr>
         <p:spPr>
           <a:xfrm>
-            <a:off x="4069080" y="1783080"/>
-            <a:ext cx="7802575" cy="4663440"/>
+            <a:off x="5349240" y="1783080"/>
+            <a:ext cx="6522415" cy="4663440"/>
           </a:xfrm>
           <a:prstGeom prst="rect">
             <a:avLst/>
@@ -16013,18 +16741,13 @@
                 <a:ea typeface="Times New Roman" pitchFamily="34" charset="-122"/>
                 <a:cs typeface="Times New Roman" pitchFamily="34" charset="-120"/>
               </a:rPr>
-              <a:t>Fill in the blanks:</a:t>
-            </a:r>
-            <a:endParaRPr lang="en-US" sz="4000" dirty="0"/>
-          </a:p>
-          <a:p>
-            <a:pPr algn="l" marL="342900" indent="-342900">
+              <a:t>Warnings and health: </a:t>
+            </a:r>
+            <a:pPr algn="l" indent="0" marL="0">
               <a:spcAft>
                 <a:spcPts val="800"/>
               </a:spcAft>
-              <a:buSzPct val="100000"/>
-              <a:buFont typeface="+mj-lt"/>
-              <a:buAutoNum type="arabicPeriod" startAt="1"/>
+              <a:buNone/>
             </a:pPr>
             <a:r>
               <a:rPr lang="en-US" sz="4000" dirty="0">
@@ -16035,51 +16758,7 @@
                 <a:ea typeface="Times New Roman" pitchFamily="34" charset="-122"/>
                 <a:cs typeface="Times New Roman" pitchFamily="34" charset="-120"/>
               </a:rPr>
-              <a:t>Very heavy rain is ______ rain.</a:t>
-            </a:r>
-            <a:endParaRPr lang="en-US" sz="4000" dirty="0"/>
-          </a:p>
-          <a:p>
-            <a:pPr algn="l" marL="342900" indent="-342900">
-              <a:spcAft>
-                <a:spcPts val="800"/>
-              </a:spcAft>
-              <a:buSzPct val="100000"/>
-              <a:buFont typeface="+mj-lt"/>
-              <a:buAutoNum type="arabicPeriod" startAt="1"/>
-            </a:pPr>
-            <a:r>
-              <a:rPr lang="en-US" sz="4000" dirty="0">
-                <a:solidFill>
-                  <a:srgbClr val="111111"/>
-                </a:solidFill>
-                <a:latin typeface="Times New Roman" pitchFamily="34" charset="0"/>
-                <a:ea typeface="Times New Roman" pitchFamily="34" charset="-122"/>
-                <a:cs typeface="Times New Roman" pitchFamily="34" charset="-120"/>
-              </a:rPr>
-              <a:t>Dust storms occur in the ______ season.</a:t>
-            </a:r>
-            <a:endParaRPr lang="en-US" sz="4000" dirty="0"/>
-          </a:p>
-          <a:p>
-            <a:pPr algn="l" marL="342900" indent="-342900">
-              <a:spcAft>
-                <a:spcPts val="800"/>
-              </a:spcAft>
-              <a:buSzPct val="100000"/>
-              <a:buFont typeface="+mj-lt"/>
-              <a:buAutoNum type="arabicPeriod" startAt="1"/>
-            </a:pPr>
-            <a:r>
-              <a:rPr lang="en-US" sz="4000" dirty="0">
-                <a:solidFill>
-                  <a:srgbClr val="111111"/>
-                </a:solidFill>
-                <a:latin typeface="Times New Roman" pitchFamily="34" charset="0"/>
-                <a:ea typeface="Times New Roman" pitchFamily="34" charset="-122"/>
-                <a:cs typeface="Times New Roman" pitchFamily="34" charset="-120"/>
-              </a:rPr>
-              <a:t>Cholera often follows ______.</a:t>
+              <a:t>The weather service warns people, and people drink enough water and protect their noses from dust.</a:t>
             </a:r>
             <a:endParaRPr lang="en-US" sz="4000" dirty="0"/>
           </a:p>
@@ -16191,7 +16870,7 @@
                 <a:ea typeface="Calibri" pitchFamily="34" charset="-122"/>
                 <a:cs typeface="Calibri" pitchFamily="34" charset="-120"/>
               </a:rPr>
-              <a:t>HOMEWORK</a:t>
+              <a:t>FORMATIVE EVALUATION</a:t>
             </a:r>
             <a:endParaRPr lang="en-US" sz="1400" dirty="0"/>
           </a:p>
@@ -16256,7 +16935,7 @@
                 <a:ea typeface="Times New Roman" pitchFamily="34" charset="-122"/>
                 <a:cs typeface="Times New Roman" pitchFamily="34" charset="-120"/>
               </a:rPr>
-              <a:t>Homework</a:t>
+              <a:t>Evaluation 1</a:t>
             </a:r>
             <a:endParaRPr lang="en-US" sz="3600" dirty="0"/>
           </a:p>
@@ -16298,7 +16977,7 @@
                 <a:ea typeface="Times New Roman" pitchFamily="34" charset="-122"/>
                 <a:cs typeface="Times New Roman" pitchFamily="34" charset="-120"/>
               </a:rPr>
-              <a:t>Ask an elder about a flood or a violent storm in your town and write what happened.</a:t>
+              <a:t>Name three atmospheric disturbances of Cameroon.</a:t>
             </a:r>
             <a:endParaRPr lang="en-US" sz="4000" dirty="0"/>
           </a:p>
@@ -16410,7 +17089,7 @@
                 <a:ea typeface="Calibri" pitchFamily="34" charset="-122"/>
                 <a:cs typeface="Calibri" pitchFamily="34" charset="-120"/>
               </a:rPr>
-              <a:t>NEXT LESSON</a:t>
+              <a:t>FORMATIVE EVALUATION</a:t>
             </a:r>
             <a:endParaRPr lang="en-US" sz="1400" dirty="0"/>
           </a:p>
@@ -16475,7 +17154,7 @@
                 <a:ea typeface="Times New Roman" pitchFamily="34" charset="-122"/>
                 <a:cs typeface="Times New Roman" pitchFamily="34" charset="-120"/>
               </a:rPr>
-              <a:t>Next Lesson</a:t>
+              <a:t>Expected Answer</a:t>
             </a:r>
             <a:endParaRPr lang="en-US" sz="3600" dirty="0"/>
           </a:p>
@@ -16499,17 +17178,17 @@
           <a:ln/>
         </p:spPr>
         <p:txBody>
-          <a:bodyPr wrap="square" lIns="0" tIns="0" rIns="0" bIns="0" rtlCol="0" anchor="ctr"/>
-          <a:lstStyle/>
-          <a:p>
-            <a:pPr algn="ctr" indent="0" marL="0">
+          <a:bodyPr wrap="square" lIns="0" tIns="0" rIns="0" bIns="0" rtlCol="0" anchor="t"/>
+          <a:lstStyle/>
+          <a:p>
+            <a:pPr algn="l" indent="0" marL="0">
               <a:spcAft>
                 <a:spcPts val="800"/>
               </a:spcAft>
               <a:buNone/>
             </a:pPr>
             <a:r>
-              <a:rPr lang="en-US" sz="4000" b="1" dirty="0">
+              <a:rPr lang="en-US" sz="4000" dirty="0">
                 <a:solidFill>
                   <a:srgbClr val="111111"/>
                 </a:solidFill>
@@ -16517,27 +17196,7 @@
                 <a:ea typeface="Times New Roman" pitchFamily="34" charset="-122"/>
                 <a:cs typeface="Times New Roman" pitchFamily="34" charset="-120"/>
               </a:rPr>
-              <a:t>Our next lesson will be on:</a:t>
-            </a:r>
-            <a:endParaRPr lang="en-US" sz="4000" dirty="0"/>
-          </a:p>
-          <a:p>
-            <a:pPr algn="ctr" indent="0" marL="0">
-              <a:spcAft>
-                <a:spcPts val="800"/>
-              </a:spcAft>
-              <a:buNone/>
-            </a:pPr>
-            <a:r>
-              <a:rPr lang="en-US" sz="4000" b="1" dirty="0">
-                <a:solidFill>
-                  <a:srgbClr val="990011"/>
-                </a:solidFill>
-                <a:latin typeface="Times New Roman" pitchFamily="34" charset="0"/>
-                <a:ea typeface="Times New Roman" pitchFamily="34" charset="-122"/>
-                <a:cs typeface="Times New Roman" pitchFamily="34" charset="-120"/>
-              </a:rPr>
-              <a:t>Practical Work 6: Mechanisms of Rain Formation</a:t>
+              <a:t>Thunderstorms, floods and dust storms (also heat waves).</a:t>
             </a:r>
             <a:endParaRPr lang="en-US" sz="4000" dirty="0"/>
           </a:p>
@@ -16649,6 +17308,1406 @@
                 <a:ea typeface="Calibri" pitchFamily="34" charset="-122"/>
                 <a:cs typeface="Calibri" pitchFamily="34" charset="-120"/>
               </a:rPr>
+              <a:t>FORMATIVE EVALUATION</a:t>
+            </a:r>
+            <a:endParaRPr lang="en-US" sz="1400" dirty="0"/>
+          </a:p>
+        </p:txBody>
+      </p:sp>
+      <p:pic>
+        <p:nvPicPr>
+          <p:cNvPr id="3" name="Image 0" descr="/home/claude/f4/img/minesec_sheet.png">    </p:cNvPr>
+          <p:cNvPicPr>
+            <a:picLocks noChangeAspect="1"/>
+          </p:cNvPicPr>
+          <p:nvPr/>
+        </p:nvPicPr>
+        <p:blipFill>
+          <a:blip r:embed="rId1"/>
+          <a:stretch>
+            <a:fillRect/>
+          </a:stretch>
+        </p:blipFill>
+        <p:spPr>
+          <a:xfrm>
+            <a:off x="0" y="658368"/>
+            <a:ext cx="5120640" cy="5833872"/>
+          </a:xfrm>
+          <a:prstGeom prst="rect">
+            <a:avLst/>
+          </a:prstGeom>
+        </p:spPr>
+      </p:pic>
+      <p:sp>
+        <p:nvSpPr>
+          <p:cNvPr id="4" name="Text 1"/>
+          <p:cNvSpPr/>
+          <p:nvPr/>
+        </p:nvSpPr>
+        <p:spPr>
+          <a:xfrm>
+            <a:off x="5349240" y="1005840"/>
+            <a:ext cx="6522415" cy="731520"/>
+          </a:xfrm>
+          <a:prstGeom prst="rect">
+            <a:avLst/>
+          </a:prstGeom>
+          <a:noFill/>
+          <a:ln/>
+        </p:spPr>
+        <p:txBody>
+          <a:bodyPr wrap="square" lIns="0" tIns="0" rIns="0" bIns="0" rtlCol="0" anchor="ctr">
+            <a:normAutofit/>
+          </a:bodyPr>
+          <a:lstStyle/>
+          <a:p>
+            <a:pPr algn="ctr" indent="0" marL="0">
+              <a:buNone/>
+            </a:pPr>
+            <a:r>
+              <a:rPr lang="en-US" sz="3600" b="1" dirty="0">
+                <a:solidFill>
+                  <a:srgbClr val="990011"/>
+                </a:solidFill>
+                <a:latin typeface="Times New Roman" pitchFamily="34" charset="0"/>
+                <a:ea typeface="Times New Roman" pitchFamily="34" charset="-122"/>
+                <a:cs typeface="Times New Roman" pitchFamily="34" charset="-120"/>
+              </a:rPr>
+              <a:t>Evaluation 2</a:t>
+            </a:r>
+            <a:endParaRPr lang="en-US" sz="3600" dirty="0"/>
+          </a:p>
+        </p:txBody>
+      </p:sp>
+      <p:sp>
+        <p:nvSpPr>
+          <p:cNvPr id="5" name="Text 2"/>
+          <p:cNvSpPr/>
+          <p:nvPr/>
+        </p:nvSpPr>
+        <p:spPr>
+          <a:xfrm>
+            <a:off x="5349240" y="1783080"/>
+            <a:ext cx="6522415" cy="4663440"/>
+          </a:xfrm>
+          <a:prstGeom prst="rect">
+            <a:avLst/>
+          </a:prstGeom>
+          <a:noFill/>
+          <a:ln/>
+        </p:spPr>
+        <p:txBody>
+          <a:bodyPr wrap="square" lIns="0" tIns="0" rIns="0" bIns="0" rtlCol="0" anchor="t"/>
+          <a:lstStyle/>
+          <a:p>
+            <a:pPr algn="l" indent="0" marL="0">
+              <a:spcAft>
+                <a:spcPts val="800"/>
+              </a:spcAft>
+              <a:buNone/>
+            </a:pPr>
+            <a:r>
+              <a:rPr lang="en-US" sz="4000" dirty="0">
+                <a:solidFill>
+                  <a:srgbClr val="111111"/>
+                </a:solidFill>
+                <a:latin typeface="Times New Roman" pitchFamily="34" charset="0"/>
+                <a:ea typeface="Times New Roman" pitchFamily="34" charset="-122"/>
+                <a:cs typeface="Times New Roman" pitchFamily="34" charset="-120"/>
+              </a:rPr>
+              <a:t>Give two measures against floods.</a:t>
+            </a:r>
+            <a:endParaRPr lang="en-US" sz="4000" dirty="0"/>
+          </a:p>
+        </p:txBody>
+      </p:sp>
+      <p:sp>
+        <p:nvSpPr>
+          <p:cNvPr id="25" name="Slide Number Placeholder 0"/>
+          <p:cNvSpPr>
+            <a:spLocks noGrp="1"/>
+          </p:cNvSpPr>
+          <p:nvPr>
+            <p:ph type="sldNum" sz="quarter" idx="4294967295"/>
+          </p:nvPr>
+        </p:nvSpPr>
+        <p:spPr>
+          <a:xfrm>
+            <a:off x="27432" y="91440"/>
+            <a:ext cx="585216" cy="475488"/>
+          </a:xfrm>
+          <a:prstGeom prst="rect">
+            <a:avLst/>
+          </a:prstGeom>
+          <a:extLst>
+            <a:ext uri="{C572A759-6A51-4108-AA02-DFA0A04FC94B}">
+              <ma14:wrappingTextBoxFlag xmlns:ma14="http://schemas.microsoft.com/office/mac/drawingml/2011/main" val="0"/>
+            </a:ext>
+          </a:extLst>
+        </p:spPr>
+        <p:txBody>
+          <a:bodyPr/>
+          <a:lstStyle>
+            <a:lvl1pPr>
+              <a:defRPr sz="2000">
+                <a:solidFill>
+                  <a:srgbClr val="FFFFFF"/>
+                </a:solidFill>
+                <a:latin typeface="Calibri"/>
+                <a:ea typeface="Calibri"/>
+                <a:cs typeface="Calibri"/>
+              </a:defRPr>
+            </a:lvl1pPr>
+          </a:lstStyle>
+          <a:p>
+            <a:pPr algn="ctr"/>
+            <a:fld id="{F7021451-1387-4CA6-816F-3879F97B5CBC}" type="slidenum">
+              <a:rPr b="1" lang="en-US"/>
+              <a:t>47</a:t>
+            </a:fld>
+            <a:endParaRPr lang="en-US"/>
+          </a:p>
+        </p:txBody>
+      </p:sp>
+    </p:spTree>
+  </p:cSld>
+  <p:clrMapOvr>
+    <a:masterClrMapping/>
+  </p:clrMapOvr>
+</p:sld>
+</file>
+
+<file path=ppt/slides/slide48.xml><?xml version="1.0" encoding="utf-8"?>
+<p:sld xmlns:a="http://schemas.openxmlformats.org/drawingml/2006/main" xmlns:r="http://schemas.openxmlformats.org/officeDocument/2006/relationships" xmlns:p="http://schemas.openxmlformats.org/presentationml/2006/main">
+  <p:cSld name="Slide 48">
+    <p:spTree>
+      <p:nvGrpSpPr>
+        <p:cNvPr id="1" name=""/>
+        <p:cNvGrpSpPr/>
+        <p:nvPr/>
+      </p:nvGrpSpPr>
+      <p:grpSpPr>
+        <a:xfrm>
+          <a:off x="0" y="0"/>
+          <a:ext cx="0" cy="0"/>
+          <a:chOff x="0" y="0"/>
+          <a:chExt cx="0" cy="0"/>
+        </a:xfrm>
+      </p:grpSpPr>
+      <p:sp>
+        <p:nvSpPr>
+          <p:cNvPr id="2" name="Text 0"/>
+          <p:cNvSpPr/>
+          <p:nvPr/>
+        </p:nvSpPr>
+        <p:spPr>
+          <a:xfrm>
+            <a:off x="457200" y="713232"/>
+            <a:ext cx="11368735" cy="274320"/>
+          </a:xfrm>
+          <a:prstGeom prst="rect">
+            <a:avLst/>
+          </a:prstGeom>
+          <a:noFill/>
+          <a:ln/>
+        </p:spPr>
+        <p:txBody>
+          <a:bodyPr wrap="square" lIns="0" tIns="0" rIns="0" bIns="0" rtlCol="0" anchor="ctr"/>
+          <a:lstStyle/>
+          <a:p>
+            <a:pPr algn="r" indent="0" marL="0">
+              <a:buNone/>
+            </a:pPr>
+            <a:r>
+              <a:rPr lang="en-US" sz="1400" b="1" dirty="0">
+                <a:solidFill>
+                  <a:srgbClr val="1C3F6E"/>
+                </a:solidFill>
+                <a:latin typeface="Calibri" pitchFamily="34" charset="0"/>
+                <a:ea typeface="Calibri" pitchFamily="34" charset="-122"/>
+                <a:cs typeface="Calibri" pitchFamily="34" charset="-120"/>
+              </a:rPr>
+              <a:t>FORMATIVE EVALUATION</a:t>
+            </a:r>
+            <a:endParaRPr lang="en-US" sz="1400" dirty="0"/>
+          </a:p>
+        </p:txBody>
+      </p:sp>
+      <p:pic>
+        <p:nvPicPr>
+          <p:cNvPr id="3" name="Image 0" descr="/home/claude/f4/img/minesec_sheet.png">    </p:cNvPr>
+          <p:cNvPicPr>
+            <a:picLocks noChangeAspect="1"/>
+          </p:cNvPicPr>
+          <p:nvPr/>
+        </p:nvPicPr>
+        <p:blipFill>
+          <a:blip r:embed="rId1"/>
+          <a:stretch>
+            <a:fillRect/>
+          </a:stretch>
+        </p:blipFill>
+        <p:spPr>
+          <a:xfrm>
+            <a:off x="0" y="658368"/>
+            <a:ext cx="5120640" cy="5833872"/>
+          </a:xfrm>
+          <a:prstGeom prst="rect">
+            <a:avLst/>
+          </a:prstGeom>
+        </p:spPr>
+      </p:pic>
+      <p:sp>
+        <p:nvSpPr>
+          <p:cNvPr id="4" name="Text 1"/>
+          <p:cNvSpPr/>
+          <p:nvPr/>
+        </p:nvSpPr>
+        <p:spPr>
+          <a:xfrm>
+            <a:off x="5349240" y="1005840"/>
+            <a:ext cx="6522415" cy="731520"/>
+          </a:xfrm>
+          <a:prstGeom prst="rect">
+            <a:avLst/>
+          </a:prstGeom>
+          <a:noFill/>
+          <a:ln/>
+        </p:spPr>
+        <p:txBody>
+          <a:bodyPr wrap="square" lIns="0" tIns="0" rIns="0" bIns="0" rtlCol="0" anchor="ctr">
+            <a:normAutofit/>
+          </a:bodyPr>
+          <a:lstStyle/>
+          <a:p>
+            <a:pPr algn="ctr" indent="0" marL="0">
+              <a:buNone/>
+            </a:pPr>
+            <a:r>
+              <a:rPr lang="en-US" sz="3600" b="1" dirty="0">
+                <a:solidFill>
+                  <a:srgbClr val="990011"/>
+                </a:solidFill>
+                <a:latin typeface="Times New Roman" pitchFamily="34" charset="0"/>
+                <a:ea typeface="Times New Roman" pitchFamily="34" charset="-122"/>
+                <a:cs typeface="Times New Roman" pitchFamily="34" charset="-120"/>
+              </a:rPr>
+              <a:t>Expected Answer</a:t>
+            </a:r>
+            <a:endParaRPr lang="en-US" sz="3600" dirty="0"/>
+          </a:p>
+        </p:txBody>
+      </p:sp>
+      <p:sp>
+        <p:nvSpPr>
+          <p:cNvPr id="5" name="Text 2"/>
+          <p:cNvSpPr/>
+          <p:nvPr/>
+        </p:nvSpPr>
+        <p:spPr>
+          <a:xfrm>
+            <a:off x="5349240" y="1783080"/>
+            <a:ext cx="6522415" cy="4663440"/>
+          </a:xfrm>
+          <a:prstGeom prst="rect">
+            <a:avLst/>
+          </a:prstGeom>
+          <a:noFill/>
+          <a:ln/>
+        </p:spPr>
+        <p:txBody>
+          <a:bodyPr wrap="square" lIns="0" tIns="0" rIns="0" bIns="0" rtlCol="0" anchor="t"/>
+          <a:lstStyle/>
+          <a:p>
+            <a:pPr algn="l" indent="0" marL="0">
+              <a:spcAft>
+                <a:spcPts val="800"/>
+              </a:spcAft>
+              <a:buNone/>
+            </a:pPr>
+            <a:r>
+              <a:rPr lang="en-US" sz="4000" dirty="0">
+                <a:solidFill>
+                  <a:srgbClr val="111111"/>
+                </a:solidFill>
+                <a:latin typeface="Times New Roman" pitchFamily="34" charset="0"/>
+                <a:ea typeface="Times New Roman" pitchFamily="34" charset="-122"/>
+                <a:cs typeface="Times New Roman" pitchFamily="34" charset="-120"/>
+              </a:rPr>
+              <a:t>Clean gutters and avoid building near rivers.</a:t>
+            </a:r>
+            <a:endParaRPr lang="en-US" sz="4000" dirty="0"/>
+          </a:p>
+        </p:txBody>
+      </p:sp>
+      <p:sp>
+        <p:nvSpPr>
+          <p:cNvPr id="25" name="Slide Number Placeholder 0"/>
+          <p:cNvSpPr>
+            <a:spLocks noGrp="1"/>
+          </p:cNvSpPr>
+          <p:nvPr>
+            <p:ph type="sldNum" sz="quarter" idx="4294967295"/>
+          </p:nvPr>
+        </p:nvSpPr>
+        <p:spPr>
+          <a:xfrm>
+            <a:off x="27432" y="91440"/>
+            <a:ext cx="585216" cy="475488"/>
+          </a:xfrm>
+          <a:prstGeom prst="rect">
+            <a:avLst/>
+          </a:prstGeom>
+          <a:extLst>
+            <a:ext uri="{C572A759-6A51-4108-AA02-DFA0A04FC94B}">
+              <ma14:wrappingTextBoxFlag xmlns:ma14="http://schemas.microsoft.com/office/mac/drawingml/2011/main" val="0"/>
+            </a:ext>
+          </a:extLst>
+        </p:spPr>
+        <p:txBody>
+          <a:bodyPr/>
+          <a:lstStyle>
+            <a:lvl1pPr>
+              <a:defRPr sz="2000">
+                <a:solidFill>
+                  <a:srgbClr val="FFFFFF"/>
+                </a:solidFill>
+                <a:latin typeface="Calibri"/>
+                <a:ea typeface="Calibri"/>
+                <a:cs typeface="Calibri"/>
+              </a:defRPr>
+            </a:lvl1pPr>
+          </a:lstStyle>
+          <a:p>
+            <a:pPr algn="ctr"/>
+            <a:fld id="{F7021451-1387-4CA6-816F-3879F97B5CBC}" type="slidenum">
+              <a:rPr b="1" lang="en-US"/>
+              <a:t>48</a:t>
+            </a:fld>
+            <a:endParaRPr lang="en-US"/>
+          </a:p>
+        </p:txBody>
+      </p:sp>
+    </p:spTree>
+  </p:cSld>
+  <p:clrMapOvr>
+    <a:masterClrMapping/>
+  </p:clrMapOvr>
+</p:sld>
+</file>
+
+<file path=ppt/slides/slide49.xml><?xml version="1.0" encoding="utf-8"?>
+<p:sld xmlns:a="http://schemas.openxmlformats.org/drawingml/2006/main" xmlns:r="http://schemas.openxmlformats.org/officeDocument/2006/relationships" xmlns:p="http://schemas.openxmlformats.org/presentationml/2006/main">
+  <p:cSld name="Slide 49">
+    <p:spTree>
+      <p:nvGrpSpPr>
+        <p:cNvPr id="1" name=""/>
+        <p:cNvGrpSpPr/>
+        <p:nvPr/>
+      </p:nvGrpSpPr>
+      <p:grpSpPr>
+        <a:xfrm>
+          <a:off x="0" y="0"/>
+          <a:ext cx="0" cy="0"/>
+          <a:chOff x="0" y="0"/>
+          <a:chExt cx="0" cy="0"/>
+        </a:xfrm>
+      </p:grpSpPr>
+      <p:sp>
+        <p:nvSpPr>
+          <p:cNvPr id="2" name="Text 0"/>
+          <p:cNvSpPr/>
+          <p:nvPr/>
+        </p:nvSpPr>
+        <p:spPr>
+          <a:xfrm>
+            <a:off x="457200" y="713232"/>
+            <a:ext cx="11368735" cy="274320"/>
+          </a:xfrm>
+          <a:prstGeom prst="rect">
+            <a:avLst/>
+          </a:prstGeom>
+          <a:noFill/>
+          <a:ln/>
+        </p:spPr>
+        <p:txBody>
+          <a:bodyPr wrap="square" lIns="0" tIns="0" rIns="0" bIns="0" rtlCol="0" anchor="ctr"/>
+          <a:lstStyle/>
+          <a:p>
+            <a:pPr algn="r" indent="0" marL="0">
+              <a:buNone/>
+            </a:pPr>
+            <a:r>
+              <a:rPr lang="en-US" sz="1400" b="1" dirty="0">
+                <a:solidFill>
+                  <a:srgbClr val="1C3F6E"/>
+                </a:solidFill>
+                <a:latin typeface="Calibri" pitchFamily="34" charset="0"/>
+                <a:ea typeface="Calibri" pitchFamily="34" charset="-122"/>
+                <a:cs typeface="Calibri" pitchFamily="34" charset="-120"/>
+              </a:rPr>
+              <a:t>REMEDIATION</a:t>
+            </a:r>
+            <a:endParaRPr lang="en-US" sz="1400" dirty="0"/>
+          </a:p>
+        </p:txBody>
+      </p:sp>
+      <p:pic>
+        <p:nvPicPr>
+          <p:cNvPr id="3" name="Image 0" descr="/home/claude/f4/img/minesec_sheet.png">    </p:cNvPr>
+          <p:cNvPicPr>
+            <a:picLocks noChangeAspect="1"/>
+          </p:cNvPicPr>
+          <p:nvPr/>
+        </p:nvPicPr>
+        <p:blipFill>
+          <a:blip r:embed="rId1"/>
+          <a:stretch>
+            <a:fillRect/>
+          </a:stretch>
+        </p:blipFill>
+        <p:spPr>
+          <a:xfrm>
+            <a:off x="0" y="658368"/>
+            <a:ext cx="3840480" cy="5833872"/>
+          </a:xfrm>
+          <a:prstGeom prst="rect">
+            <a:avLst/>
+          </a:prstGeom>
+        </p:spPr>
+      </p:pic>
+      <p:sp>
+        <p:nvSpPr>
+          <p:cNvPr id="4" name="Text 1"/>
+          <p:cNvSpPr/>
+          <p:nvPr/>
+        </p:nvSpPr>
+        <p:spPr>
+          <a:xfrm>
+            <a:off x="4069080" y="1005840"/>
+            <a:ext cx="7802575" cy="731520"/>
+          </a:xfrm>
+          <a:prstGeom prst="rect">
+            <a:avLst/>
+          </a:prstGeom>
+          <a:noFill/>
+          <a:ln/>
+        </p:spPr>
+        <p:txBody>
+          <a:bodyPr wrap="square" lIns="0" tIns="0" rIns="0" bIns="0" rtlCol="0" anchor="ctr">
+            <a:normAutofit/>
+          </a:bodyPr>
+          <a:lstStyle/>
+          <a:p>
+            <a:pPr algn="ctr" indent="0" marL="0">
+              <a:buNone/>
+            </a:pPr>
+            <a:r>
+              <a:rPr lang="en-US" sz="3600" b="1" dirty="0">
+                <a:solidFill>
+                  <a:srgbClr val="990011"/>
+                </a:solidFill>
+                <a:latin typeface="Times New Roman" pitchFamily="34" charset="0"/>
+                <a:ea typeface="Times New Roman" pitchFamily="34" charset="-122"/>
+                <a:cs typeface="Times New Roman" pitchFamily="34" charset="-120"/>
+              </a:rPr>
+              <a:t>Remediation</a:t>
+            </a:r>
+            <a:endParaRPr lang="en-US" sz="3600" dirty="0"/>
+          </a:p>
+        </p:txBody>
+      </p:sp>
+      <p:sp>
+        <p:nvSpPr>
+          <p:cNvPr id="5" name="Text 2"/>
+          <p:cNvSpPr/>
+          <p:nvPr/>
+        </p:nvSpPr>
+        <p:spPr>
+          <a:xfrm>
+            <a:off x="4069080" y="1783080"/>
+            <a:ext cx="7802575" cy="4663440"/>
+          </a:xfrm>
+          <a:prstGeom prst="rect">
+            <a:avLst/>
+          </a:prstGeom>
+          <a:noFill/>
+          <a:ln/>
+        </p:spPr>
+        <p:txBody>
+          <a:bodyPr wrap="square" lIns="0" tIns="0" rIns="0" bIns="0" rtlCol="0" anchor="t"/>
+          <a:lstStyle/>
+          <a:p>
+            <a:pPr algn="l" indent="0" marL="0">
+              <a:spcAft>
+                <a:spcPts val="800"/>
+              </a:spcAft>
+              <a:buNone/>
+            </a:pPr>
+            <a:r>
+              <a:rPr lang="en-US" sz="4000" b="1" dirty="0">
+                <a:solidFill>
+                  <a:srgbClr val="111111"/>
+                </a:solidFill>
+                <a:latin typeface="Times New Roman" pitchFamily="34" charset="0"/>
+                <a:ea typeface="Times New Roman" pitchFamily="34" charset="-122"/>
+                <a:cs typeface="Times New Roman" pitchFamily="34" charset="-120"/>
+              </a:rPr>
+              <a:t>Fill in the blanks:</a:t>
+            </a:r>
+            <a:endParaRPr lang="en-US" sz="4000" dirty="0"/>
+          </a:p>
+          <a:p>
+            <a:pPr algn="l" marL="342900" indent="-342900">
+              <a:spcAft>
+                <a:spcPts val="800"/>
+              </a:spcAft>
+              <a:buSzPct val="100000"/>
+              <a:buFont typeface="+mj-lt"/>
+              <a:buAutoNum type="arabicPeriod" startAt="1"/>
+            </a:pPr>
+            <a:r>
+              <a:rPr lang="en-US" sz="4000" dirty="0">
+                <a:solidFill>
+                  <a:srgbClr val="111111"/>
+                </a:solidFill>
+                <a:latin typeface="Times New Roman" pitchFamily="34" charset="0"/>
+                <a:ea typeface="Times New Roman" pitchFamily="34" charset="-122"/>
+                <a:cs typeface="Times New Roman" pitchFamily="34" charset="-120"/>
+              </a:rPr>
+              <a:t>Very heavy rain is ______ rain.</a:t>
+            </a:r>
+            <a:endParaRPr lang="en-US" sz="4000" dirty="0"/>
+          </a:p>
+          <a:p>
+            <a:pPr algn="l" marL="342900" indent="-342900">
+              <a:spcAft>
+                <a:spcPts val="800"/>
+              </a:spcAft>
+              <a:buSzPct val="100000"/>
+              <a:buFont typeface="+mj-lt"/>
+              <a:buAutoNum type="arabicPeriod" startAt="1"/>
+            </a:pPr>
+            <a:r>
+              <a:rPr lang="en-US" sz="4000" dirty="0">
+                <a:solidFill>
+                  <a:srgbClr val="111111"/>
+                </a:solidFill>
+                <a:latin typeface="Times New Roman" pitchFamily="34" charset="0"/>
+                <a:ea typeface="Times New Roman" pitchFamily="34" charset="-122"/>
+                <a:cs typeface="Times New Roman" pitchFamily="34" charset="-120"/>
+              </a:rPr>
+              <a:t>Dust storms occur in the ______ season.</a:t>
+            </a:r>
+            <a:endParaRPr lang="en-US" sz="4000" dirty="0"/>
+          </a:p>
+          <a:p>
+            <a:pPr algn="l" marL="342900" indent="-342900">
+              <a:spcAft>
+                <a:spcPts val="800"/>
+              </a:spcAft>
+              <a:buSzPct val="100000"/>
+              <a:buFont typeface="+mj-lt"/>
+              <a:buAutoNum type="arabicPeriod" startAt="1"/>
+            </a:pPr>
+            <a:r>
+              <a:rPr lang="en-US" sz="4000" dirty="0">
+                <a:solidFill>
+                  <a:srgbClr val="111111"/>
+                </a:solidFill>
+                <a:latin typeface="Times New Roman" pitchFamily="34" charset="0"/>
+                <a:ea typeface="Times New Roman" pitchFamily="34" charset="-122"/>
+                <a:cs typeface="Times New Roman" pitchFamily="34" charset="-120"/>
+              </a:rPr>
+              <a:t>Cholera often follows ______.</a:t>
+            </a:r>
+            <a:endParaRPr lang="en-US" sz="4000" dirty="0"/>
+          </a:p>
+        </p:txBody>
+      </p:sp>
+      <p:sp>
+        <p:nvSpPr>
+          <p:cNvPr id="25" name="Slide Number Placeholder 0"/>
+          <p:cNvSpPr>
+            <a:spLocks noGrp="1"/>
+          </p:cNvSpPr>
+          <p:nvPr>
+            <p:ph type="sldNum" sz="quarter" idx="4294967295"/>
+          </p:nvPr>
+        </p:nvSpPr>
+        <p:spPr>
+          <a:xfrm>
+            <a:off x="27432" y="91440"/>
+            <a:ext cx="585216" cy="475488"/>
+          </a:xfrm>
+          <a:prstGeom prst="rect">
+            <a:avLst/>
+          </a:prstGeom>
+          <a:extLst>
+            <a:ext uri="{C572A759-6A51-4108-AA02-DFA0A04FC94B}">
+              <ma14:wrappingTextBoxFlag xmlns:ma14="http://schemas.microsoft.com/office/mac/drawingml/2011/main" val="0"/>
+            </a:ext>
+          </a:extLst>
+        </p:spPr>
+        <p:txBody>
+          <a:bodyPr/>
+          <a:lstStyle>
+            <a:lvl1pPr>
+              <a:defRPr sz="2000">
+                <a:solidFill>
+                  <a:srgbClr val="FFFFFF"/>
+                </a:solidFill>
+                <a:latin typeface="Calibri"/>
+                <a:ea typeface="Calibri"/>
+                <a:cs typeface="Calibri"/>
+              </a:defRPr>
+            </a:lvl1pPr>
+          </a:lstStyle>
+          <a:p>
+            <a:pPr algn="ctr"/>
+            <a:fld id="{F7021451-1387-4CA6-816F-3879F97B5CBC}" type="slidenum">
+              <a:rPr b="1" lang="en-US"/>
+              <a:t>49</a:t>
+            </a:fld>
+            <a:endParaRPr lang="en-US"/>
+          </a:p>
+        </p:txBody>
+      </p:sp>
+    </p:spTree>
+  </p:cSld>
+  <p:clrMapOvr>
+    <a:masterClrMapping/>
+  </p:clrMapOvr>
+</p:sld>
+</file>
+
+<file path=ppt/slides/slide5.xml><?xml version="1.0" encoding="utf-8"?>
+<p:sld xmlns:a="http://schemas.openxmlformats.org/drawingml/2006/main" xmlns:r="http://schemas.openxmlformats.org/officeDocument/2006/relationships" xmlns:p="http://schemas.openxmlformats.org/presentationml/2006/main">
+  <p:cSld name="Slide 5">
+    <p:spTree>
+      <p:nvGrpSpPr>
+        <p:cNvPr id="1" name=""/>
+        <p:cNvGrpSpPr/>
+        <p:nvPr/>
+      </p:nvGrpSpPr>
+      <p:grpSpPr>
+        <a:xfrm>
+          <a:off x="0" y="0"/>
+          <a:ext cx="0" cy="0"/>
+          <a:chOff x="0" y="0"/>
+          <a:chExt cx="0" cy="0"/>
+        </a:xfrm>
+      </p:grpSpPr>
+      <p:sp>
+        <p:nvSpPr>
+          <p:cNvPr id="2" name="Text 0"/>
+          <p:cNvSpPr/>
+          <p:nvPr/>
+        </p:nvSpPr>
+        <p:spPr>
+          <a:xfrm>
+            <a:off x="457200" y="713232"/>
+            <a:ext cx="11368735" cy="274320"/>
+          </a:xfrm>
+          <a:prstGeom prst="rect">
+            <a:avLst/>
+          </a:prstGeom>
+          <a:noFill/>
+          <a:ln/>
+        </p:spPr>
+        <p:txBody>
+          <a:bodyPr wrap="square" lIns="0" tIns="0" rIns="0" bIns="0" rtlCol="0" anchor="ctr"/>
+          <a:lstStyle/>
+          <a:p>
+            <a:pPr algn="r" indent="0" marL="0">
+              <a:buNone/>
+            </a:pPr>
+            <a:r>
+              <a:rPr lang="en-US" sz="1400" b="1" dirty="0">
+                <a:solidFill>
+                  <a:srgbClr val="1C3F6E"/>
+                </a:solidFill>
+                <a:latin typeface="Calibri" pitchFamily="34" charset="0"/>
+                <a:ea typeface="Calibri" pitchFamily="34" charset="-122"/>
+                <a:cs typeface="Calibri" pitchFamily="34" charset="-120"/>
+              </a:rPr>
+              <a:t>HOMEWORK CORRECTION</a:t>
+            </a:r>
+            <a:endParaRPr lang="en-US" sz="1400" dirty="0"/>
+          </a:p>
+        </p:txBody>
+      </p:sp>
+      <p:pic>
+        <p:nvPicPr>
+          <p:cNvPr id="3" name="Image 0" descr="/home/claude/f4/img/minesec_sheet.png">    </p:cNvPr>
+          <p:cNvPicPr>
+            <a:picLocks noChangeAspect="1"/>
+          </p:cNvPicPr>
+          <p:nvPr/>
+        </p:nvPicPr>
+        <p:blipFill>
+          <a:blip r:embed="rId1"/>
+          <a:stretch>
+            <a:fillRect/>
+          </a:stretch>
+        </p:blipFill>
+        <p:spPr>
+          <a:xfrm>
+            <a:off x="0" y="658368"/>
+            <a:ext cx="5120640" cy="5833872"/>
+          </a:xfrm>
+          <a:prstGeom prst="rect">
+            <a:avLst/>
+          </a:prstGeom>
+        </p:spPr>
+      </p:pic>
+      <p:sp>
+        <p:nvSpPr>
+          <p:cNvPr id="4" name="Text 1"/>
+          <p:cNvSpPr/>
+          <p:nvPr/>
+        </p:nvSpPr>
+        <p:spPr>
+          <a:xfrm>
+            <a:off x="5349240" y="1005840"/>
+            <a:ext cx="6522415" cy="731520"/>
+          </a:xfrm>
+          <a:prstGeom prst="rect">
+            <a:avLst/>
+          </a:prstGeom>
+          <a:noFill/>
+          <a:ln/>
+        </p:spPr>
+        <p:txBody>
+          <a:bodyPr wrap="square" lIns="0" tIns="0" rIns="0" bIns="0" rtlCol="0" anchor="ctr">
+            <a:normAutofit/>
+          </a:bodyPr>
+          <a:lstStyle/>
+          <a:p>
+            <a:pPr algn="ctr" indent="0" marL="0">
+              <a:buNone/>
+            </a:pPr>
+            <a:r>
+              <a:rPr lang="en-US" sz="3600" b="1" dirty="0">
+                <a:solidFill>
+                  <a:srgbClr val="990011"/>
+                </a:solidFill>
+                <a:latin typeface="Times New Roman" pitchFamily="34" charset="0"/>
+                <a:ea typeface="Times New Roman" pitchFamily="34" charset="-122"/>
+                <a:cs typeface="Times New Roman" pitchFamily="34" charset="-120"/>
+              </a:rPr>
+              <a:t>Correction: Possible Answer</a:t>
+            </a:r>
+            <a:endParaRPr lang="en-US" sz="3600" dirty="0"/>
+          </a:p>
+        </p:txBody>
+      </p:sp>
+      <p:sp>
+        <p:nvSpPr>
+          <p:cNvPr id="5" name="Text 2"/>
+          <p:cNvSpPr/>
+          <p:nvPr/>
+        </p:nvSpPr>
+        <p:spPr>
+          <a:xfrm>
+            <a:off x="5349240" y="1783080"/>
+            <a:ext cx="6522415" cy="4663440"/>
+          </a:xfrm>
+          <a:prstGeom prst="rect">
+            <a:avLst/>
+          </a:prstGeom>
+          <a:noFill/>
+          <a:ln/>
+        </p:spPr>
+        <p:txBody>
+          <a:bodyPr wrap="square" lIns="0" tIns="0" rIns="0" bIns="0" rtlCol="0" anchor="t"/>
+          <a:lstStyle/>
+          <a:p>
+            <a:pPr algn="l" indent="0" marL="0">
+              <a:spcAft>
+                <a:spcPts val="800"/>
+              </a:spcAft>
+              <a:buNone/>
+            </a:pPr>
+            <a:r>
+              <a:rPr lang="en-US" sz="4000" dirty="0">
+                <a:solidFill>
+                  <a:srgbClr val="111111"/>
+                </a:solidFill>
+                <a:latin typeface="Times New Roman" pitchFamily="34" charset="0"/>
+                <a:ea typeface="Times New Roman" pitchFamily="34" charset="-122"/>
+                <a:cs typeface="Times New Roman" pitchFamily="34" charset="-120"/>
+              </a:rPr>
+              <a:t>Stay inside a building; do not shelter under a tree; unplug electrical appliances and stay away from water and metal objects.</a:t>
+            </a:r>
+            <a:endParaRPr lang="en-US" sz="4000" dirty="0"/>
+          </a:p>
+        </p:txBody>
+      </p:sp>
+      <p:sp>
+        <p:nvSpPr>
+          <p:cNvPr id="25" name="Slide Number Placeholder 0"/>
+          <p:cNvSpPr>
+            <a:spLocks noGrp="1"/>
+          </p:cNvSpPr>
+          <p:nvPr>
+            <p:ph type="sldNum" sz="quarter" idx="4294967295"/>
+          </p:nvPr>
+        </p:nvSpPr>
+        <p:spPr>
+          <a:xfrm>
+            <a:off x="27432" y="91440"/>
+            <a:ext cx="585216" cy="475488"/>
+          </a:xfrm>
+          <a:prstGeom prst="rect">
+            <a:avLst/>
+          </a:prstGeom>
+          <a:extLst>
+            <a:ext uri="{C572A759-6A51-4108-AA02-DFA0A04FC94B}">
+              <ma14:wrappingTextBoxFlag xmlns:ma14="http://schemas.microsoft.com/office/mac/drawingml/2011/main" val="0"/>
+            </a:ext>
+          </a:extLst>
+        </p:spPr>
+        <p:txBody>
+          <a:bodyPr/>
+          <a:lstStyle>
+            <a:lvl1pPr>
+              <a:defRPr sz="2000">
+                <a:solidFill>
+                  <a:srgbClr val="FFFFFF"/>
+                </a:solidFill>
+                <a:latin typeface="Calibri"/>
+                <a:ea typeface="Calibri"/>
+                <a:cs typeface="Calibri"/>
+              </a:defRPr>
+            </a:lvl1pPr>
+          </a:lstStyle>
+          <a:p>
+            <a:pPr algn="ctr"/>
+            <a:fld id="{F7021451-1387-4CA6-816F-3879F97B5CBC}" type="slidenum">
+              <a:rPr b="1" lang="en-US"/>
+              <a:t>5</a:t>
+            </a:fld>
+            <a:endParaRPr lang="en-US"/>
+          </a:p>
+        </p:txBody>
+      </p:sp>
+    </p:spTree>
+  </p:cSld>
+  <p:clrMapOvr>
+    <a:masterClrMapping/>
+  </p:clrMapOvr>
+</p:sld>
+</file>
+
+<file path=ppt/slides/slide50.xml><?xml version="1.0" encoding="utf-8"?>
+<p:sld xmlns:a="http://schemas.openxmlformats.org/drawingml/2006/main" xmlns:r="http://schemas.openxmlformats.org/officeDocument/2006/relationships" xmlns:p="http://schemas.openxmlformats.org/presentationml/2006/main">
+  <p:cSld name="Slide 50">
+    <p:spTree>
+      <p:nvGrpSpPr>
+        <p:cNvPr id="1" name=""/>
+        <p:cNvGrpSpPr/>
+        <p:nvPr/>
+      </p:nvGrpSpPr>
+      <p:grpSpPr>
+        <a:xfrm>
+          <a:off x="0" y="0"/>
+          <a:ext cx="0" cy="0"/>
+          <a:chOff x="0" y="0"/>
+          <a:chExt cx="0" cy="0"/>
+        </a:xfrm>
+      </p:grpSpPr>
+      <p:sp>
+        <p:nvSpPr>
+          <p:cNvPr id="2" name="Text 0"/>
+          <p:cNvSpPr/>
+          <p:nvPr/>
+        </p:nvSpPr>
+        <p:spPr>
+          <a:xfrm>
+            <a:off x="457200" y="713232"/>
+            <a:ext cx="11368735" cy="274320"/>
+          </a:xfrm>
+          <a:prstGeom prst="rect">
+            <a:avLst/>
+          </a:prstGeom>
+          <a:noFill/>
+          <a:ln/>
+        </p:spPr>
+        <p:txBody>
+          <a:bodyPr wrap="square" lIns="0" tIns="0" rIns="0" bIns="0" rtlCol="0" anchor="ctr"/>
+          <a:lstStyle/>
+          <a:p>
+            <a:pPr algn="r" indent="0" marL="0">
+              <a:buNone/>
+            </a:pPr>
+            <a:r>
+              <a:rPr lang="en-US" sz="1400" b="1" dirty="0">
+                <a:solidFill>
+                  <a:srgbClr val="1C3F6E"/>
+                </a:solidFill>
+                <a:latin typeface="Calibri" pitchFamily="34" charset="0"/>
+                <a:ea typeface="Calibri" pitchFamily="34" charset="-122"/>
+                <a:cs typeface="Calibri" pitchFamily="34" charset="-120"/>
+              </a:rPr>
+              <a:t>HOMEWORK</a:t>
+            </a:r>
+            <a:endParaRPr lang="en-US" sz="1400" dirty="0"/>
+          </a:p>
+        </p:txBody>
+      </p:sp>
+      <p:pic>
+        <p:nvPicPr>
+          <p:cNvPr id="3" name="Image 0" descr="/home/claude/f4/img/minesec_sheet.png">    </p:cNvPr>
+          <p:cNvPicPr>
+            <a:picLocks noChangeAspect="1"/>
+          </p:cNvPicPr>
+          <p:nvPr/>
+        </p:nvPicPr>
+        <p:blipFill>
+          <a:blip r:embed="rId1"/>
+          <a:stretch>
+            <a:fillRect/>
+          </a:stretch>
+        </p:blipFill>
+        <p:spPr>
+          <a:xfrm>
+            <a:off x="0" y="658368"/>
+            <a:ext cx="5120640" cy="5833872"/>
+          </a:xfrm>
+          <a:prstGeom prst="rect">
+            <a:avLst/>
+          </a:prstGeom>
+        </p:spPr>
+      </p:pic>
+      <p:sp>
+        <p:nvSpPr>
+          <p:cNvPr id="4" name="Text 1"/>
+          <p:cNvSpPr/>
+          <p:nvPr/>
+        </p:nvSpPr>
+        <p:spPr>
+          <a:xfrm>
+            <a:off x="5349240" y="1005840"/>
+            <a:ext cx="6522415" cy="731520"/>
+          </a:xfrm>
+          <a:prstGeom prst="rect">
+            <a:avLst/>
+          </a:prstGeom>
+          <a:noFill/>
+          <a:ln/>
+        </p:spPr>
+        <p:txBody>
+          <a:bodyPr wrap="square" lIns="0" tIns="0" rIns="0" bIns="0" rtlCol="0" anchor="ctr">
+            <a:normAutofit/>
+          </a:bodyPr>
+          <a:lstStyle/>
+          <a:p>
+            <a:pPr algn="ctr" indent="0" marL="0">
+              <a:buNone/>
+            </a:pPr>
+            <a:r>
+              <a:rPr lang="en-US" sz="3600" b="1" dirty="0">
+                <a:solidFill>
+                  <a:srgbClr val="990011"/>
+                </a:solidFill>
+                <a:latin typeface="Times New Roman" pitchFamily="34" charset="0"/>
+                <a:ea typeface="Times New Roman" pitchFamily="34" charset="-122"/>
+                <a:cs typeface="Times New Roman" pitchFamily="34" charset="-120"/>
+              </a:rPr>
+              <a:t>Homework</a:t>
+            </a:r>
+            <a:endParaRPr lang="en-US" sz="3600" dirty="0"/>
+          </a:p>
+        </p:txBody>
+      </p:sp>
+      <p:sp>
+        <p:nvSpPr>
+          <p:cNvPr id="5" name="Text 2"/>
+          <p:cNvSpPr/>
+          <p:nvPr/>
+        </p:nvSpPr>
+        <p:spPr>
+          <a:xfrm>
+            <a:off x="5349240" y="1783080"/>
+            <a:ext cx="6522415" cy="4663440"/>
+          </a:xfrm>
+          <a:prstGeom prst="rect">
+            <a:avLst/>
+          </a:prstGeom>
+          <a:noFill/>
+          <a:ln/>
+        </p:spPr>
+        <p:txBody>
+          <a:bodyPr wrap="square" lIns="0" tIns="0" rIns="0" bIns="0" rtlCol="0" anchor="t"/>
+          <a:lstStyle/>
+          <a:p>
+            <a:pPr algn="l" indent="0" marL="0">
+              <a:spcAft>
+                <a:spcPts val="800"/>
+              </a:spcAft>
+              <a:buNone/>
+            </a:pPr>
+            <a:r>
+              <a:rPr lang="en-US" sz="4000" dirty="0">
+                <a:solidFill>
+                  <a:srgbClr val="111111"/>
+                </a:solidFill>
+                <a:latin typeface="Times New Roman" pitchFamily="34" charset="0"/>
+                <a:ea typeface="Times New Roman" pitchFamily="34" charset="-122"/>
+                <a:cs typeface="Times New Roman" pitchFamily="34" charset="-120"/>
+              </a:rPr>
+              <a:t>Ask an elder about a flood or a violent storm in your town and write what happened.</a:t>
+            </a:r>
+            <a:endParaRPr lang="en-US" sz="4000" dirty="0"/>
+          </a:p>
+        </p:txBody>
+      </p:sp>
+      <p:sp>
+        <p:nvSpPr>
+          <p:cNvPr id="25" name="Slide Number Placeholder 0"/>
+          <p:cNvSpPr>
+            <a:spLocks noGrp="1"/>
+          </p:cNvSpPr>
+          <p:nvPr>
+            <p:ph type="sldNum" sz="quarter" idx="4294967295"/>
+          </p:nvPr>
+        </p:nvSpPr>
+        <p:spPr>
+          <a:xfrm>
+            <a:off x="27432" y="91440"/>
+            <a:ext cx="585216" cy="475488"/>
+          </a:xfrm>
+          <a:prstGeom prst="rect">
+            <a:avLst/>
+          </a:prstGeom>
+          <a:extLst>
+            <a:ext uri="{C572A759-6A51-4108-AA02-DFA0A04FC94B}">
+              <ma14:wrappingTextBoxFlag xmlns:ma14="http://schemas.microsoft.com/office/mac/drawingml/2011/main" val="0"/>
+            </a:ext>
+          </a:extLst>
+        </p:spPr>
+        <p:txBody>
+          <a:bodyPr/>
+          <a:lstStyle>
+            <a:lvl1pPr>
+              <a:defRPr sz="2000">
+                <a:solidFill>
+                  <a:srgbClr val="FFFFFF"/>
+                </a:solidFill>
+                <a:latin typeface="Calibri"/>
+                <a:ea typeface="Calibri"/>
+                <a:cs typeface="Calibri"/>
+              </a:defRPr>
+            </a:lvl1pPr>
+          </a:lstStyle>
+          <a:p>
+            <a:pPr algn="ctr"/>
+            <a:fld id="{F7021451-1387-4CA6-816F-3879F97B5CBC}" type="slidenum">
+              <a:rPr b="1" lang="en-US"/>
+              <a:t>50</a:t>
+            </a:fld>
+            <a:endParaRPr lang="en-US"/>
+          </a:p>
+        </p:txBody>
+      </p:sp>
+    </p:spTree>
+  </p:cSld>
+  <p:clrMapOvr>
+    <a:masterClrMapping/>
+  </p:clrMapOvr>
+</p:sld>
+</file>
+
+<file path=ppt/slides/slide51.xml><?xml version="1.0" encoding="utf-8"?>
+<p:sld xmlns:a="http://schemas.openxmlformats.org/drawingml/2006/main" xmlns:r="http://schemas.openxmlformats.org/officeDocument/2006/relationships" xmlns:p="http://schemas.openxmlformats.org/presentationml/2006/main">
+  <p:cSld name="Slide 51">
+    <p:spTree>
+      <p:nvGrpSpPr>
+        <p:cNvPr id="1" name=""/>
+        <p:cNvGrpSpPr/>
+        <p:nvPr/>
+      </p:nvGrpSpPr>
+      <p:grpSpPr>
+        <a:xfrm>
+          <a:off x="0" y="0"/>
+          <a:ext cx="0" cy="0"/>
+          <a:chOff x="0" y="0"/>
+          <a:chExt cx="0" cy="0"/>
+        </a:xfrm>
+      </p:grpSpPr>
+      <p:sp>
+        <p:nvSpPr>
+          <p:cNvPr id="2" name="Text 0"/>
+          <p:cNvSpPr/>
+          <p:nvPr/>
+        </p:nvSpPr>
+        <p:spPr>
+          <a:xfrm>
+            <a:off x="457200" y="713232"/>
+            <a:ext cx="11368735" cy="274320"/>
+          </a:xfrm>
+          <a:prstGeom prst="rect">
+            <a:avLst/>
+          </a:prstGeom>
+          <a:noFill/>
+          <a:ln/>
+        </p:spPr>
+        <p:txBody>
+          <a:bodyPr wrap="square" lIns="0" tIns="0" rIns="0" bIns="0" rtlCol="0" anchor="ctr"/>
+          <a:lstStyle/>
+          <a:p>
+            <a:pPr algn="r" indent="0" marL="0">
+              <a:buNone/>
+            </a:pPr>
+            <a:r>
+              <a:rPr lang="en-US" sz="1400" b="1" dirty="0">
+                <a:solidFill>
+                  <a:srgbClr val="1C3F6E"/>
+                </a:solidFill>
+                <a:latin typeface="Calibri" pitchFamily="34" charset="0"/>
+                <a:ea typeface="Calibri" pitchFamily="34" charset="-122"/>
+                <a:cs typeface="Calibri" pitchFamily="34" charset="-120"/>
+              </a:rPr>
+              <a:t>NEXT LESSON</a:t>
+            </a:r>
+            <a:endParaRPr lang="en-US" sz="1400" dirty="0"/>
+          </a:p>
+        </p:txBody>
+      </p:sp>
+      <p:pic>
+        <p:nvPicPr>
+          <p:cNvPr id="3" name="Image 0" descr="/home/claude/f4/img/minesec_sheet.png">    </p:cNvPr>
+          <p:cNvPicPr>
+            <a:picLocks noChangeAspect="1"/>
+          </p:cNvPicPr>
+          <p:nvPr/>
+        </p:nvPicPr>
+        <p:blipFill>
+          <a:blip r:embed="rId1"/>
+          <a:stretch>
+            <a:fillRect/>
+          </a:stretch>
+        </p:blipFill>
+        <p:spPr>
+          <a:xfrm>
+            <a:off x="0" y="658368"/>
+            <a:ext cx="5120640" cy="5833872"/>
+          </a:xfrm>
+          <a:prstGeom prst="rect">
+            <a:avLst/>
+          </a:prstGeom>
+        </p:spPr>
+      </p:pic>
+      <p:sp>
+        <p:nvSpPr>
+          <p:cNvPr id="4" name="Text 1"/>
+          <p:cNvSpPr/>
+          <p:nvPr/>
+        </p:nvSpPr>
+        <p:spPr>
+          <a:xfrm>
+            <a:off x="5349240" y="1005840"/>
+            <a:ext cx="6522415" cy="731520"/>
+          </a:xfrm>
+          <a:prstGeom prst="rect">
+            <a:avLst/>
+          </a:prstGeom>
+          <a:noFill/>
+          <a:ln/>
+        </p:spPr>
+        <p:txBody>
+          <a:bodyPr wrap="square" lIns="0" tIns="0" rIns="0" bIns="0" rtlCol="0" anchor="ctr">
+            <a:normAutofit/>
+          </a:bodyPr>
+          <a:lstStyle/>
+          <a:p>
+            <a:pPr algn="ctr" indent="0" marL="0">
+              <a:buNone/>
+            </a:pPr>
+            <a:r>
+              <a:rPr lang="en-US" sz="3600" b="1" dirty="0">
+                <a:solidFill>
+                  <a:srgbClr val="990011"/>
+                </a:solidFill>
+                <a:latin typeface="Times New Roman" pitchFamily="34" charset="0"/>
+                <a:ea typeface="Times New Roman" pitchFamily="34" charset="-122"/>
+                <a:cs typeface="Times New Roman" pitchFamily="34" charset="-120"/>
+              </a:rPr>
+              <a:t>Next Lesson</a:t>
+            </a:r>
+            <a:endParaRPr lang="en-US" sz="3600" dirty="0"/>
+          </a:p>
+        </p:txBody>
+      </p:sp>
+      <p:sp>
+        <p:nvSpPr>
+          <p:cNvPr id="5" name="Text 2"/>
+          <p:cNvSpPr/>
+          <p:nvPr/>
+        </p:nvSpPr>
+        <p:spPr>
+          <a:xfrm>
+            <a:off x="5349240" y="1783080"/>
+            <a:ext cx="6522415" cy="4663440"/>
+          </a:xfrm>
+          <a:prstGeom prst="rect">
+            <a:avLst/>
+          </a:prstGeom>
+          <a:noFill/>
+          <a:ln/>
+        </p:spPr>
+        <p:txBody>
+          <a:bodyPr wrap="square" lIns="0" tIns="0" rIns="0" bIns="0" rtlCol="0" anchor="ctr"/>
+          <a:lstStyle/>
+          <a:p>
+            <a:pPr algn="ctr" indent="0" marL="0">
+              <a:spcAft>
+                <a:spcPts val="800"/>
+              </a:spcAft>
+              <a:buNone/>
+            </a:pPr>
+            <a:r>
+              <a:rPr lang="en-US" sz="4000" b="1" dirty="0">
+                <a:solidFill>
+                  <a:srgbClr val="111111"/>
+                </a:solidFill>
+                <a:latin typeface="Times New Roman" pitchFamily="34" charset="0"/>
+                <a:ea typeface="Times New Roman" pitchFamily="34" charset="-122"/>
+                <a:cs typeface="Times New Roman" pitchFamily="34" charset="-120"/>
+              </a:rPr>
+              <a:t>Our next lesson will be on:</a:t>
+            </a:r>
+            <a:endParaRPr lang="en-US" sz="4000" dirty="0"/>
+          </a:p>
+          <a:p>
+            <a:pPr algn="ctr" indent="0" marL="0">
+              <a:spcAft>
+                <a:spcPts val="800"/>
+              </a:spcAft>
+              <a:buNone/>
+            </a:pPr>
+            <a:r>
+              <a:rPr lang="en-US" sz="4000" b="1" dirty="0">
+                <a:solidFill>
+                  <a:srgbClr val="990011"/>
+                </a:solidFill>
+                <a:latin typeface="Times New Roman" pitchFamily="34" charset="0"/>
+                <a:ea typeface="Times New Roman" pitchFamily="34" charset="-122"/>
+                <a:cs typeface="Times New Roman" pitchFamily="34" charset="-120"/>
+              </a:rPr>
+              <a:t>Practical Work 6: Mechanisms of Rain Formation</a:t>
+            </a:r>
+            <a:endParaRPr lang="en-US" sz="4000" dirty="0"/>
+          </a:p>
+        </p:txBody>
+      </p:sp>
+      <p:sp>
+        <p:nvSpPr>
+          <p:cNvPr id="25" name="Slide Number Placeholder 0"/>
+          <p:cNvSpPr>
+            <a:spLocks noGrp="1"/>
+          </p:cNvSpPr>
+          <p:nvPr>
+            <p:ph type="sldNum" sz="quarter" idx="4294967295"/>
+          </p:nvPr>
+        </p:nvSpPr>
+        <p:spPr>
+          <a:xfrm>
+            <a:off x="27432" y="91440"/>
+            <a:ext cx="585216" cy="475488"/>
+          </a:xfrm>
+          <a:prstGeom prst="rect">
+            <a:avLst/>
+          </a:prstGeom>
+          <a:extLst>
+            <a:ext uri="{C572A759-6A51-4108-AA02-DFA0A04FC94B}">
+              <ma14:wrappingTextBoxFlag xmlns:ma14="http://schemas.microsoft.com/office/mac/drawingml/2011/main" val="0"/>
+            </a:ext>
+          </a:extLst>
+        </p:spPr>
+        <p:txBody>
+          <a:bodyPr/>
+          <a:lstStyle>
+            <a:lvl1pPr>
+              <a:defRPr sz="2000">
+                <a:solidFill>
+                  <a:srgbClr val="FFFFFF"/>
+                </a:solidFill>
+                <a:latin typeface="Calibri"/>
+                <a:ea typeface="Calibri"/>
+                <a:cs typeface="Calibri"/>
+              </a:defRPr>
+            </a:lvl1pPr>
+          </a:lstStyle>
+          <a:p>
+            <a:pPr algn="ctr"/>
+            <a:fld id="{F7021451-1387-4CA6-816F-3879F97B5CBC}" type="slidenum">
+              <a:rPr b="1" lang="en-US"/>
+              <a:t>51</a:t>
+            </a:fld>
+            <a:endParaRPr lang="en-US"/>
+          </a:p>
+        </p:txBody>
+      </p:sp>
+    </p:spTree>
+  </p:cSld>
+  <p:clrMapOvr>
+    <a:masterClrMapping/>
+  </p:clrMapOvr>
+</p:sld>
+</file>
+
+<file path=ppt/slides/slide52.xml><?xml version="1.0" encoding="utf-8"?>
+<p:sld xmlns:a="http://schemas.openxmlformats.org/drawingml/2006/main" xmlns:r="http://schemas.openxmlformats.org/officeDocument/2006/relationships" xmlns:p="http://schemas.openxmlformats.org/presentationml/2006/main">
+  <p:cSld name="Slide 52">
+    <p:spTree>
+      <p:nvGrpSpPr>
+        <p:cNvPr id="1" name=""/>
+        <p:cNvGrpSpPr/>
+        <p:nvPr/>
+      </p:nvGrpSpPr>
+      <p:grpSpPr>
+        <a:xfrm>
+          <a:off x="0" y="0"/>
+          <a:ext cx="0" cy="0"/>
+          <a:chOff x="0" y="0"/>
+          <a:chExt cx="0" cy="0"/>
+        </a:xfrm>
+      </p:grpSpPr>
+      <p:sp>
+        <p:nvSpPr>
+          <p:cNvPr id="2" name="Text 0"/>
+          <p:cNvSpPr/>
+          <p:nvPr/>
+        </p:nvSpPr>
+        <p:spPr>
+          <a:xfrm>
+            <a:off x="457200" y="713232"/>
+            <a:ext cx="11368735" cy="274320"/>
+          </a:xfrm>
+          <a:prstGeom prst="rect">
+            <a:avLst/>
+          </a:prstGeom>
+          <a:noFill/>
+          <a:ln/>
+        </p:spPr>
+        <p:txBody>
+          <a:bodyPr wrap="square" lIns="0" tIns="0" rIns="0" bIns="0" rtlCol="0" anchor="ctr"/>
+          <a:lstStyle/>
+          <a:p>
+            <a:pPr algn="r" indent="0" marL="0">
+              <a:buNone/>
+            </a:pPr>
+            <a:r>
+              <a:rPr lang="en-US" sz="1400" b="1" dirty="0">
+                <a:solidFill>
+                  <a:srgbClr val="1C3F6E"/>
+                </a:solidFill>
+                <a:latin typeface="Calibri" pitchFamily="34" charset="0"/>
+                <a:ea typeface="Calibri" pitchFamily="34" charset="-122"/>
+                <a:cs typeface="Calibri" pitchFamily="34" charset="-120"/>
+              </a:rPr>
               <a:t>BILINGUAL GAME</a:t>
             </a:r>
             <a:endParaRPr lang="en-US" sz="1400" dirty="0"/>
@@ -16696,7 +18755,7 @@
       </p:sp>
       <p:graphicFrame>
         <p:nvGraphicFramePr>
-          <p:cNvPr id="48" name="Table 0"/>
+          <p:cNvPr id="53" name="Table 0"/>
           <p:cNvGraphicFramePr>
             <a:graphicFrameLocks noGrp="1"/>
           </p:cNvGraphicFramePr>
@@ -17732,7 +19791,7 @@
             <a:pPr algn="ctr"/>
             <a:fld id="{F7021451-1387-4CA6-816F-3879F97B5CBC}" type="slidenum">
               <a:rPr b="1" lang="en-US"/>
-              <a:t>47</a:t>
+              <a:t>52</a:t>
             </a:fld>
             <a:endParaRPr lang="en-US"/>
           </a:p>
@@ -17746,9 +19805,9 @@
 </p:sld>
 </file>
 
-<file path=ppt/slides/slide48.xml><?xml version="1.0" encoding="utf-8"?>
+<file path=ppt/slides/slide53.xml><?xml version="1.0" encoding="utf-8"?>
 <p:sld xmlns:a="http://schemas.openxmlformats.org/drawingml/2006/main" xmlns:r="http://schemas.openxmlformats.org/officeDocument/2006/relationships" xmlns:p="http://schemas.openxmlformats.org/presentationml/2006/main">
-  <p:cSld name="Slide 48">
+  <p:cSld name="Slide 53">
     <p:spTree>
       <p:nvGrpSpPr>
         <p:cNvPr id="1" name=""/>
@@ -17843,7 +19902,7 @@
       </p:sp>
       <p:graphicFrame>
         <p:nvGraphicFramePr>
-          <p:cNvPr id="49" name="Table 0"/>
+          <p:cNvPr id="54" name="Table 0"/>
           <p:cNvGraphicFramePr>
             <a:graphicFrameLocks noGrp="1"/>
           </p:cNvGraphicFramePr>
@@ -18229,7 +20288,7 @@
                           <a:ea typeface="Calibri" pitchFamily="34" charset="-122"/>
                           <a:cs typeface="Calibri" pitchFamily="34" charset="-120"/>
                         </a:rPr>
-                        <a:t>Identify the atmospheric disturbances of Cameroon. Describe their manifestations and consequences. Propose adaptation and mitigation strategies.</a:t>
+                        <a:t>Identify the atmospheric disturbances of Cameroon and their manifestations. Give their consequences. Propose adaptation and mitigation strategies.</a:t>
                       </a:r>
                       <a:endParaRPr lang="en-US" sz="1600" dirty="0">
                         <a:latin typeface="Calibri" charset="0"/>
@@ -18465,7 +20524,7 @@
             <a:pPr algn="ctr"/>
             <a:fld id="{F7021451-1387-4CA6-816F-3879F97B5CBC}" type="slidenum">
               <a:rPr b="1" lang="en-US"/>
-              <a:t>48</a:t>
+              <a:t>53</a:t>
             </a:fld>
             <a:endParaRPr lang="en-US"/>
           </a:p>
@@ -18479,9 +20538,9 @@
 </p:sld>
 </file>
 
-<file path=ppt/slides/slide49.xml><?xml version="1.0" encoding="utf-8"?>
+<file path=ppt/slides/slide54.xml><?xml version="1.0" encoding="utf-8"?>
 <p:sld xmlns:a="http://schemas.openxmlformats.org/drawingml/2006/main" xmlns:r="http://schemas.openxmlformats.org/officeDocument/2006/relationships" xmlns:p="http://schemas.openxmlformats.org/presentationml/2006/main">
-  <p:cSld name="Slide 49">
+  <p:cSld name="Slide 54">
     <p:spTree>
       <p:nvGrpSpPr>
         <p:cNvPr id="1" name=""/>
@@ -18576,7 +20635,7 @@
       </p:sp>
       <p:graphicFrame>
         <p:nvGraphicFramePr>
-          <p:cNvPr id="50" name="Table 0"/>
+          <p:cNvPr id="55" name="Table 0"/>
           <p:cNvGraphicFramePr>
             <a:graphicFrameLocks noGrp="1"/>
           </p:cNvGraphicFramePr>
@@ -18686,7 +20745,7 @@
                           <a:ea typeface="Calibri" pitchFamily="34" charset="-122"/>
                           <a:cs typeface="Calibri" pitchFamily="34" charset="-120"/>
                         </a:rPr>
-                        <a:t>Identification and Manifestations; Consequences; Adaptation and Mitigation.</a:t>
+                        <a:t>DEFINITIONS; Identification and Manifestations; Consequences; Adaptation and Mitigation Strategies.</a:t>
                       </a:r>
                       <a:endParaRPr lang="en-US" sz="1600" dirty="0">
                         <a:latin typeface="Calibri" charset="0"/>
@@ -19336,7 +21395,7 @@
             <a:pPr algn="ctr"/>
             <a:fld id="{F7021451-1387-4CA6-816F-3879F97B5CBC}" type="slidenum">
               <a:rPr b="1" lang="en-US"/>
-              <a:t>49</a:t>
+              <a:t>54</a:t>
             </a:fld>
             <a:endParaRPr lang="en-US"/>
           </a:p>
@@ -19350,9 +21409,9 @@
 </p:sld>
 </file>
 
-<file path=ppt/slides/slide5.xml><?xml version="1.0" encoding="utf-8"?>
+<file path=ppt/slides/slide55.xml><?xml version="1.0" encoding="utf-8"?>
 <p:sld xmlns:a="http://schemas.openxmlformats.org/drawingml/2006/main" xmlns:r="http://schemas.openxmlformats.org/officeDocument/2006/relationships" xmlns:p="http://schemas.openxmlformats.org/presentationml/2006/main">
-  <p:cSld name="Slide 5">
+  <p:cSld name="Slide 55">
     <p:spTree>
       <p:nvGrpSpPr>
         <p:cNvPr id="1" name=""/>
@@ -19400,7 +21459,7 @@
                 <a:ea typeface="Calibri" pitchFamily="34" charset="-122"/>
                 <a:cs typeface="Calibri" pitchFamily="34" charset="-120"/>
               </a:rPr>
-              <a:t>HOMEWORK CORRECTION</a:t>
+              <a:t>TEACHER'S NOTE</a:t>
             </a:r>
             <a:endParaRPr lang="en-US" sz="1400" dirty="0"/>
           </a:p>
@@ -19423,7 +21482,7 @@
         <p:spPr>
           <a:xfrm>
             <a:off x="0" y="658368"/>
-            <a:ext cx="5120640" cy="5833872"/>
+            <a:ext cx="3840480" cy="5833872"/>
           </a:xfrm>
           <a:prstGeom prst="rect">
             <a:avLst/>
@@ -19438,8 +21497,8 @@
         </p:nvSpPr>
         <p:spPr>
           <a:xfrm>
-            <a:off x="5349240" y="1005840"/>
-            <a:ext cx="6522415" cy="731520"/>
+            <a:off x="4069080" y="1005840"/>
+            <a:ext cx="7802575" cy="731520"/>
           </a:xfrm>
           <a:prstGeom prst="rect">
             <a:avLst/>
@@ -19465,7 +21524,7 @@
                 <a:ea typeface="Times New Roman" pitchFamily="34" charset="-122"/>
                 <a:cs typeface="Times New Roman" pitchFamily="34" charset="-120"/>
               </a:rPr>
-              <a:t>Correction: Possible Answer</a:t>
+              <a:t>Teacher's Note</a:t>
             </a:r>
             <a:endParaRPr lang="en-US" sz="3600" dirty="0"/>
           </a:p>
@@ -19479,8 +21538,8 @@
         </p:nvSpPr>
         <p:spPr>
           <a:xfrm>
-            <a:off x="5349240" y="1783080"/>
-            <a:ext cx="6522415" cy="4663440"/>
+            <a:off x="4069080" y="1783080"/>
+            <a:ext cx="7802575" cy="4663440"/>
           </a:xfrm>
           <a:prstGeom prst="rect">
             <a:avLst/>
@@ -19492,24 +21551,130 @@
           <a:bodyPr wrap="square" lIns="0" tIns="0" rIns="0" bIns="0" rtlCol="0" anchor="t"/>
           <a:lstStyle/>
           <a:p>
-            <a:pPr algn="l" indent="0" marL="0">
+            <a:pPr algn="l" marL="342900" indent="-342900">
               <a:spcAft>
                 <a:spcPts val="800"/>
               </a:spcAft>
-              <a:buNone/>
+              <a:buSzPct val="100000"/>
+              <a:buChar char="•"/>
             </a:pPr>
             <a:r>
-              <a:rPr lang="en-US" sz="4000" dirty="0">
+              <a:rPr lang="en-US" sz="2000" dirty="0">
                 <a:solidFill>
                   <a:srgbClr val="111111"/>
                 </a:solidFill>
-                <a:latin typeface="Times New Roman" pitchFamily="34" charset="0"/>
-                <a:ea typeface="Times New Roman" pitchFamily="34" charset="-122"/>
-                <a:cs typeface="Times New Roman" pitchFamily="34" charset="-120"/>
+                <a:latin typeface="Calibri" pitchFamily="34" charset="0"/>
+                <a:ea typeface="Calibri" pitchFamily="34" charset="-122"/>
+                <a:cs typeface="Calibri" pitchFamily="34" charset="-120"/>
               </a:rPr>
-              <a:t>Stay inside a building; do not shelter under a tree; unplug electrical appliances and stay away from water and metal objects.</a:t>
-            </a:r>
-            <a:endParaRPr lang="en-US" sz="4000" dirty="0"/>
+              <a:t>Timing: Homework correction, plan, objectives 8 min | Recall, situation, action 10 min | 5 activities 30 min | Board summary (copying) 30 min | Evaluation, remediation 10 min | Homework, next lesson 5 min | Logbook 7 min</a:t>
+            </a:r>
+            <a:endParaRPr lang="en-US" sz="2000" dirty="0"/>
+          </a:p>
+          <a:p>
+            <a:pPr algn="l" marL="342900" indent="-342900">
+              <a:spcAft>
+                <a:spcPts val="800"/>
+              </a:spcAft>
+              <a:buSzPct val="100000"/>
+              <a:buChar char="•"/>
+            </a:pPr>
+            <a:r>
+              <a:rPr lang="en-US" sz="2000" dirty="0">
+                <a:solidFill>
+                  <a:srgbClr val="111111"/>
+                </a:solidFill>
+                <a:latin typeface="Calibri" pitchFamily="34" charset="0"/>
+                <a:ea typeface="Calibri" pitchFamily="34" charset="-122"/>
+                <a:cs typeface="Calibri" pitchFamily="34" charset="-120"/>
+              </a:rPr>
+              <a:t>Without the projector (Activity 1): draw the map of Cameroon.</a:t>
+            </a:r>
+            <a:endParaRPr lang="en-US" sz="2000" dirty="0"/>
+          </a:p>
+          <a:p>
+            <a:pPr algn="l" marL="342900" indent="-342900">
+              <a:spcAft>
+                <a:spcPts val="800"/>
+              </a:spcAft>
+              <a:buSzPct val="100000"/>
+              <a:buChar char="•"/>
+            </a:pPr>
+            <a:r>
+              <a:rPr lang="en-US" sz="2000" dirty="0">
+                <a:solidFill>
+                  <a:srgbClr val="111111"/>
+                </a:solidFill>
+                <a:latin typeface="Calibri" pitchFamily="34" charset="0"/>
+                <a:ea typeface="Calibri" pitchFamily="34" charset="-122"/>
+                <a:cs typeface="Calibri" pitchFamily="34" charset="-120"/>
+              </a:rPr>
+              <a:t>Without the projector (Activity 2): describe the last heavy rain.</a:t>
+            </a:r>
+            <a:endParaRPr lang="en-US" sz="2000" dirty="0"/>
+          </a:p>
+          <a:p>
+            <a:pPr algn="l" marL="342900" indent="-342900">
+              <a:spcAft>
+                <a:spcPts val="800"/>
+              </a:spcAft>
+              <a:buSzPct val="100000"/>
+              <a:buChar char="•"/>
+            </a:pPr>
+            <a:r>
+              <a:rPr lang="en-US" sz="2000" dirty="0">
+                <a:solidFill>
+                  <a:srgbClr val="111111"/>
+                </a:solidFill>
+                <a:latin typeface="Calibri" pitchFamily="34" charset="0"/>
+                <a:ea typeface="Calibri" pitchFamily="34" charset="-122"/>
+                <a:cs typeface="Calibri" pitchFamily="34" charset="-120"/>
+              </a:rPr>
+              <a:t>Without the projector (Activity 3): describe a Harmattan morning.</a:t>
+            </a:r>
+            <a:endParaRPr lang="en-US" sz="2000" dirty="0"/>
+          </a:p>
+          <a:p>
+            <a:pPr algn="l" marL="342900" indent="-342900">
+              <a:spcAft>
+                <a:spcPts val="800"/>
+              </a:spcAft>
+              <a:buSzPct val="100000"/>
+              <a:buChar char="•"/>
+            </a:pPr>
+            <a:r>
+              <a:rPr lang="en-US" sz="2000" dirty="0">
+                <a:solidFill>
+                  <a:srgbClr val="111111"/>
+                </a:solidFill>
+                <a:latin typeface="Calibri" pitchFamily="34" charset="0"/>
+                <a:ea typeface="Calibri" pitchFamily="34" charset="-122"/>
+                <a:cs typeface="Calibri" pitchFamily="34" charset="-120"/>
+              </a:rPr>
+              <a:t>Without the projector (Activity 4): recall floods in Garoua or Maroua.</a:t>
+            </a:r>
+            <a:endParaRPr lang="en-US" sz="2000" dirty="0"/>
+          </a:p>
+          <a:p>
+            <a:pPr algn="l" marL="342900" indent="-342900">
+              <a:spcAft>
+                <a:spcPts val="800"/>
+              </a:spcAft>
+              <a:buSzPct val="100000"/>
+              <a:buChar char="•"/>
+            </a:pPr>
+            <a:r>
+              <a:rPr lang="en-US" sz="2000" dirty="0">
+                <a:solidFill>
+                  <a:srgbClr val="111111"/>
+                </a:solidFill>
+                <a:latin typeface="Calibri" pitchFamily="34" charset="0"/>
+                <a:ea typeface="Calibri" pitchFamily="34" charset="-122"/>
+                <a:cs typeface="Calibri" pitchFamily="34" charset="-120"/>
+              </a:rPr>
+              <a:t>Without the projector (Activity 5): list measures for the family.</a:t>
+            </a:r>
+            <a:endParaRPr lang="en-US" sz="2000" dirty="0"/>
           </a:p>
         </p:txBody>
       </p:sp>
@@ -19555,7 +21720,7 @@
             <a:pPr algn="ctr"/>
             <a:fld id="{F7021451-1387-4CA6-816F-3879F97B5CBC}" type="slidenum">
               <a:rPr b="1" lang="en-US"/>
-              <a:t>5</a:t>
+              <a:t>55</a:t>
             </a:fld>
             <a:endParaRPr lang="en-US"/>
           </a:p>
@@ -19569,9 +21734,9 @@
 </p:sld>
 </file>
 
-<file path=ppt/slides/slide50.xml><?xml version="1.0" encoding="utf-8"?>
+<file path=ppt/slides/slide56.xml><?xml version="1.0" encoding="utf-8"?>
 <p:sld xmlns:a="http://schemas.openxmlformats.org/drawingml/2006/main" xmlns:r="http://schemas.openxmlformats.org/officeDocument/2006/relationships" xmlns:p="http://schemas.openxmlformats.org/presentationml/2006/main">
-  <p:cSld name="Slide 50">
+  <p:cSld name="Slide 56">
     <p:spTree>
       <p:nvGrpSpPr>
         <p:cNvPr id="1" name=""/>
@@ -19619,7 +21784,7 @@
                 <a:ea typeface="Calibri" pitchFamily="34" charset="-122"/>
                 <a:cs typeface="Calibri" pitchFamily="34" charset="-120"/>
               </a:rPr>
-              <a:t>TEACHER'S NOTE</a:t>
+              <a:t>REFERENCES</a:t>
             </a:r>
             <a:endParaRPr lang="en-US" sz="1400" dirty="0"/>
           </a:p>
@@ -19642,7 +21807,7 @@
         <p:spPr>
           <a:xfrm>
             <a:off x="0" y="658368"/>
-            <a:ext cx="3840480" cy="5833872"/>
+            <a:ext cx="2468880" cy="5833872"/>
           </a:xfrm>
           <a:prstGeom prst="rect">
             <a:avLst/>
@@ -19657,8 +21822,8 @@
         </p:nvSpPr>
         <p:spPr>
           <a:xfrm>
-            <a:off x="4069080" y="1005840"/>
-            <a:ext cx="7802575" cy="731520"/>
+            <a:off x="2697480" y="1005840"/>
+            <a:ext cx="9174175" cy="731520"/>
           </a:xfrm>
           <a:prstGeom prst="rect">
             <a:avLst/>
@@ -19684,7 +21849,7 @@
                 <a:ea typeface="Times New Roman" pitchFamily="34" charset="-122"/>
                 <a:cs typeface="Times New Roman" pitchFamily="34" charset="-120"/>
               </a:rPr>
-              <a:t>Teacher's Note</a:t>
+              <a:t>References</a:t>
             </a:r>
             <a:endParaRPr lang="en-US" sz="3600" dirty="0"/>
           </a:p>
@@ -19698,8 +21863,8 @@
         </p:nvSpPr>
         <p:spPr>
           <a:xfrm>
-            <a:off x="4069080" y="1783080"/>
-            <a:ext cx="7802575" cy="4663440"/>
+            <a:off x="2697480" y="1783080"/>
+            <a:ext cx="9174175" cy="4663440"/>
           </a:xfrm>
           <a:prstGeom prst="rect">
             <a:avLst/>
@@ -19719,7 +21884,7 @@
               <a:buChar char="•"/>
             </a:pPr>
             <a:r>
-              <a:rPr lang="en-US" sz="2000" dirty="0">
+              <a:rPr lang="en-US" sz="1800" dirty="0">
                 <a:solidFill>
                   <a:srgbClr val="111111"/>
                 </a:solidFill>
@@ -19727,9 +21892,9 @@
                 <a:ea typeface="Calibri" pitchFamily="34" charset="-122"/>
                 <a:cs typeface="Calibri" pitchFamily="34" charset="-120"/>
               </a:rPr>
-              <a:t>Timing: Homework correction, plan, objectives 8 min | Recall, situation, action 10 min | 5 activities 30 min | Board summary (copying) 30 min | Evaluation, remediation 10 min | Homework, next lesson 5 min | Logbook 7 min</a:t>
-            </a:r>
-            <a:endParaRPr lang="en-US" sz="2000" dirty="0"/>
+              <a:t>Geography Syllabus, Forms I–V, MINESEC (2023) — Form 1, Module 3: Protection from the Wrath of Nature.</a:t>
+            </a:r>
+            <a:endParaRPr lang="en-US" sz="1800" dirty="0"/>
           </a:p>
           <a:p>
             <a:pPr algn="l" marL="342900" indent="-342900">
@@ -19740,7 +21905,7 @@
               <a:buChar char="•"/>
             </a:pPr>
             <a:r>
-              <a:rPr lang="en-US" sz="2000" dirty="0">
+              <a:rPr lang="en-US" sz="1800" dirty="0">
                 <a:solidFill>
                   <a:srgbClr val="111111"/>
                 </a:solidFill>
@@ -19748,9 +21913,9 @@
                 <a:ea typeface="Calibri" pitchFamily="34" charset="-122"/>
                 <a:cs typeface="Calibri" pitchFamily="34" charset="-120"/>
               </a:rPr>
-              <a:t>Without the projector (Activity 1): draw the map of Cameroon.</a:t>
-            </a:r>
-            <a:endParaRPr lang="en-US" sz="2000" dirty="0"/>
+              <a:t>Photo, Activity 2: “Heavy rain. Johannesburg, South Africa” by varfolomeev, CC BY-NC 2.0, via Flickr (https://www.flickr.com/photos/45427632@N02/49745935146)</a:t>
+            </a:r>
+            <a:endParaRPr lang="en-US" sz="1800" dirty="0"/>
           </a:p>
           <a:p>
             <a:pPr algn="l" marL="342900" indent="-342900">
@@ -19761,7 +21926,7 @@
               <a:buChar char="•"/>
             </a:pPr>
             <a:r>
-              <a:rPr lang="en-US" sz="2000" dirty="0">
+              <a:rPr lang="en-US" sz="1800" dirty="0">
                 <a:solidFill>
                   <a:srgbClr val="111111"/>
                 </a:solidFill>
@@ -19769,9 +21934,9 @@
                 <a:ea typeface="Calibri" pitchFamily="34" charset="-122"/>
                 <a:cs typeface="Calibri" pitchFamily="34" charset="-120"/>
               </a:rPr>
-              <a:t>Without the projector (Activity 2): describe the last heavy rain.</a:t>
-            </a:r>
-            <a:endParaRPr lang="en-US" sz="2000" dirty="0"/>
+              <a:t>Photo, Activity 3: “Bamenda sob a poeira do Harmattan” by carlosoliveirareis, CC BY-NC-SA 2.0, via Flickr (https://www.flickr.com/photos/54218923@N00/387054136)</a:t>
+            </a:r>
+            <a:endParaRPr lang="en-US" sz="1800" dirty="0"/>
           </a:p>
           <a:p>
             <a:pPr algn="l" marL="342900" indent="-342900">
@@ -19782,7 +21947,7 @@
               <a:buChar char="•"/>
             </a:pPr>
             <a:r>
-              <a:rPr lang="en-US" sz="2000" dirty="0">
+              <a:rPr lang="en-US" sz="1800" dirty="0">
                 <a:solidFill>
                   <a:srgbClr val="111111"/>
                 </a:solidFill>
@@ -19790,9 +21955,9 @@
                 <a:ea typeface="Calibri" pitchFamily="34" charset="-122"/>
                 <a:cs typeface="Calibri" pitchFamily="34" charset="-120"/>
               </a:rPr>
-              <a:t>Without the projector (Activity 3): describe a Harmattan morning.</a:t>
-            </a:r>
-            <a:endParaRPr lang="en-US" sz="2000" dirty="0"/>
+              <a:t>Photo, Activity 4: “Flood in Accra” by Stig Nygaard, CC BY 2.0, via Flickr (https://www.flickr.com/photos/10259776@N00/181742000)</a:t>
+            </a:r>
+            <a:endParaRPr lang="en-US" sz="1800" dirty="0"/>
           </a:p>
           <a:p>
             <a:pPr algn="l" marL="342900" indent="-342900">
@@ -19803,7 +21968,7 @@
               <a:buChar char="•"/>
             </a:pPr>
             <a:r>
-              <a:rPr lang="en-US" sz="2000" dirty="0">
+              <a:rPr lang="en-US" sz="1800" dirty="0">
                 <a:solidFill>
                   <a:srgbClr val="111111"/>
                 </a:solidFill>
@@ -19811,9 +21976,9 @@
                 <a:ea typeface="Calibri" pitchFamily="34" charset="-122"/>
                 <a:cs typeface="Calibri" pitchFamily="34" charset="-120"/>
               </a:rPr>
-              <a:t>Without the projector (Activity 4): recall floods in Garoua or Maroua.</a:t>
-            </a:r>
-            <a:endParaRPr lang="en-US" sz="2000" dirty="0"/>
+              <a:t>Photo, Activity 5: “Nyando Climate Smart Villages Media Visit” by CGIAR Climate, CC BY-NC-SA 2.0, via Flickr (https://www.flickr.com/photos/55227776@N04/9720026817)</a:t>
+            </a:r>
+            <a:endParaRPr lang="en-US" sz="1800" dirty="0"/>
           </a:p>
           <a:p>
             <a:pPr algn="l" marL="342900" indent="-342900">
@@ -19824,7 +21989,7 @@
               <a:buChar char="•"/>
             </a:pPr>
             <a:r>
-              <a:rPr lang="en-US" sz="2000" dirty="0">
+              <a:rPr lang="en-US" sz="1800" dirty="0">
                 <a:solidFill>
                   <a:srgbClr val="111111"/>
                 </a:solidFill>
@@ -19832,209 +21997,10 @@
                 <a:ea typeface="Calibri" pitchFamily="34" charset="-122"/>
                 <a:cs typeface="Calibri" pitchFamily="34" charset="-120"/>
               </a:rPr>
-              <a:t>Without the projector (Activity 5): list measures for the family.</a:t>
-            </a:r>
-            <a:endParaRPr lang="en-US" sz="2000" dirty="0"/>
-          </a:p>
-        </p:txBody>
-      </p:sp>
-      <p:sp>
-        <p:nvSpPr>
-          <p:cNvPr id="25" name="Slide Number Placeholder 0"/>
-          <p:cNvSpPr>
-            <a:spLocks noGrp="1"/>
-          </p:cNvSpPr>
-          <p:nvPr>
-            <p:ph type="sldNum" sz="quarter" idx="4294967295"/>
-          </p:nvPr>
-        </p:nvSpPr>
-        <p:spPr>
-          <a:xfrm>
-            <a:off x="27432" y="91440"/>
-            <a:ext cx="585216" cy="475488"/>
-          </a:xfrm>
-          <a:prstGeom prst="rect">
-            <a:avLst/>
-          </a:prstGeom>
-          <a:extLst>
-            <a:ext uri="{C572A759-6A51-4108-AA02-DFA0A04FC94B}">
-              <ma14:wrappingTextBoxFlag xmlns:ma14="http://schemas.microsoft.com/office/mac/drawingml/2011/main" val="0"/>
-            </a:ext>
-          </a:extLst>
-        </p:spPr>
-        <p:txBody>
-          <a:bodyPr/>
-          <a:lstStyle>
-            <a:lvl1pPr>
-              <a:defRPr sz="2000">
-                <a:solidFill>
-                  <a:srgbClr val="FFFFFF"/>
-                </a:solidFill>
-                <a:latin typeface="Calibri"/>
-                <a:ea typeface="Calibri"/>
-                <a:cs typeface="Calibri"/>
-              </a:defRPr>
-            </a:lvl1pPr>
-          </a:lstStyle>
-          <a:p>
-            <a:pPr algn="ctr"/>
-            <a:fld id="{F7021451-1387-4CA6-816F-3879F97B5CBC}" type="slidenum">
-              <a:rPr b="1" lang="en-US"/>
-              <a:t>50</a:t>
-            </a:fld>
-            <a:endParaRPr lang="en-US"/>
-          </a:p>
-        </p:txBody>
-      </p:sp>
-    </p:spTree>
-  </p:cSld>
-  <p:clrMapOvr>
-    <a:masterClrMapping/>
-  </p:clrMapOvr>
-</p:sld>
-</file>
-
-<file path=ppt/slides/slide51.xml><?xml version="1.0" encoding="utf-8"?>
-<p:sld xmlns:a="http://schemas.openxmlformats.org/drawingml/2006/main" xmlns:r="http://schemas.openxmlformats.org/officeDocument/2006/relationships" xmlns:p="http://schemas.openxmlformats.org/presentationml/2006/main">
-  <p:cSld name="Slide 51">
-    <p:spTree>
-      <p:nvGrpSpPr>
-        <p:cNvPr id="1" name=""/>
-        <p:cNvGrpSpPr/>
-        <p:nvPr/>
-      </p:nvGrpSpPr>
-      <p:grpSpPr>
-        <a:xfrm>
-          <a:off x="0" y="0"/>
-          <a:ext cx="0" cy="0"/>
-          <a:chOff x="0" y="0"/>
-          <a:chExt cx="0" cy="0"/>
-        </a:xfrm>
-      </p:grpSpPr>
-      <p:sp>
-        <p:nvSpPr>
-          <p:cNvPr id="2" name="Text 0"/>
-          <p:cNvSpPr/>
-          <p:nvPr/>
-        </p:nvSpPr>
-        <p:spPr>
-          <a:xfrm>
-            <a:off x="457200" y="713232"/>
-            <a:ext cx="11368735" cy="274320"/>
-          </a:xfrm>
-          <a:prstGeom prst="rect">
-            <a:avLst/>
-          </a:prstGeom>
-          <a:noFill/>
-          <a:ln/>
-        </p:spPr>
-        <p:txBody>
-          <a:bodyPr wrap="square" lIns="0" tIns="0" rIns="0" bIns="0" rtlCol="0" anchor="ctr"/>
-          <a:lstStyle/>
-          <a:p>
-            <a:pPr algn="r" indent="0" marL="0">
-              <a:buNone/>
-            </a:pPr>
-            <a:r>
-              <a:rPr lang="en-US" sz="1400" b="1" dirty="0">
-                <a:solidFill>
-                  <a:srgbClr val="1C3F6E"/>
-                </a:solidFill>
-                <a:latin typeface="Calibri" pitchFamily="34" charset="0"/>
-                <a:ea typeface="Calibri" pitchFamily="34" charset="-122"/>
-                <a:cs typeface="Calibri" pitchFamily="34" charset="-120"/>
-              </a:rPr>
-              <a:t>REFERENCES</a:t>
-            </a:r>
-            <a:endParaRPr lang="en-US" sz="1400" dirty="0"/>
-          </a:p>
-        </p:txBody>
-      </p:sp>
-      <p:pic>
-        <p:nvPicPr>
-          <p:cNvPr id="3" name="Image 0" descr="/home/claude/f4/img/minesec_sheet.png">    </p:cNvPr>
-          <p:cNvPicPr>
-            <a:picLocks noChangeAspect="1"/>
-          </p:cNvPicPr>
-          <p:nvPr/>
-        </p:nvPicPr>
-        <p:blipFill>
-          <a:blip r:embed="rId1"/>
-          <a:stretch>
-            <a:fillRect/>
-          </a:stretch>
-        </p:blipFill>
-        <p:spPr>
-          <a:xfrm>
-            <a:off x="0" y="658368"/>
-            <a:ext cx="3840480" cy="5833872"/>
-          </a:xfrm>
-          <a:prstGeom prst="rect">
-            <a:avLst/>
-          </a:prstGeom>
-        </p:spPr>
-      </p:pic>
-      <p:sp>
-        <p:nvSpPr>
-          <p:cNvPr id="4" name="Text 1"/>
-          <p:cNvSpPr/>
-          <p:nvPr/>
-        </p:nvSpPr>
-        <p:spPr>
-          <a:xfrm>
-            <a:off x="4069080" y="1005840"/>
-            <a:ext cx="7802575" cy="731520"/>
-          </a:xfrm>
-          <a:prstGeom prst="rect">
-            <a:avLst/>
-          </a:prstGeom>
-          <a:noFill/>
-          <a:ln/>
-        </p:spPr>
-        <p:txBody>
-          <a:bodyPr wrap="square" lIns="0" tIns="0" rIns="0" bIns="0" rtlCol="0" anchor="ctr">
-            <a:normAutofit/>
-          </a:bodyPr>
-          <a:lstStyle/>
-          <a:p>
-            <a:pPr algn="ctr" indent="0" marL="0">
-              <a:buNone/>
-            </a:pPr>
-            <a:r>
-              <a:rPr lang="en-US" sz="3600" b="1" dirty="0">
-                <a:solidFill>
-                  <a:srgbClr val="990011"/>
-                </a:solidFill>
-                <a:latin typeface="Times New Roman" pitchFamily="34" charset="0"/>
-                <a:ea typeface="Times New Roman" pitchFamily="34" charset="-122"/>
-                <a:cs typeface="Times New Roman" pitchFamily="34" charset="-120"/>
-              </a:rPr>
-              <a:t>References</a:t>
-            </a:r>
-            <a:endParaRPr lang="en-US" sz="3600" dirty="0"/>
-          </a:p>
-        </p:txBody>
-      </p:sp>
-      <p:sp>
-        <p:nvSpPr>
-          <p:cNvPr id="5" name="Text 2"/>
-          <p:cNvSpPr/>
-          <p:nvPr/>
-        </p:nvSpPr>
-        <p:spPr>
-          <a:xfrm>
-            <a:off x="4069080" y="1783080"/>
-            <a:ext cx="7802575" cy="4663440"/>
-          </a:xfrm>
-          <a:prstGeom prst="rect">
-            <a:avLst/>
-          </a:prstGeom>
-          <a:noFill/>
-          <a:ln/>
-        </p:spPr>
-        <p:txBody>
-          <a:bodyPr wrap="square" lIns="0" tIns="0" rIns="0" bIns="0" rtlCol="0" anchor="t"/>
-          <a:lstStyle/>
+              <a:t>Photo, board summary (Heat waves): “Imagine a world without trees” by aloshbennett, CC BY 2.0, via Flickr (https://www.flickr.com/photos/13203757@N00/3480223314)</a:t>
+            </a:r>
+            <a:endParaRPr lang="en-US" sz="1800" dirty="0"/>
+          </a:p>
           <a:p>
             <a:pPr algn="l" marL="342900" indent="-342900">
               <a:spcAft>
@@ -20052,111 +22018,6 @@
                 <a:ea typeface="Calibri" pitchFamily="34" charset="-122"/>
                 <a:cs typeface="Calibri" pitchFamily="34" charset="-120"/>
               </a:rPr>
-              <a:t>Geography Syllabus, Forms I–V, MINESEC (2023) — Form 1, Module 3: Protection from the Wrath of Nature.</a:t>
-            </a:r>
-            <a:endParaRPr lang="en-US" sz="1800" dirty="0"/>
-          </a:p>
-          <a:p>
-            <a:pPr algn="l" marL="342900" indent="-342900">
-              <a:spcAft>
-                <a:spcPts val="800"/>
-              </a:spcAft>
-              <a:buSzPct val="100000"/>
-              <a:buChar char="•"/>
-            </a:pPr>
-            <a:r>
-              <a:rPr lang="en-US" sz="1800" dirty="0">
-                <a:solidFill>
-                  <a:srgbClr val="111111"/>
-                </a:solidFill>
-                <a:latin typeface="Calibri" pitchFamily="34" charset="0"/>
-                <a:ea typeface="Calibri" pitchFamily="34" charset="-122"/>
-                <a:cs typeface="Calibri" pitchFamily="34" charset="-120"/>
-              </a:rPr>
-              <a:t>Photo, Activity 2: “Heavy rain. Johannesburg, South Africa” by varfolomeev, CC BY-NC 2.0, via Flickr (https://www.flickr.com/photos/45427632@N02/49745935146)</a:t>
-            </a:r>
-            <a:endParaRPr lang="en-US" sz="1800" dirty="0"/>
-          </a:p>
-          <a:p>
-            <a:pPr algn="l" marL="342900" indent="-342900">
-              <a:spcAft>
-                <a:spcPts val="800"/>
-              </a:spcAft>
-              <a:buSzPct val="100000"/>
-              <a:buChar char="•"/>
-            </a:pPr>
-            <a:r>
-              <a:rPr lang="en-US" sz="1800" dirty="0">
-                <a:solidFill>
-                  <a:srgbClr val="111111"/>
-                </a:solidFill>
-                <a:latin typeface="Calibri" pitchFamily="34" charset="0"/>
-                <a:ea typeface="Calibri" pitchFamily="34" charset="-122"/>
-                <a:cs typeface="Calibri" pitchFamily="34" charset="-120"/>
-              </a:rPr>
-              <a:t>Photo, Activity 3: “Bamenda sob a poeira do Harmattan” by carlosoliveirareis, CC BY-NC-SA 2.0, via Flickr (https://www.flickr.com/photos/54218923@N00/387054136)</a:t>
-            </a:r>
-            <a:endParaRPr lang="en-US" sz="1800" dirty="0"/>
-          </a:p>
-          <a:p>
-            <a:pPr algn="l" marL="342900" indent="-342900">
-              <a:spcAft>
-                <a:spcPts val="800"/>
-              </a:spcAft>
-              <a:buSzPct val="100000"/>
-              <a:buChar char="•"/>
-            </a:pPr>
-            <a:r>
-              <a:rPr lang="en-US" sz="1800" dirty="0">
-                <a:solidFill>
-                  <a:srgbClr val="111111"/>
-                </a:solidFill>
-                <a:latin typeface="Calibri" pitchFamily="34" charset="0"/>
-                <a:ea typeface="Calibri" pitchFamily="34" charset="-122"/>
-                <a:cs typeface="Calibri" pitchFamily="34" charset="-120"/>
-              </a:rPr>
-              <a:t>Photo, Activity 4: “Flood in Accra” by Stig Nygaard, CC BY 2.0, via Flickr (https://www.flickr.com/photos/10259776@N00/181742000)</a:t>
-            </a:r>
-            <a:endParaRPr lang="en-US" sz="1800" dirty="0"/>
-          </a:p>
-          <a:p>
-            <a:pPr algn="l" marL="342900" indent="-342900">
-              <a:spcAft>
-                <a:spcPts val="800"/>
-              </a:spcAft>
-              <a:buSzPct val="100000"/>
-              <a:buChar char="•"/>
-            </a:pPr>
-            <a:r>
-              <a:rPr lang="en-US" sz="1800" dirty="0">
-                <a:solidFill>
-                  <a:srgbClr val="111111"/>
-                </a:solidFill>
-                <a:latin typeface="Calibri" pitchFamily="34" charset="0"/>
-                <a:ea typeface="Calibri" pitchFamily="34" charset="-122"/>
-                <a:cs typeface="Calibri" pitchFamily="34" charset="-120"/>
-              </a:rPr>
-              <a:t>Photo, Activity 5: “Nyando Climate Smart Villages Media Visit” by CGIAR Climate, CC BY-NC-SA 2.0, via Flickr (https://www.flickr.com/photos/55227776@N04/9720026817)</a:t>
-            </a:r>
-            <a:endParaRPr lang="en-US" sz="1800" dirty="0"/>
-          </a:p>
-          <a:p>
-            <a:pPr algn="l" marL="342900" indent="-342900">
-              <a:spcAft>
-                <a:spcPts val="800"/>
-              </a:spcAft>
-              <a:buSzPct val="100000"/>
-              <a:buChar char="•"/>
-            </a:pPr>
-            <a:r>
-              <a:rPr lang="en-US" sz="1800" dirty="0">
-                <a:solidFill>
-                  <a:srgbClr val="111111"/>
-                </a:solidFill>
-                <a:latin typeface="Calibri" pitchFamily="34" charset="0"/>
-                <a:ea typeface="Calibri" pitchFamily="34" charset="-122"/>
-                <a:cs typeface="Calibri" pitchFamily="34" charset="-120"/>
-              </a:rPr>
               <a:t>Diagrams and animations: drawn for this lesson (Geography Department).</a:t>
             </a:r>
             <a:endParaRPr lang="en-US" sz="1800" dirty="0"/>
@@ -20205,7 +22066,7 @@
             <a:pPr algn="ctr"/>
             <a:fld id="{F7021451-1387-4CA6-816F-3879F97B5CBC}" type="slidenum">
               <a:rPr b="1" lang="en-US"/>
-              <a:t>51</a:t>
+              <a:t>56</a:t>
             </a:fld>
             <a:endParaRPr lang="en-US"/>
           </a:p>
@@ -20729,7 +22590,7 @@
                 <a:ea typeface="Times New Roman" pitchFamily="34" charset="-122"/>
                 <a:cs typeface="Times New Roman" pitchFamily="34" charset="-120"/>
               </a:rPr>
-              <a:t>Identify the atmospheric disturbances of Cameroon.</a:t>
+              <a:t>Identify the atmospheric disturbances of Cameroon and their manifestations.</a:t>
             </a:r>
             <a:endParaRPr lang="en-US" sz="4000" dirty="0"/>
           </a:p>
@@ -20751,7 +22612,7 @@
                 <a:ea typeface="Times New Roman" pitchFamily="34" charset="-122"/>
                 <a:cs typeface="Times New Roman" pitchFamily="34" charset="-120"/>
               </a:rPr>
-              <a:t>Describe their manifestations and consequences.</a:t>
+              <a:t>Give their consequences.</a:t>
             </a:r>
             <a:endParaRPr lang="en-US" sz="4000" dirty="0"/>
           </a:p>

--- a/lecons/F1/16_F1_M3_FS01_Atmospheric_Disturbances_in_Cameroon.pptx
+++ b/lecons/F1/16_F1_M3_FS01_Atmospheric_Disturbances_in_Cameroon.pptx
@@ -13688,7 +13688,7 @@
               <a:buNone/>
             </a:pPr>
             <a:r>
-              <a:rPr lang="en-US" sz="4000" b="1" dirty="0">
+              <a:rPr lang="en-US" sz="3200" b="1" dirty="0">
                 <a:solidFill>
                   <a:srgbClr val="111111"/>
                 </a:solidFill>
@@ -13698,7 +13698,7 @@
               </a:rPr>
               <a:t>Topic: Protection against the Wrath of Nature</a:t>
             </a:r>
-            <a:endParaRPr lang="en-US" sz="4000" dirty="0"/>
+            <a:endParaRPr lang="en-US" sz="3200" dirty="0"/>
           </a:p>
           <a:p>
             <a:pPr algn="l" indent="0" marL="0">
@@ -13708,7 +13708,7 @@
               <a:buNone/>
             </a:pPr>
             <a:r>
-              <a:rPr lang="en-US" sz="4000" b="1" dirty="0">
+              <a:rPr lang="en-US" sz="3200" b="1" dirty="0">
                 <a:solidFill>
                   <a:srgbClr val="111111"/>
                 </a:solidFill>
@@ -13718,7 +13718,7 @@
               </a:rPr>
               <a:t>Sub-topic: Climatic Disturbances</a:t>
             </a:r>
-            <a:endParaRPr lang="en-US" sz="4000" dirty="0"/>
+            <a:endParaRPr lang="en-US" sz="3200" dirty="0"/>
           </a:p>
           <a:p>
             <a:pPr algn="l" indent="0" marL="0">
@@ -13728,7 +13728,7 @@
               <a:buNone/>
             </a:pPr>
             <a:r>
-              <a:rPr lang="en-US" sz="4000" b="1" dirty="0">
+              <a:rPr lang="en-US" sz="3200" b="1" dirty="0">
                 <a:solidFill>
                   <a:srgbClr val="990011"/>
                 </a:solidFill>
@@ -13738,7 +13738,7 @@
               </a:rPr>
               <a:t>Further Study 1: Atmospheric Disturbances in Cameroon</a:t>
             </a:r>
-            <a:endParaRPr lang="en-US" sz="4000" dirty="0"/>
+            <a:endParaRPr lang="en-US" sz="3200" dirty="0"/>
           </a:p>
         </p:txBody>
       </p:sp>

--- a/lecons/F1/16_F1_M3_FS01_Atmospheric_Disturbances_in_Cameroon.pptx
+++ b/lecons/F1/16_F1_M3_FS01_Atmospheric_Disturbances_in_Cameroon.pptx
@@ -3461,7 +3461,7 @@
           <a:p>
             <a:r>
               <a:rPr lang="en-US" dirty="0"/>
-              <a:t>Before we start the new lesson, let us correct the homework I gave you at the end of Lesson 9: Atmospheric Disturbances. The question was: Write three safety rules for your family during a thunderstorm. Take out your exercise books.</a:t>
+              <a:t>Before we start the new lesson, let us correct the homework I gave you at the end of Lesson 9: Atmospheric Disturbances. The question was: Name two atmospheric disturbances that affect Cameroon. Take out your exercise books.</a:t>
             </a:r>
             <a:endParaRPr lang="en-US" dirty="0"/>
           </a:p>
@@ -4429,7 +4429,7 @@
           <a:p>
             <a:r>
               <a:rPr lang="en-US" dirty="0"/>
-              <a:t>Here is a good answer. Stay inside a building; do not shelter under a tree; unplug electrical appliances and stay away from water and metal objects. Compare it with your own answer and correct your work in red.</a:t>
+              <a:t>Here is a good answer. Thunderstorms with torrential rain and dust storms (Harmattan). Compare it with your own answer and correct your work in red.</a:t>
             </a:r>
             <a:endParaRPr lang="en-US" dirty="0"/>
           </a:p>
@@ -4517,7 +4517,7 @@
           <a:p>
             <a:r>
               <a:rPr lang="en-US" dirty="0"/>
-              <a:t>For your homework: Ask an elder about a flood or a violent storm in your town and write what happened. We shall correct it at the beginning of our next lesson.</a:t>
+              <a:t>For your homework: Name the four steps of rain formation. We shall correct it at the beginning of our next lesson.</a:t>
             </a:r>
             <a:endParaRPr lang="en-US" dirty="0"/>
           </a:p>
@@ -15388,7 +15388,7 @@
                 <a:ea typeface="Times New Roman" pitchFamily="34" charset="-122"/>
                 <a:cs typeface="Times New Roman" pitchFamily="34" charset="-120"/>
               </a:rPr>
-              <a:t>Write three safety rules for your family during a thunderstorm.</a:t>
+              <a:t>Name two atmospheric disturbances that affect Cameroon.</a:t>
             </a:r>
             <a:endParaRPr lang="en-US" sz="4000" dirty="0"/>
           </a:p>
@@ -18138,7 +18138,7 @@
                 <a:ea typeface="Times New Roman" pitchFamily="34" charset="-122"/>
                 <a:cs typeface="Times New Roman" pitchFamily="34" charset="-120"/>
               </a:rPr>
-              <a:t>Stay inside a building; do not shelter under a tree; unplug electrical appliances and stay away from water and metal objects.</a:t>
+              <a:t>Thunderstorms with torrential rain and dust storms (Harmattan).</a:t>
             </a:r>
             <a:endParaRPr lang="en-US" sz="4000" dirty="0"/>
           </a:p>
@@ -18357,7 +18357,7 @@
                 <a:ea typeface="Times New Roman" pitchFamily="34" charset="-122"/>
                 <a:cs typeface="Times New Roman" pitchFamily="34" charset="-120"/>
               </a:rPr>
-              <a:t>Ask an elder about a flood or a violent storm in your town and write what happened.</a:t>
+              <a:t>Name the four steps of rain formation.</a:t>
             </a:r>
             <a:endParaRPr lang="en-US" sz="4000" dirty="0"/>
           </a:p>
@@ -21021,7 +21021,7 @@
                           <a:ea typeface="Calibri" pitchFamily="34" charset="-122"/>
                           <a:cs typeface="Calibri" pitchFamily="34" charset="-120"/>
                         </a:rPr>
-                        <a:t>Ask an elder about a flood or a violent storm in your town and write what happened.</a:t>
+                        <a:t>Name the four steps of rain formation.</a:t>
                       </a:r>
                       <a:endParaRPr lang="en-US" sz="1600" dirty="0">
                         <a:latin typeface="Calibri" charset="0"/>
